--- a/04_OpenFoam/openFoam_beta.pptx
+++ b/04_OpenFoam/openFoam_beta.pptx
@@ -269,7 +269,7 @@
           <a:p>
             <a:fld id="{9D4686FF-3DC0-4D03-9102-64E826D8EE6E}" type="datetimeFigureOut">
               <a:rPr lang="LID4096" smtClean="0"/>
-              <a:t>09/14/2026</a:t>
+              <a:t>09/15/2026</a:t>
             </a:fld>
             <a:endParaRPr lang="LID4096"/>
           </a:p>
@@ -469,7 +469,7 @@
           <a:p>
             <a:fld id="{9D4686FF-3DC0-4D03-9102-64E826D8EE6E}" type="datetimeFigureOut">
               <a:rPr lang="LID4096" smtClean="0"/>
-              <a:t>09/14/2026</a:t>
+              <a:t>09/15/2026</a:t>
             </a:fld>
             <a:endParaRPr lang="LID4096"/>
           </a:p>
@@ -679,7 +679,7 @@
           <a:p>
             <a:fld id="{9D4686FF-3DC0-4D03-9102-64E826D8EE6E}" type="datetimeFigureOut">
               <a:rPr lang="LID4096" smtClean="0"/>
-              <a:t>09/14/2026</a:t>
+              <a:t>09/15/2026</a:t>
             </a:fld>
             <a:endParaRPr lang="LID4096"/>
           </a:p>
@@ -879,7 +879,7 @@
           <a:p>
             <a:fld id="{9D4686FF-3DC0-4D03-9102-64E826D8EE6E}" type="datetimeFigureOut">
               <a:rPr lang="LID4096" smtClean="0"/>
-              <a:t>09/14/2026</a:t>
+              <a:t>09/15/2026</a:t>
             </a:fld>
             <a:endParaRPr lang="LID4096"/>
           </a:p>
@@ -1155,7 +1155,7 @@
           <a:p>
             <a:fld id="{9D4686FF-3DC0-4D03-9102-64E826D8EE6E}" type="datetimeFigureOut">
               <a:rPr lang="LID4096" smtClean="0"/>
-              <a:t>09/14/2026</a:t>
+              <a:t>09/15/2026</a:t>
             </a:fld>
             <a:endParaRPr lang="LID4096"/>
           </a:p>
@@ -1423,7 +1423,7 @@
           <a:p>
             <a:fld id="{9D4686FF-3DC0-4D03-9102-64E826D8EE6E}" type="datetimeFigureOut">
               <a:rPr lang="LID4096" smtClean="0"/>
-              <a:t>09/14/2026</a:t>
+              <a:t>09/15/2026</a:t>
             </a:fld>
             <a:endParaRPr lang="LID4096"/>
           </a:p>
@@ -1838,7 +1838,7 @@
           <a:p>
             <a:fld id="{9D4686FF-3DC0-4D03-9102-64E826D8EE6E}" type="datetimeFigureOut">
               <a:rPr lang="LID4096" smtClean="0"/>
-              <a:t>09/14/2026</a:t>
+              <a:t>09/15/2026</a:t>
             </a:fld>
             <a:endParaRPr lang="LID4096"/>
           </a:p>
@@ -1980,7 +1980,7 @@
           <a:p>
             <a:fld id="{9D4686FF-3DC0-4D03-9102-64E826D8EE6E}" type="datetimeFigureOut">
               <a:rPr lang="LID4096" smtClean="0"/>
-              <a:t>09/14/2026</a:t>
+              <a:t>09/15/2026</a:t>
             </a:fld>
             <a:endParaRPr lang="LID4096"/>
           </a:p>
@@ -2093,7 +2093,7 @@
           <a:p>
             <a:fld id="{9D4686FF-3DC0-4D03-9102-64E826D8EE6E}" type="datetimeFigureOut">
               <a:rPr lang="LID4096" smtClean="0"/>
-              <a:t>09/14/2026</a:t>
+              <a:t>09/15/2026</a:t>
             </a:fld>
             <a:endParaRPr lang="LID4096"/>
           </a:p>
@@ -2406,7 +2406,7 @@
           <a:p>
             <a:fld id="{9D4686FF-3DC0-4D03-9102-64E826D8EE6E}" type="datetimeFigureOut">
               <a:rPr lang="LID4096" smtClean="0"/>
-              <a:t>09/14/2026</a:t>
+              <a:t>09/15/2026</a:t>
             </a:fld>
             <a:endParaRPr lang="LID4096"/>
           </a:p>
@@ -2695,7 +2695,7 @@
           <a:p>
             <a:fld id="{9D4686FF-3DC0-4D03-9102-64E826D8EE6E}" type="datetimeFigureOut">
               <a:rPr lang="LID4096" smtClean="0"/>
-              <a:t>09/14/2026</a:t>
+              <a:t>09/15/2026</a:t>
             </a:fld>
             <a:endParaRPr lang="LID4096"/>
           </a:p>
@@ -2938,7 +2938,7 @@
           <a:p>
             <a:fld id="{9D4686FF-3DC0-4D03-9102-64E826D8EE6E}" type="datetimeFigureOut">
               <a:rPr lang="LID4096" smtClean="0"/>
-              <a:t>09/14/2026</a:t>
+              <a:t>09/15/2026</a:t>
             </a:fld>
             <a:endParaRPr lang="LID4096"/>
           </a:p>
@@ -12674,7 +12674,7 @@
         </p:nvSpPr>
         <p:spPr>
           <a:xfrm>
-            <a:off x="8979644" y="5042767"/>
+            <a:off x="9041137" y="5053275"/>
             <a:ext cx="1771911" cy="261610"/>
           </a:xfrm>
           <a:prstGeom prst="rect">
@@ -13003,6 +13003,372 @@
           </a:p>
         </p:txBody>
       </p:sp>
+      <p:pic>
+        <p:nvPicPr>
+          <p:cNvPr id="3" name="Picture 2">
+            <a:extLst>
+              <a:ext uri="{FF2B5EF4-FFF2-40B4-BE49-F238E27FC236}">
+                <a16:creationId xmlns:a16="http://schemas.microsoft.com/office/drawing/2014/main" id="{6B5CA5DE-B4A8-ADF1-55BF-D037D79B40E6}"/>
+              </a:ext>
+            </a:extLst>
+          </p:cNvPr>
+          <p:cNvPicPr>
+            <a:picLocks noChangeAspect="1"/>
+          </p:cNvPicPr>
+          <p:nvPr/>
+        </p:nvPicPr>
+        <p:blipFill>
+          <a:blip r:embed="rId2"/>
+          <a:stretch>
+            <a:fillRect/>
+          </a:stretch>
+        </p:blipFill>
+        <p:spPr>
+          <a:xfrm>
+            <a:off x="650860" y="787542"/>
+            <a:ext cx="2146662" cy="1990881"/>
+          </a:xfrm>
+          <a:prstGeom prst="rect">
+            <a:avLst/>
+          </a:prstGeom>
+          <a:ln>
+            <a:solidFill>
+              <a:schemeClr val="tx1"/>
+            </a:solidFill>
+          </a:ln>
+          <a:effectLst>
+            <a:outerShdw blurRad="50800" dist="38100" dir="8100000" algn="tr" rotWithShape="0">
+              <a:prstClr val="black">
+                <a:alpha val="40000"/>
+              </a:prstClr>
+            </a:outerShdw>
+          </a:effectLst>
+        </p:spPr>
+      </p:pic>
+      <p:grpSp>
+        <p:nvGrpSpPr>
+          <p:cNvPr id="13" name="Group 12">
+            <a:extLst>
+              <a:ext uri="{FF2B5EF4-FFF2-40B4-BE49-F238E27FC236}">
+                <a16:creationId xmlns:a16="http://schemas.microsoft.com/office/drawing/2014/main" id="{5CE1B230-B85B-14E4-EEF6-3DAE4CDDBC25}"/>
+              </a:ext>
+            </a:extLst>
+          </p:cNvPr>
+          <p:cNvGrpSpPr/>
+          <p:nvPr/>
+        </p:nvGrpSpPr>
+        <p:grpSpPr>
+          <a:xfrm>
+            <a:off x="2931952" y="995752"/>
+            <a:ext cx="3765147" cy="1422358"/>
+            <a:chOff x="2931952" y="995752"/>
+            <a:chExt cx="3765147" cy="1422358"/>
+          </a:xfrm>
+        </p:grpSpPr>
+        <p:grpSp>
+          <p:nvGrpSpPr>
+            <p:cNvPr id="4" name="Group 3">
+              <a:extLst>
+                <a:ext uri="{FF2B5EF4-FFF2-40B4-BE49-F238E27FC236}">
+                  <a16:creationId xmlns:a16="http://schemas.microsoft.com/office/drawing/2014/main" id="{C8D3CF3E-5F7F-66BC-B495-6CBC029C1DF1}"/>
+                </a:ext>
+              </a:extLst>
+            </p:cNvPr>
+            <p:cNvGrpSpPr/>
+            <p:nvPr/>
+          </p:nvGrpSpPr>
+          <p:grpSpPr>
+            <a:xfrm>
+              <a:off x="2931952" y="995752"/>
+              <a:ext cx="3765147" cy="1295400"/>
+              <a:chOff x="8101480" y="5268987"/>
+              <a:chExt cx="3765147" cy="1295400"/>
+            </a:xfrm>
+          </p:grpSpPr>
+          <p:grpSp>
+            <p:nvGrpSpPr>
+              <p:cNvPr id="6" name="Group 5">
+                <a:extLst>
+                  <a:ext uri="{FF2B5EF4-FFF2-40B4-BE49-F238E27FC236}">
+                    <a16:creationId xmlns:a16="http://schemas.microsoft.com/office/drawing/2014/main" id="{B76709A0-31D2-472A-3DF7-931E1A758EF9}"/>
+                  </a:ext>
+                </a:extLst>
+              </p:cNvPr>
+              <p:cNvGrpSpPr/>
+              <p:nvPr/>
+            </p:nvGrpSpPr>
+            <p:grpSpPr>
+              <a:xfrm>
+                <a:off x="8101480" y="5268987"/>
+                <a:ext cx="3762375" cy="1295400"/>
+                <a:chOff x="7529768" y="4495989"/>
+                <a:chExt cx="3762375" cy="1295400"/>
+              </a:xfrm>
+            </p:grpSpPr>
+            <p:pic>
+              <p:nvPicPr>
+                <p:cNvPr id="9" name="Picture 8">
+                  <a:extLst>
+                    <a:ext uri="{FF2B5EF4-FFF2-40B4-BE49-F238E27FC236}">
+                      <a16:creationId xmlns:a16="http://schemas.microsoft.com/office/drawing/2014/main" id="{69B769A0-3FA4-5722-6A09-048D55FAE803}"/>
+                    </a:ext>
+                  </a:extLst>
+                </p:cNvPr>
+                <p:cNvPicPr>
+                  <a:picLocks noChangeAspect="1"/>
+                </p:cNvPicPr>
+                <p:nvPr/>
+              </p:nvPicPr>
+              <p:blipFill>
+                <a:blip r:embed="rId3"/>
+                <a:stretch>
+                  <a:fillRect/>
+                </a:stretch>
+              </p:blipFill>
+              <p:spPr>
+                <a:xfrm>
+                  <a:off x="7529768" y="4495989"/>
+                  <a:ext cx="3762375" cy="1295400"/>
+                </a:xfrm>
+                <a:prstGeom prst="rect">
+                  <a:avLst/>
+                </a:prstGeom>
+              </p:spPr>
+            </p:pic>
+            <p:cxnSp>
+              <p:nvCxnSpPr>
+                <p:cNvPr id="11" name="Straight Arrow Connector 10">
+                  <a:extLst>
+                    <a:ext uri="{FF2B5EF4-FFF2-40B4-BE49-F238E27FC236}">
+                      <a16:creationId xmlns:a16="http://schemas.microsoft.com/office/drawing/2014/main" id="{6C65D725-6839-4633-A154-C76578C5FA2E}"/>
+                    </a:ext>
+                  </a:extLst>
+                </p:cNvPr>
+                <p:cNvCxnSpPr>
+                  <a:cxnSpLocks/>
+                </p:cNvCxnSpPr>
+                <p:nvPr/>
+              </p:nvCxnSpPr>
+              <p:spPr>
+                <a:xfrm flipV="1">
+                  <a:off x="10419043" y="4929376"/>
+                  <a:ext cx="645765" cy="773846"/>
+                </a:xfrm>
+                <a:prstGeom prst="straightConnector1">
+                  <a:avLst/>
+                </a:prstGeom>
+                <a:ln>
+                  <a:solidFill>
+                    <a:srgbClr val="0000FF"/>
+                  </a:solidFill>
+                  <a:tailEnd type="triangle"/>
+                </a:ln>
+              </p:spPr>
+              <p:style>
+                <a:lnRef idx="1">
+                  <a:schemeClr val="accent1"/>
+                </a:lnRef>
+                <a:fillRef idx="0">
+                  <a:schemeClr val="accent1"/>
+                </a:fillRef>
+                <a:effectRef idx="0">
+                  <a:schemeClr val="accent1"/>
+                </a:effectRef>
+                <a:fontRef idx="minor">
+                  <a:schemeClr val="tx1"/>
+                </a:fontRef>
+              </p:style>
+            </p:cxnSp>
+          </p:grpSp>
+          <p:sp>
+            <p:nvSpPr>
+              <p:cNvPr id="8" name="TextBox 7">
+                <a:extLst>
+                  <a:ext uri="{FF2B5EF4-FFF2-40B4-BE49-F238E27FC236}">
+                    <a16:creationId xmlns:a16="http://schemas.microsoft.com/office/drawing/2014/main" id="{38FA44A0-EC2E-C825-E5C6-57D8D72E414A}"/>
+                  </a:ext>
+                </a:extLst>
+              </p:cNvPr>
+              <p:cNvSpPr txBox="1"/>
+              <p:nvPr/>
+            </p:nvSpPr>
+            <p:spPr>
+              <a:xfrm>
+                <a:off x="11561878" y="5655077"/>
+                <a:ext cx="304749" cy="261610"/>
+              </a:xfrm>
+              <a:prstGeom prst="rect">
+                <a:avLst/>
+              </a:prstGeom>
+              <a:noFill/>
+            </p:spPr>
+            <p:txBody>
+              <a:bodyPr wrap="square" rtlCol="0">
+                <a:spAutoFit/>
+              </a:bodyPr>
+              <a:lstStyle>
+                <a:defPPr>
+                  <a:defRPr lang="LID4096"/>
+                </a:defPPr>
+                <a:lvl1pPr>
+                  <a:defRPr sz="1050" b="1">
+                    <a:solidFill>
+                      <a:srgbClr val="0000FF"/>
+                    </a:solidFill>
+                  </a:defRPr>
+                </a:lvl1pPr>
+              </a:lstStyle>
+              <a:p>
+                <a:r>
+                  <a:rPr lang="en-GB" sz="1100" noProof="0" dirty="0"/>
+                  <a:t>0</a:t>
+                </a:r>
+                <a:endParaRPr lang="en-GB" sz="1400" noProof="0" dirty="0">
+                  <a:solidFill>
+                    <a:srgbClr val="FF0000"/>
+                  </a:solidFill>
+                </a:endParaRPr>
+              </a:p>
+            </p:txBody>
+          </p:sp>
+        </p:grpSp>
+        <p:sp>
+          <p:nvSpPr>
+            <p:cNvPr id="12" name="TextBox 11">
+              <a:extLst>
+                <a:ext uri="{FF2B5EF4-FFF2-40B4-BE49-F238E27FC236}">
+                  <a16:creationId xmlns:a16="http://schemas.microsoft.com/office/drawing/2014/main" id="{A633CD5F-4C23-9C01-BA92-714C82BE9031}"/>
+                </a:ext>
+              </a:extLst>
+            </p:cNvPr>
+            <p:cNvSpPr txBox="1"/>
+            <p:nvPr/>
+          </p:nvSpPr>
+          <p:spPr>
+            <a:xfrm>
+              <a:off x="5686797" y="2164194"/>
+              <a:ext cx="718582" cy="253916"/>
+            </a:xfrm>
+            <a:prstGeom prst="rect">
+              <a:avLst/>
+            </a:prstGeom>
+            <a:noFill/>
+          </p:spPr>
+          <p:txBody>
+            <a:bodyPr wrap="square" rtlCol="0">
+              <a:spAutoFit/>
+            </a:bodyPr>
+            <a:lstStyle>
+              <a:defPPr>
+                <a:defRPr lang="LID4096"/>
+              </a:defPPr>
+              <a:lvl1pPr>
+                <a:defRPr sz="1050" b="1">
+                  <a:solidFill>
+                    <a:srgbClr val="0000FF"/>
+                  </a:solidFill>
+                </a:defRPr>
+              </a:lvl1pPr>
+            </a:lstStyle>
+            <a:p>
+              <a:pPr algn="ctr"/>
+              <a:r>
+                <a:rPr lang="en-GB" noProof="0" dirty="0"/>
+                <a:t>Diffusion</a:t>
+              </a:r>
+              <a:endParaRPr lang="en-GB" sz="1400" noProof="0" dirty="0">
+                <a:solidFill>
+                  <a:srgbClr val="FF0000"/>
+                </a:solidFill>
+              </a:endParaRPr>
+            </a:p>
+          </p:txBody>
+        </p:sp>
+      </p:grpSp>
+      <p:pic>
+        <p:nvPicPr>
+          <p:cNvPr id="15" name="Picture 14">
+            <a:extLst>
+              <a:ext uri="{FF2B5EF4-FFF2-40B4-BE49-F238E27FC236}">
+                <a16:creationId xmlns:a16="http://schemas.microsoft.com/office/drawing/2014/main" id="{12FA4556-30DB-BCB6-590C-022479A97621}"/>
+              </a:ext>
+            </a:extLst>
+          </p:cNvPr>
+          <p:cNvPicPr>
+            <a:picLocks noChangeAspect="1"/>
+          </p:cNvPicPr>
+          <p:nvPr/>
+        </p:nvPicPr>
+        <p:blipFill>
+          <a:blip r:embed="rId4"/>
+          <a:stretch>
+            <a:fillRect/>
+          </a:stretch>
+        </p:blipFill>
+        <p:spPr>
+          <a:xfrm>
+            <a:off x="7006450" y="2849994"/>
+            <a:ext cx="4826299" cy="1818605"/>
+          </a:xfrm>
+          <a:prstGeom prst="rect">
+            <a:avLst/>
+          </a:prstGeom>
+          <a:ln>
+            <a:solidFill>
+              <a:schemeClr val="tx1"/>
+            </a:solidFill>
+          </a:ln>
+          <a:effectLst>
+            <a:outerShdw blurRad="50800" dist="38100" dir="8100000" algn="tr" rotWithShape="0">
+              <a:prstClr val="black">
+                <a:alpha val="40000"/>
+              </a:prstClr>
+            </a:outerShdw>
+          </a:effectLst>
+        </p:spPr>
+      </p:pic>
+      <p:pic>
+        <p:nvPicPr>
+          <p:cNvPr id="17" name="Picture 16">
+            <a:extLst>
+              <a:ext uri="{FF2B5EF4-FFF2-40B4-BE49-F238E27FC236}">
+                <a16:creationId xmlns:a16="http://schemas.microsoft.com/office/drawing/2014/main" id="{912C531B-4958-06A9-5082-8306EB991D71}"/>
+              </a:ext>
+            </a:extLst>
+          </p:cNvPr>
+          <p:cNvPicPr>
+            <a:picLocks noChangeAspect="1"/>
+          </p:cNvPicPr>
+          <p:nvPr/>
+        </p:nvPicPr>
+        <p:blipFill>
+          <a:blip r:embed="rId5"/>
+          <a:stretch>
+            <a:fillRect/>
+          </a:stretch>
+        </p:blipFill>
+        <p:spPr>
+          <a:xfrm>
+            <a:off x="6967590" y="4841062"/>
+            <a:ext cx="4904017" cy="1795290"/>
+          </a:xfrm>
+          <a:prstGeom prst="rect">
+            <a:avLst/>
+          </a:prstGeom>
+          <a:ln>
+            <a:solidFill>
+              <a:schemeClr val="tx1"/>
+            </a:solidFill>
+          </a:ln>
+          <a:effectLst>
+            <a:outerShdw blurRad="50800" dist="38100" dir="8100000" algn="tr" rotWithShape="0">
+              <a:prstClr val="black">
+                <a:alpha val="40000"/>
+              </a:prstClr>
+            </a:outerShdw>
+          </a:effectLst>
+        </p:spPr>
+      </p:pic>
     </p:spTree>
     <p:extLst>
       <p:ext uri="{BB962C8B-B14F-4D97-AF65-F5344CB8AC3E}">

--- a/04_OpenFoam/openFoam_beta.pptx
+++ b/04_OpenFoam/openFoam_beta.pptx
@@ -13,7 +13,9 @@
     <p:sldId id="263" r:id="rId7"/>
     <p:sldId id="264" r:id="rId8"/>
     <p:sldId id="265" r:id="rId9"/>
-    <p:sldId id="266" r:id="rId10"/>
+    <p:sldId id="268" r:id="rId10"/>
+    <p:sldId id="267" r:id="rId11"/>
+    <p:sldId id="266" r:id="rId12"/>
   </p:sldIdLst>
   <p:sldSz cx="12192000" cy="6858000"/>
   <p:notesSz cx="6858000" cy="9144000"/>
@@ -269,7 +271,7 @@
           <a:p>
             <a:fld id="{9D4686FF-3DC0-4D03-9102-64E826D8EE6E}" type="datetimeFigureOut">
               <a:rPr lang="LID4096" smtClean="0"/>
-              <a:t>09/15/2026</a:t>
+              <a:t>09/16/2026</a:t>
             </a:fld>
             <a:endParaRPr lang="LID4096"/>
           </a:p>
@@ -469,7 +471,7 @@
           <a:p>
             <a:fld id="{9D4686FF-3DC0-4D03-9102-64E826D8EE6E}" type="datetimeFigureOut">
               <a:rPr lang="LID4096" smtClean="0"/>
-              <a:t>09/15/2026</a:t>
+              <a:t>09/16/2026</a:t>
             </a:fld>
             <a:endParaRPr lang="LID4096"/>
           </a:p>
@@ -679,7 +681,7 @@
           <a:p>
             <a:fld id="{9D4686FF-3DC0-4D03-9102-64E826D8EE6E}" type="datetimeFigureOut">
               <a:rPr lang="LID4096" smtClean="0"/>
-              <a:t>09/15/2026</a:t>
+              <a:t>09/16/2026</a:t>
             </a:fld>
             <a:endParaRPr lang="LID4096"/>
           </a:p>
@@ -879,7 +881,7 @@
           <a:p>
             <a:fld id="{9D4686FF-3DC0-4D03-9102-64E826D8EE6E}" type="datetimeFigureOut">
               <a:rPr lang="LID4096" smtClean="0"/>
-              <a:t>09/15/2026</a:t>
+              <a:t>09/16/2026</a:t>
             </a:fld>
             <a:endParaRPr lang="LID4096"/>
           </a:p>
@@ -1155,7 +1157,7 @@
           <a:p>
             <a:fld id="{9D4686FF-3DC0-4D03-9102-64E826D8EE6E}" type="datetimeFigureOut">
               <a:rPr lang="LID4096" smtClean="0"/>
-              <a:t>09/15/2026</a:t>
+              <a:t>09/16/2026</a:t>
             </a:fld>
             <a:endParaRPr lang="LID4096"/>
           </a:p>
@@ -1423,7 +1425,7 @@
           <a:p>
             <a:fld id="{9D4686FF-3DC0-4D03-9102-64E826D8EE6E}" type="datetimeFigureOut">
               <a:rPr lang="LID4096" smtClean="0"/>
-              <a:t>09/15/2026</a:t>
+              <a:t>09/16/2026</a:t>
             </a:fld>
             <a:endParaRPr lang="LID4096"/>
           </a:p>
@@ -1838,7 +1840,7 @@
           <a:p>
             <a:fld id="{9D4686FF-3DC0-4D03-9102-64E826D8EE6E}" type="datetimeFigureOut">
               <a:rPr lang="LID4096" smtClean="0"/>
-              <a:t>09/15/2026</a:t>
+              <a:t>09/16/2026</a:t>
             </a:fld>
             <a:endParaRPr lang="LID4096"/>
           </a:p>
@@ -1980,7 +1982,7 @@
           <a:p>
             <a:fld id="{9D4686FF-3DC0-4D03-9102-64E826D8EE6E}" type="datetimeFigureOut">
               <a:rPr lang="LID4096" smtClean="0"/>
-              <a:t>09/15/2026</a:t>
+              <a:t>09/16/2026</a:t>
             </a:fld>
             <a:endParaRPr lang="LID4096"/>
           </a:p>
@@ -2093,7 +2095,7 @@
           <a:p>
             <a:fld id="{9D4686FF-3DC0-4D03-9102-64E826D8EE6E}" type="datetimeFigureOut">
               <a:rPr lang="LID4096" smtClean="0"/>
-              <a:t>09/15/2026</a:t>
+              <a:t>09/16/2026</a:t>
             </a:fld>
             <a:endParaRPr lang="LID4096"/>
           </a:p>
@@ -2406,7 +2408,7 @@
           <a:p>
             <a:fld id="{9D4686FF-3DC0-4D03-9102-64E826D8EE6E}" type="datetimeFigureOut">
               <a:rPr lang="LID4096" smtClean="0"/>
-              <a:t>09/15/2026</a:t>
+              <a:t>09/16/2026</a:t>
             </a:fld>
             <a:endParaRPr lang="LID4096"/>
           </a:p>
@@ -2695,7 +2697,7 @@
           <a:p>
             <a:fld id="{9D4686FF-3DC0-4D03-9102-64E826D8EE6E}" type="datetimeFigureOut">
               <a:rPr lang="LID4096" smtClean="0"/>
-              <a:t>09/15/2026</a:t>
+              <a:t>09/16/2026</a:t>
             </a:fld>
             <a:endParaRPr lang="LID4096"/>
           </a:p>
@@ -2938,7 +2940,7 @@
           <a:p>
             <a:fld id="{9D4686FF-3DC0-4D03-9102-64E826D8EE6E}" type="datetimeFigureOut">
               <a:rPr lang="LID4096" smtClean="0"/>
-              <a:t>09/15/2026</a:t>
+              <a:t>09/16/2026</a:t>
             </a:fld>
             <a:endParaRPr lang="LID4096"/>
           </a:p>
@@ -4107,6 +4109,1435 @@
 </p:sld>
 </file>
 
+<file path=ppt/slides/slide10.xml><?xml version="1.0" encoding="utf-8"?>
+<p:sld xmlns:a="http://schemas.openxmlformats.org/drawingml/2006/main" xmlns:r="http://schemas.openxmlformats.org/officeDocument/2006/relationships" xmlns:p="http://schemas.openxmlformats.org/presentationml/2006/main">
+  <p:cSld>
+    <p:spTree>
+      <p:nvGrpSpPr>
+        <p:cNvPr id="1" name="">
+          <a:extLst>
+            <a:ext uri="{FF2B5EF4-FFF2-40B4-BE49-F238E27FC236}">
+              <a16:creationId xmlns:a16="http://schemas.microsoft.com/office/drawing/2014/main" id="{F93D8FFD-6D88-3F9C-C281-FD87C8EB1BB1}"/>
+            </a:ext>
+          </a:extLst>
+        </p:cNvPr>
+        <p:cNvGrpSpPr/>
+        <p:nvPr/>
+      </p:nvGrpSpPr>
+      <p:grpSpPr>
+        <a:xfrm>
+          <a:off x="0" y="0"/>
+          <a:ext cx="0" cy="0"/>
+          <a:chOff x="0" y="0"/>
+          <a:chExt cx="0" cy="0"/>
+        </a:xfrm>
+      </p:grpSpPr>
+      <p:pic>
+        <p:nvPicPr>
+          <p:cNvPr id="10" name="Picture 9">
+            <a:extLst>
+              <a:ext uri="{FF2B5EF4-FFF2-40B4-BE49-F238E27FC236}">
+                <a16:creationId xmlns:a16="http://schemas.microsoft.com/office/drawing/2014/main" id="{455929DC-EFFF-F19E-AF19-FDE6F42CE9F7}"/>
+              </a:ext>
+            </a:extLst>
+          </p:cNvPr>
+          <p:cNvPicPr>
+            <a:picLocks noChangeAspect="1"/>
+          </p:cNvPicPr>
+          <p:nvPr/>
+        </p:nvPicPr>
+        <p:blipFill>
+          <a:blip r:embed="rId2"/>
+          <a:stretch>
+            <a:fillRect/>
+          </a:stretch>
+        </p:blipFill>
+        <p:spPr>
+          <a:xfrm>
+            <a:off x="3003641" y="149936"/>
+            <a:ext cx="2438791" cy="1654384"/>
+          </a:xfrm>
+          <a:prstGeom prst="rect">
+            <a:avLst/>
+          </a:prstGeom>
+          <a:effectLst>
+            <a:outerShdw blurRad="50800" dist="38100" dir="8100000" algn="tr" rotWithShape="0">
+              <a:prstClr val="black">
+                <a:alpha val="40000"/>
+              </a:prstClr>
+            </a:outerShdw>
+          </a:effectLst>
+        </p:spPr>
+      </p:pic>
+      <p:pic>
+        <p:nvPicPr>
+          <p:cNvPr id="23" name="Picture 22">
+            <a:extLst>
+              <a:ext uri="{FF2B5EF4-FFF2-40B4-BE49-F238E27FC236}">
+                <a16:creationId xmlns:a16="http://schemas.microsoft.com/office/drawing/2014/main" id="{A36E9A9C-0A46-C4F3-11FF-F993EF5EBBC4}"/>
+              </a:ext>
+            </a:extLst>
+          </p:cNvPr>
+          <p:cNvPicPr>
+            <a:picLocks noChangeAspect="1"/>
+          </p:cNvPicPr>
+          <p:nvPr/>
+        </p:nvPicPr>
+        <p:blipFill>
+          <a:blip r:embed="rId3"/>
+          <a:stretch>
+            <a:fillRect/>
+          </a:stretch>
+        </p:blipFill>
+        <p:spPr>
+          <a:xfrm>
+            <a:off x="8971865" y="4920358"/>
+            <a:ext cx="2930034" cy="1585372"/>
+          </a:xfrm>
+          <a:prstGeom prst="rect">
+            <a:avLst/>
+          </a:prstGeom>
+          <a:ln>
+            <a:solidFill>
+              <a:schemeClr val="tx1"/>
+            </a:solidFill>
+          </a:ln>
+          <a:effectLst>
+            <a:outerShdw blurRad="50800" dist="38100" dir="8100000" algn="tr" rotWithShape="0">
+              <a:prstClr val="black">
+                <a:alpha val="40000"/>
+              </a:prstClr>
+            </a:outerShdw>
+          </a:effectLst>
+        </p:spPr>
+      </p:pic>
+      <p:pic>
+        <p:nvPicPr>
+          <p:cNvPr id="25" name="Picture 24">
+            <a:extLst>
+              <a:ext uri="{FF2B5EF4-FFF2-40B4-BE49-F238E27FC236}">
+                <a16:creationId xmlns:a16="http://schemas.microsoft.com/office/drawing/2014/main" id="{73B5A791-EDCA-8F36-4B1C-DCECAE52F569}"/>
+              </a:ext>
+            </a:extLst>
+          </p:cNvPr>
+          <p:cNvPicPr>
+            <a:picLocks noChangeAspect="1"/>
+          </p:cNvPicPr>
+          <p:nvPr/>
+        </p:nvPicPr>
+        <p:blipFill>
+          <a:blip r:embed="rId4"/>
+          <a:srcRect t="31390"/>
+          <a:stretch>
+            <a:fillRect/>
+          </a:stretch>
+        </p:blipFill>
+        <p:spPr>
+          <a:xfrm>
+            <a:off x="361006" y="4321771"/>
+            <a:ext cx="2174436" cy="1951328"/>
+          </a:xfrm>
+          <a:prstGeom prst="rect">
+            <a:avLst/>
+          </a:prstGeom>
+          <a:ln>
+            <a:solidFill>
+              <a:srgbClr val="0000FF"/>
+            </a:solidFill>
+          </a:ln>
+          <a:effectLst>
+            <a:outerShdw blurRad="50800" dist="38100" dir="8100000" algn="tr" rotWithShape="0">
+              <a:prstClr val="black">
+                <a:alpha val="40000"/>
+              </a:prstClr>
+            </a:outerShdw>
+          </a:effectLst>
+        </p:spPr>
+      </p:pic>
+      <p:sp>
+        <p:nvSpPr>
+          <p:cNvPr id="26" name="Rectangle 25">
+            <a:extLst>
+              <a:ext uri="{FF2B5EF4-FFF2-40B4-BE49-F238E27FC236}">
+                <a16:creationId xmlns:a16="http://schemas.microsoft.com/office/drawing/2014/main" id="{A2402BAE-2550-B93C-10BC-1089C304ADD4}"/>
+              </a:ext>
+            </a:extLst>
+          </p:cNvPr>
+          <p:cNvSpPr/>
+          <p:nvPr/>
+        </p:nvSpPr>
+        <p:spPr>
+          <a:xfrm>
+            <a:off x="1252408" y="5053275"/>
+            <a:ext cx="284162" cy="1219824"/>
+          </a:xfrm>
+          <a:prstGeom prst="rect">
+            <a:avLst/>
+          </a:prstGeom>
+          <a:noFill/>
+          <a:ln>
+            <a:solidFill>
+              <a:srgbClr val="FF0000"/>
+            </a:solidFill>
+          </a:ln>
+        </p:spPr>
+        <p:style>
+          <a:lnRef idx="2">
+            <a:schemeClr val="accent1">
+              <a:shade val="15000"/>
+            </a:schemeClr>
+          </a:lnRef>
+          <a:fillRef idx="1">
+            <a:schemeClr val="accent1"/>
+          </a:fillRef>
+          <a:effectRef idx="0">
+            <a:schemeClr val="accent1"/>
+          </a:effectRef>
+          <a:fontRef idx="minor">
+            <a:schemeClr val="lt1"/>
+          </a:fontRef>
+        </p:style>
+        <p:txBody>
+          <a:bodyPr rtlCol="0" anchor="ctr"/>
+          <a:lstStyle/>
+          <a:p>
+            <a:pPr algn="ctr"/>
+            <a:endParaRPr lang="LID4096"/>
+          </a:p>
+        </p:txBody>
+      </p:sp>
+      <p:pic>
+        <p:nvPicPr>
+          <p:cNvPr id="30" name="Picture 29">
+            <a:extLst>
+              <a:ext uri="{FF2B5EF4-FFF2-40B4-BE49-F238E27FC236}">
+                <a16:creationId xmlns:a16="http://schemas.microsoft.com/office/drawing/2014/main" id="{08D19417-DD9B-60D5-D9C7-42B08F8C33EC}"/>
+              </a:ext>
+            </a:extLst>
+          </p:cNvPr>
+          <p:cNvPicPr>
+            <a:picLocks noChangeAspect="1"/>
+          </p:cNvPicPr>
+          <p:nvPr/>
+        </p:nvPicPr>
+        <p:blipFill>
+          <a:blip r:embed="rId5"/>
+          <a:stretch>
+            <a:fillRect/>
+          </a:stretch>
+        </p:blipFill>
+        <p:spPr>
+          <a:xfrm>
+            <a:off x="5895032" y="4188807"/>
+            <a:ext cx="3810806" cy="613725"/>
+          </a:xfrm>
+          <a:prstGeom prst="rect">
+            <a:avLst/>
+          </a:prstGeom>
+        </p:spPr>
+      </p:pic>
+      <p:pic>
+        <p:nvPicPr>
+          <p:cNvPr id="36" name="Picture 35">
+            <a:extLst>
+              <a:ext uri="{FF2B5EF4-FFF2-40B4-BE49-F238E27FC236}">
+                <a16:creationId xmlns:a16="http://schemas.microsoft.com/office/drawing/2014/main" id="{44679534-5FFF-7887-B1B4-2AFB1BE69E79}"/>
+              </a:ext>
+            </a:extLst>
+          </p:cNvPr>
+          <p:cNvPicPr>
+            <a:picLocks noChangeAspect="1"/>
+          </p:cNvPicPr>
+          <p:nvPr/>
+        </p:nvPicPr>
+        <p:blipFill>
+          <a:blip r:embed="rId6"/>
+          <a:srcRect l="54284" t="31225"/>
+          <a:stretch>
+            <a:fillRect/>
+          </a:stretch>
+        </p:blipFill>
+        <p:spPr>
+          <a:xfrm>
+            <a:off x="902543" y="2150763"/>
+            <a:ext cx="1509376" cy="1608413"/>
+          </a:xfrm>
+          <a:prstGeom prst="rect">
+            <a:avLst/>
+          </a:prstGeom>
+          <a:ln>
+            <a:solidFill>
+              <a:schemeClr val="tx1"/>
+            </a:solidFill>
+          </a:ln>
+          <a:effectLst>
+            <a:outerShdw blurRad="50800" dist="38100" dir="8100000" algn="tr" rotWithShape="0">
+              <a:prstClr val="black">
+                <a:alpha val="40000"/>
+              </a:prstClr>
+            </a:outerShdw>
+          </a:effectLst>
+        </p:spPr>
+      </p:pic>
+      <p:pic>
+        <p:nvPicPr>
+          <p:cNvPr id="2" name="Picture 1">
+            <a:extLst>
+              <a:ext uri="{FF2B5EF4-FFF2-40B4-BE49-F238E27FC236}">
+                <a16:creationId xmlns:a16="http://schemas.microsoft.com/office/drawing/2014/main" id="{95EE1B85-322C-DD18-D285-8D59BCFABA2B}"/>
+              </a:ext>
+            </a:extLst>
+          </p:cNvPr>
+          <p:cNvPicPr>
+            <a:picLocks noChangeAspect="1"/>
+          </p:cNvPicPr>
+          <p:nvPr/>
+        </p:nvPicPr>
+        <p:blipFill>
+          <a:blip r:embed="rId6"/>
+          <a:srcRect t="-1" r="40724" b="90394"/>
+          <a:stretch>
+            <a:fillRect/>
+          </a:stretch>
+        </p:blipFill>
+        <p:spPr>
+          <a:xfrm>
+            <a:off x="277098" y="1530560"/>
+            <a:ext cx="2630568" cy="301974"/>
+          </a:xfrm>
+          <a:prstGeom prst="rect">
+            <a:avLst/>
+          </a:prstGeom>
+          <a:ln w="19050">
+            <a:solidFill>
+              <a:srgbClr val="FF0000"/>
+            </a:solidFill>
+          </a:ln>
+          <a:effectLst>
+            <a:outerShdw blurRad="50800" dist="38100" dir="8100000" algn="tr" rotWithShape="0">
+              <a:prstClr val="black">
+                <a:alpha val="40000"/>
+              </a:prstClr>
+            </a:outerShdw>
+          </a:effectLst>
+        </p:spPr>
+      </p:pic>
+      <p:pic>
+        <p:nvPicPr>
+          <p:cNvPr id="3" name="Picture 2">
+            <a:extLst>
+              <a:ext uri="{FF2B5EF4-FFF2-40B4-BE49-F238E27FC236}">
+                <a16:creationId xmlns:a16="http://schemas.microsoft.com/office/drawing/2014/main" id="{5C261A21-B5FD-1708-CF75-3189B319A34D}"/>
+              </a:ext>
+            </a:extLst>
+          </p:cNvPr>
+          <p:cNvPicPr>
+            <a:picLocks noChangeAspect="1"/>
+          </p:cNvPicPr>
+          <p:nvPr/>
+        </p:nvPicPr>
+        <p:blipFill>
+          <a:blip r:embed="rId6"/>
+          <a:srcRect l="47054" t="8946" b="82016"/>
+          <a:stretch>
+            <a:fillRect/>
+          </a:stretch>
+        </p:blipFill>
+        <p:spPr>
+          <a:xfrm>
+            <a:off x="488887" y="1873982"/>
+            <a:ext cx="1946160" cy="235333"/>
+          </a:xfrm>
+          <a:prstGeom prst="rect">
+            <a:avLst/>
+          </a:prstGeom>
+          <a:ln>
+            <a:solidFill>
+              <a:schemeClr val="tx1"/>
+            </a:solidFill>
+          </a:ln>
+          <a:effectLst>
+            <a:outerShdw blurRad="50800" dist="38100" dir="8100000" algn="tr" rotWithShape="0">
+              <a:prstClr val="black">
+                <a:alpha val="40000"/>
+              </a:prstClr>
+            </a:outerShdw>
+          </a:effectLst>
+        </p:spPr>
+      </p:pic>
+      <p:pic>
+        <p:nvPicPr>
+          <p:cNvPr id="13" name="Picture 12">
+            <a:extLst>
+              <a:ext uri="{FF2B5EF4-FFF2-40B4-BE49-F238E27FC236}">
+                <a16:creationId xmlns:a16="http://schemas.microsoft.com/office/drawing/2014/main" id="{99669DB8-1A09-AD45-3C7C-9E34A44C658F}"/>
+              </a:ext>
+            </a:extLst>
+          </p:cNvPr>
+          <p:cNvPicPr>
+            <a:picLocks noChangeAspect="1"/>
+          </p:cNvPicPr>
+          <p:nvPr/>
+        </p:nvPicPr>
+        <p:blipFill>
+          <a:blip r:embed="rId7"/>
+          <a:srcRect l="36245" t="8583"/>
+          <a:stretch>
+            <a:fillRect/>
+          </a:stretch>
+        </p:blipFill>
+        <p:spPr>
+          <a:xfrm>
+            <a:off x="3509208" y="4345982"/>
+            <a:ext cx="2271996" cy="2097403"/>
+          </a:xfrm>
+          <a:prstGeom prst="rect">
+            <a:avLst/>
+          </a:prstGeom>
+          <a:ln>
+            <a:solidFill>
+              <a:schemeClr val="tx1"/>
+            </a:solidFill>
+          </a:ln>
+          <a:effectLst>
+            <a:outerShdw blurRad="50800" dist="38100" dir="8100000" algn="tr" rotWithShape="0">
+              <a:prstClr val="black">
+                <a:alpha val="40000"/>
+              </a:prstClr>
+            </a:outerShdw>
+          </a:effectLst>
+        </p:spPr>
+      </p:pic>
+      <p:pic>
+        <p:nvPicPr>
+          <p:cNvPr id="24" name="Picture 23">
+            <a:extLst>
+              <a:ext uri="{FF2B5EF4-FFF2-40B4-BE49-F238E27FC236}">
+                <a16:creationId xmlns:a16="http://schemas.microsoft.com/office/drawing/2014/main" id="{D453866B-DC9F-1750-74B4-E5B4D8207CB6}"/>
+              </a:ext>
+            </a:extLst>
+          </p:cNvPr>
+          <p:cNvPicPr>
+            <a:picLocks noChangeAspect="1"/>
+          </p:cNvPicPr>
+          <p:nvPr/>
+        </p:nvPicPr>
+        <p:blipFill>
+          <a:blip r:embed="rId7"/>
+          <a:srcRect l="-1" t="-1" r="59098" b="90781"/>
+          <a:stretch>
+            <a:fillRect/>
+          </a:stretch>
+        </p:blipFill>
+        <p:spPr>
+          <a:xfrm>
+            <a:off x="2611098" y="4814642"/>
+            <a:ext cx="1901899" cy="276001"/>
+          </a:xfrm>
+          <a:prstGeom prst="rect">
+            <a:avLst/>
+          </a:prstGeom>
+          <a:ln w="19050">
+            <a:solidFill>
+              <a:srgbClr val="FF0000"/>
+            </a:solidFill>
+          </a:ln>
+          <a:effectLst>
+            <a:outerShdw blurRad="50800" dist="38100" dir="8100000" algn="tr" rotWithShape="0">
+              <a:prstClr val="black">
+                <a:alpha val="40000"/>
+              </a:prstClr>
+            </a:outerShdw>
+          </a:effectLst>
+        </p:spPr>
+      </p:pic>
+      <p:sp>
+        <p:nvSpPr>
+          <p:cNvPr id="27" name="TextBox 26">
+            <a:extLst>
+              <a:ext uri="{FF2B5EF4-FFF2-40B4-BE49-F238E27FC236}">
+                <a16:creationId xmlns:a16="http://schemas.microsoft.com/office/drawing/2014/main" id="{C9360ECD-1565-5790-EDB1-233742FFA0A1}"/>
+              </a:ext>
+            </a:extLst>
+          </p:cNvPr>
+          <p:cNvSpPr txBox="1"/>
+          <p:nvPr/>
+        </p:nvSpPr>
+        <p:spPr>
+          <a:xfrm>
+            <a:off x="9041137" y="5053275"/>
+            <a:ext cx="1771911" cy="261610"/>
+          </a:xfrm>
+          <a:prstGeom prst="rect">
+            <a:avLst/>
+          </a:prstGeom>
+          <a:noFill/>
+        </p:spPr>
+        <p:txBody>
+          <a:bodyPr wrap="square" rtlCol="0">
+            <a:spAutoFit/>
+          </a:bodyPr>
+          <a:lstStyle>
+            <a:defPPr>
+              <a:defRPr lang="LID4096"/>
+            </a:defPPr>
+            <a:lvl1pPr>
+              <a:defRPr sz="1050" b="1">
+                <a:solidFill>
+                  <a:srgbClr val="0000FF"/>
+                </a:solidFill>
+              </a:defRPr>
+            </a:lvl1pPr>
+          </a:lstStyle>
+          <a:p>
+            <a:r>
+              <a:rPr lang="en-GB" sz="1100" noProof="0" dirty="0"/>
+              <a:t>f</a:t>
+            </a:r>
+            <a:endParaRPr lang="en-GB" sz="1400" noProof="0" dirty="0">
+              <a:solidFill>
+                <a:srgbClr val="FF0000"/>
+              </a:solidFill>
+            </a:endParaRPr>
+          </a:p>
+        </p:txBody>
+      </p:sp>
+      <p:grpSp>
+        <p:nvGrpSpPr>
+          <p:cNvPr id="31" name="Group 30">
+            <a:extLst>
+              <a:ext uri="{FF2B5EF4-FFF2-40B4-BE49-F238E27FC236}">
+                <a16:creationId xmlns:a16="http://schemas.microsoft.com/office/drawing/2014/main" id="{7B3FF663-82AA-EF74-F7F6-F14B40F45EE8}"/>
+              </a:ext>
+            </a:extLst>
+          </p:cNvPr>
+          <p:cNvGrpSpPr/>
+          <p:nvPr/>
+        </p:nvGrpSpPr>
+        <p:grpSpPr>
+          <a:xfrm>
+            <a:off x="7078764" y="149936"/>
+            <a:ext cx="4585877" cy="2524195"/>
+            <a:chOff x="6872809" y="220294"/>
+            <a:chExt cx="4585877" cy="2524195"/>
+          </a:xfrm>
+        </p:grpSpPr>
+        <p:pic>
+          <p:nvPicPr>
+            <p:cNvPr id="32" name="Picture 31">
+              <a:extLst>
+                <a:ext uri="{FF2B5EF4-FFF2-40B4-BE49-F238E27FC236}">
+                  <a16:creationId xmlns:a16="http://schemas.microsoft.com/office/drawing/2014/main" id="{5CDE24CB-076C-FEA9-8644-53839FAFE9B6}"/>
+                </a:ext>
+              </a:extLst>
+            </p:cNvPr>
+            <p:cNvPicPr>
+              <a:picLocks noChangeAspect="1"/>
+            </p:cNvPicPr>
+            <p:nvPr/>
+          </p:nvPicPr>
+          <p:blipFill>
+            <a:blip r:embed="rId8"/>
+            <a:srcRect l="29646" t="6839" b="60522"/>
+            <a:stretch>
+              <a:fillRect/>
+            </a:stretch>
+          </p:blipFill>
+          <p:spPr>
+            <a:xfrm>
+              <a:off x="7342697" y="220294"/>
+              <a:ext cx="3442985" cy="697250"/>
+            </a:xfrm>
+            <a:prstGeom prst="rect">
+              <a:avLst/>
+            </a:prstGeom>
+            <a:ln>
+              <a:solidFill>
+                <a:schemeClr val="tx1"/>
+              </a:solidFill>
+            </a:ln>
+            <a:effectLst>
+              <a:outerShdw blurRad="50800" dist="38100" dir="8100000" algn="tr" rotWithShape="0">
+                <a:prstClr val="black">
+                  <a:alpha val="40000"/>
+                </a:prstClr>
+              </a:outerShdw>
+            </a:effectLst>
+          </p:spPr>
+        </p:pic>
+        <p:pic>
+          <p:nvPicPr>
+            <p:cNvPr id="34" name="Picture 33">
+              <a:extLst>
+                <a:ext uri="{FF2B5EF4-FFF2-40B4-BE49-F238E27FC236}">
+                  <a16:creationId xmlns:a16="http://schemas.microsoft.com/office/drawing/2014/main" id="{51B12661-F5DF-DE8E-43E4-E9ABD6A0A2E5}"/>
+                </a:ext>
+              </a:extLst>
+            </p:cNvPr>
+            <p:cNvPicPr>
+              <a:picLocks noChangeAspect="1"/>
+            </p:cNvPicPr>
+            <p:nvPr/>
+          </p:nvPicPr>
+          <p:blipFill>
+            <a:blip r:embed="rId9"/>
+            <a:stretch>
+              <a:fillRect/>
+            </a:stretch>
+          </p:blipFill>
+          <p:spPr>
+            <a:xfrm>
+              <a:off x="8189640" y="2154586"/>
+              <a:ext cx="3269046" cy="589903"/>
+            </a:xfrm>
+            <a:prstGeom prst="rect">
+              <a:avLst/>
+            </a:prstGeom>
+          </p:spPr>
+        </p:pic>
+        <p:pic>
+          <p:nvPicPr>
+            <p:cNvPr id="12" name="Picture 11">
+              <a:extLst>
+                <a:ext uri="{FF2B5EF4-FFF2-40B4-BE49-F238E27FC236}">
+                  <a16:creationId xmlns:a16="http://schemas.microsoft.com/office/drawing/2014/main" id="{F47FED48-39D7-FE9E-28C1-BEF2B40F4EFE}"/>
+                </a:ext>
+              </a:extLst>
+            </p:cNvPr>
+            <p:cNvPicPr>
+              <a:picLocks noChangeAspect="1"/>
+            </p:cNvPicPr>
+            <p:nvPr/>
+          </p:nvPicPr>
+          <p:blipFill>
+            <a:blip r:embed="rId8"/>
+            <a:srcRect l="38694" t="37637" r="29787" b="278"/>
+            <a:stretch>
+              <a:fillRect/>
+            </a:stretch>
+          </p:blipFill>
+          <p:spPr>
+            <a:xfrm>
+              <a:off x="6872809" y="676039"/>
+              <a:ext cx="1730150" cy="1487675"/>
+            </a:xfrm>
+            <a:prstGeom prst="rect">
+              <a:avLst/>
+            </a:prstGeom>
+            <a:ln>
+              <a:solidFill>
+                <a:schemeClr val="tx1"/>
+              </a:solidFill>
+            </a:ln>
+            <a:effectLst>
+              <a:outerShdw blurRad="50800" dist="38100" dir="8100000" algn="tr" rotWithShape="0">
+                <a:prstClr val="black">
+                  <a:alpha val="40000"/>
+                </a:prstClr>
+              </a:outerShdw>
+            </a:effectLst>
+          </p:spPr>
+        </p:pic>
+        <p:pic>
+          <p:nvPicPr>
+            <p:cNvPr id="29" name="Picture 28">
+              <a:extLst>
+                <a:ext uri="{FF2B5EF4-FFF2-40B4-BE49-F238E27FC236}">
+                  <a16:creationId xmlns:a16="http://schemas.microsoft.com/office/drawing/2014/main" id="{865F68FA-E7FE-E758-E612-64EB8F5CFCC0}"/>
+                </a:ext>
+              </a:extLst>
+            </p:cNvPr>
+            <p:cNvPicPr>
+              <a:picLocks noChangeAspect="1"/>
+            </p:cNvPicPr>
+            <p:nvPr/>
+          </p:nvPicPr>
+          <p:blipFill>
+            <a:blip r:embed="rId8"/>
+            <a:srcRect r="71052" b="88722"/>
+            <a:stretch>
+              <a:fillRect/>
+            </a:stretch>
+          </p:blipFill>
+          <p:spPr>
+            <a:xfrm>
+              <a:off x="9020332" y="996923"/>
+              <a:ext cx="1767543" cy="300596"/>
+            </a:xfrm>
+            <a:prstGeom prst="rect">
+              <a:avLst/>
+            </a:prstGeom>
+            <a:ln w="28575">
+              <a:solidFill>
+                <a:srgbClr val="FF0000"/>
+              </a:solidFill>
+            </a:ln>
+            <a:effectLst>
+              <a:outerShdw blurRad="50800" dist="38100" dir="8100000" algn="tr" rotWithShape="0">
+                <a:prstClr val="black">
+                  <a:alpha val="40000"/>
+                </a:prstClr>
+              </a:outerShdw>
+            </a:effectLst>
+          </p:spPr>
+        </p:pic>
+      </p:grpSp>
+      <p:pic>
+        <p:nvPicPr>
+          <p:cNvPr id="33" name="Picture 32">
+            <a:extLst>
+              <a:ext uri="{FF2B5EF4-FFF2-40B4-BE49-F238E27FC236}">
+                <a16:creationId xmlns:a16="http://schemas.microsoft.com/office/drawing/2014/main" id="{0BB34CD4-3E27-9F96-C174-B59C10F0440B}"/>
+              </a:ext>
+            </a:extLst>
+          </p:cNvPr>
+          <p:cNvPicPr>
+            <a:picLocks noChangeAspect="1"/>
+          </p:cNvPicPr>
+          <p:nvPr/>
+        </p:nvPicPr>
+        <p:blipFill>
+          <a:blip r:embed="rId4"/>
+          <a:srcRect l="15331" t="2354" r="39310" b="87977"/>
+          <a:stretch>
+            <a:fillRect/>
+          </a:stretch>
+        </p:blipFill>
+        <p:spPr>
+          <a:xfrm>
+            <a:off x="361006" y="3960480"/>
+            <a:ext cx="986290" cy="274953"/>
+          </a:xfrm>
+          <a:prstGeom prst="rect">
+            <a:avLst/>
+          </a:prstGeom>
+          <a:ln>
+            <a:solidFill>
+              <a:srgbClr val="0000FF"/>
+            </a:solidFill>
+          </a:ln>
+          <a:effectLst>
+            <a:outerShdw blurRad="50800" dist="38100" dir="8100000" algn="tr" rotWithShape="0">
+              <a:prstClr val="black">
+                <a:alpha val="40000"/>
+              </a:prstClr>
+            </a:outerShdw>
+          </a:effectLst>
+        </p:spPr>
+      </p:pic>
+      <p:sp>
+        <p:nvSpPr>
+          <p:cNvPr id="6" name="TextBox 5">
+            <a:extLst>
+              <a:ext uri="{FF2B5EF4-FFF2-40B4-BE49-F238E27FC236}">
+                <a16:creationId xmlns:a16="http://schemas.microsoft.com/office/drawing/2014/main" id="{2E0FB273-4FF4-BB81-E0C0-93C7688BB363}"/>
+              </a:ext>
+            </a:extLst>
+          </p:cNvPr>
+          <p:cNvSpPr txBox="1"/>
+          <p:nvPr/>
+        </p:nvSpPr>
+        <p:spPr>
+          <a:xfrm>
+            <a:off x="6096000" y="4879165"/>
+            <a:ext cx="2560030" cy="1815882"/>
+          </a:xfrm>
+          <a:prstGeom prst="rect">
+            <a:avLst/>
+          </a:prstGeom>
+          <a:noFill/>
+        </p:spPr>
+        <p:txBody>
+          <a:bodyPr wrap="square">
+            <a:spAutoFit/>
+          </a:bodyPr>
+          <a:lstStyle/>
+          <a:p>
+            <a:pPr algn="l"/>
+            <a:r>
+              <a:rPr lang="en-US" sz="1400" b="0" i="0" u="none" strike="noStrike" baseline="0" dirty="0">
+                <a:solidFill>
+                  <a:srgbClr val="FF0000"/>
+                </a:solidFill>
+                <a:latin typeface="CMR12"/>
+              </a:rPr>
+              <a:t>4.4.1 Interpolation schemes</a:t>
+            </a:r>
+          </a:p>
+          <a:p>
+            <a:pPr algn="l"/>
+            <a:endParaRPr lang="en-US" sz="1400" b="0" i="0" u="none" strike="noStrike" baseline="0" dirty="0">
+              <a:solidFill>
+                <a:srgbClr val="FF0000"/>
+              </a:solidFill>
+              <a:latin typeface="CMR12"/>
+            </a:endParaRPr>
+          </a:p>
+          <a:p>
+            <a:pPr algn="l"/>
+            <a:r>
+              <a:rPr lang="fr-FR" sz="1400" dirty="0"/>
+              <a:t>4.4.2 Surface normal ∆ </a:t>
+            </a:r>
+            <a:r>
+              <a:rPr lang="fr-FR" sz="1400" dirty="0" err="1"/>
+              <a:t>schemes</a:t>
+            </a:r>
+            <a:endParaRPr lang="en-US" sz="1400" b="0" i="0" u="none" strike="noStrike" baseline="0" dirty="0">
+              <a:solidFill>
+                <a:srgbClr val="FF0000"/>
+              </a:solidFill>
+              <a:latin typeface="CMR12"/>
+            </a:endParaRPr>
+          </a:p>
+          <a:p>
+            <a:pPr algn="l"/>
+            <a:r>
+              <a:rPr lang="en-US" sz="1400" b="0" i="0" u="none" strike="noStrike" baseline="0" dirty="0">
+                <a:solidFill>
+                  <a:srgbClr val="FF0000"/>
+                </a:solidFill>
+                <a:latin typeface="CMR12"/>
+              </a:rPr>
+              <a:t>4.4.3 Gradient schemes</a:t>
+            </a:r>
+            <a:endParaRPr lang="en-US" sz="1400" b="0" i="0" u="none" strike="noStrike" baseline="0" dirty="0">
+              <a:solidFill>
+                <a:srgbClr val="000000"/>
+              </a:solidFill>
+              <a:latin typeface="CMR12"/>
+            </a:endParaRPr>
+          </a:p>
+          <a:p>
+            <a:pPr algn="l"/>
+            <a:r>
+              <a:rPr lang="en-US" sz="1400" b="0" i="0" u="none" strike="noStrike" baseline="0" dirty="0">
+                <a:latin typeface="CMR12"/>
+              </a:rPr>
+              <a:t>4.4.4 Laplacian schemes</a:t>
+            </a:r>
+          </a:p>
+          <a:p>
+            <a:pPr algn="l"/>
+            <a:r>
+              <a:rPr lang="en-US" sz="1400" b="1" i="0" u="none" strike="noStrike" baseline="0" dirty="0">
+                <a:solidFill>
+                  <a:srgbClr val="0000FF"/>
+                </a:solidFill>
+                <a:latin typeface="CMR12"/>
+              </a:rPr>
+              <a:t>4.4.5 Divergence schemes ____</a:t>
+            </a:r>
+          </a:p>
+          <a:p>
+            <a:pPr algn="l"/>
+            <a:r>
+              <a:rPr lang="en-US" sz="1400" b="0" i="0" u="none" strike="noStrike" baseline="0" dirty="0">
+                <a:latin typeface="CMR12"/>
+              </a:rPr>
+              <a:t>4.4.6 Time schemes</a:t>
+            </a:r>
+          </a:p>
+          <a:p>
+            <a:pPr algn="l"/>
+            <a:r>
+              <a:rPr lang="en-US" sz="1400" b="0" i="0" u="none" strike="noStrike" baseline="0" dirty="0">
+                <a:solidFill>
+                  <a:srgbClr val="FF0000"/>
+                </a:solidFill>
+                <a:latin typeface="CMR12"/>
+              </a:rPr>
+              <a:t>4.4.7 Flux calculation</a:t>
+            </a:r>
+            <a:endParaRPr lang="LID4096" sz="1400" dirty="0"/>
+          </a:p>
+        </p:txBody>
+      </p:sp>
+      <p:grpSp>
+        <p:nvGrpSpPr>
+          <p:cNvPr id="14" name="Group 13">
+            <a:extLst>
+              <a:ext uri="{FF2B5EF4-FFF2-40B4-BE49-F238E27FC236}">
+                <a16:creationId xmlns:a16="http://schemas.microsoft.com/office/drawing/2014/main" id="{EF214ABD-E9F9-CF28-3540-375DFFA5B423}"/>
+              </a:ext>
+            </a:extLst>
+          </p:cNvPr>
+          <p:cNvGrpSpPr/>
+          <p:nvPr/>
+        </p:nvGrpSpPr>
+        <p:grpSpPr>
+          <a:xfrm>
+            <a:off x="3344533" y="2157178"/>
+            <a:ext cx="3318603" cy="1835946"/>
+            <a:chOff x="3344533" y="2157178"/>
+            <a:chExt cx="3318603" cy="1835946"/>
+          </a:xfrm>
+        </p:grpSpPr>
+        <p:pic>
+          <p:nvPicPr>
+            <p:cNvPr id="8" name="Picture 7">
+              <a:extLst>
+                <a:ext uri="{FF2B5EF4-FFF2-40B4-BE49-F238E27FC236}">
+                  <a16:creationId xmlns:a16="http://schemas.microsoft.com/office/drawing/2014/main" id="{5CD0E374-354E-DC1F-16A6-E6DE20D8EBE8}"/>
+                </a:ext>
+              </a:extLst>
+            </p:cNvPr>
+            <p:cNvPicPr>
+              <a:picLocks noChangeAspect="1"/>
+            </p:cNvPicPr>
+            <p:nvPr/>
+          </p:nvPicPr>
+          <p:blipFill>
+            <a:blip r:embed="rId10"/>
+            <a:stretch>
+              <a:fillRect/>
+            </a:stretch>
+          </p:blipFill>
+          <p:spPr>
+            <a:xfrm>
+              <a:off x="3344533" y="2157178"/>
+              <a:ext cx="3318603" cy="1835946"/>
+            </a:xfrm>
+            <a:prstGeom prst="rect">
+              <a:avLst/>
+            </a:prstGeom>
+            <a:effectLst>
+              <a:outerShdw blurRad="50800" dist="38100" dir="8100000" algn="tr" rotWithShape="0">
+                <a:prstClr val="black">
+                  <a:alpha val="40000"/>
+                </a:prstClr>
+              </a:outerShdw>
+            </a:effectLst>
+          </p:spPr>
+        </p:pic>
+        <p:sp>
+          <p:nvSpPr>
+            <p:cNvPr id="11" name="TextBox 10">
+              <a:extLst>
+                <a:ext uri="{FF2B5EF4-FFF2-40B4-BE49-F238E27FC236}">
+                  <a16:creationId xmlns:a16="http://schemas.microsoft.com/office/drawing/2014/main" id="{21CDFD5B-06F7-C409-CC37-0DEBAE8F1D83}"/>
+                </a:ext>
+              </a:extLst>
+            </p:cNvPr>
+            <p:cNvSpPr txBox="1"/>
+            <p:nvPr/>
+          </p:nvSpPr>
+          <p:spPr>
+            <a:xfrm>
+              <a:off x="3430829" y="2201175"/>
+              <a:ext cx="827661" cy="461665"/>
+            </a:xfrm>
+            <a:prstGeom prst="rect">
+              <a:avLst/>
+            </a:prstGeom>
+            <a:noFill/>
+          </p:spPr>
+          <p:txBody>
+            <a:bodyPr wrap="square">
+              <a:spAutoFit/>
+            </a:bodyPr>
+            <a:lstStyle/>
+            <a:p>
+              <a:r>
+                <a:rPr lang="en-US" sz="1200" dirty="0"/>
+                <a:t>Tutorial </a:t>
+              </a:r>
+            </a:p>
+            <a:p>
+              <a:r>
+                <a:rPr lang="en-US" sz="1200" dirty="0"/>
+                <a:t>Four</a:t>
+              </a:r>
+              <a:endParaRPr lang="LID4096" sz="1050" dirty="0"/>
+            </a:p>
+          </p:txBody>
+        </p:sp>
+      </p:grpSp>
+      <p:pic>
+        <p:nvPicPr>
+          <p:cNvPr id="16" name="Picture 15">
+            <a:extLst>
+              <a:ext uri="{FF2B5EF4-FFF2-40B4-BE49-F238E27FC236}">
+                <a16:creationId xmlns:a16="http://schemas.microsoft.com/office/drawing/2014/main" id="{EFDE64DF-91DF-C24F-1DF0-3E59137B6478}"/>
+              </a:ext>
+            </a:extLst>
+          </p:cNvPr>
+          <p:cNvPicPr>
+            <a:picLocks noChangeAspect="1"/>
+          </p:cNvPicPr>
+          <p:nvPr/>
+        </p:nvPicPr>
+        <p:blipFill>
+          <a:blip r:embed="rId11"/>
+          <a:stretch>
+            <a:fillRect/>
+          </a:stretch>
+        </p:blipFill>
+        <p:spPr>
+          <a:xfrm>
+            <a:off x="7949327" y="2882593"/>
+            <a:ext cx="3513021" cy="1829303"/>
+          </a:xfrm>
+          <a:prstGeom prst="rect">
+            <a:avLst/>
+          </a:prstGeom>
+          <a:effectLst>
+            <a:outerShdw blurRad="50800" dist="38100" dir="8100000" algn="tr" rotWithShape="0">
+              <a:prstClr val="black">
+                <a:alpha val="40000"/>
+              </a:prstClr>
+            </a:outerShdw>
+          </a:effectLst>
+        </p:spPr>
+      </p:pic>
+    </p:spTree>
+    <p:extLst>
+      <p:ext uri="{BB962C8B-B14F-4D97-AF65-F5344CB8AC3E}">
+        <p14:creationId xmlns:p14="http://schemas.microsoft.com/office/powerpoint/2010/main" val="504239913"/>
+      </p:ext>
+    </p:extLst>
+  </p:cSld>
+  <p:clrMapOvr>
+    <a:masterClrMapping/>
+  </p:clrMapOvr>
+</p:sld>
+</file>
+
+<file path=ppt/slides/slide11.xml><?xml version="1.0" encoding="utf-8"?>
+<p:sld xmlns:a="http://schemas.openxmlformats.org/drawingml/2006/main" xmlns:r="http://schemas.openxmlformats.org/officeDocument/2006/relationships" xmlns:p="http://schemas.openxmlformats.org/presentationml/2006/main">
+  <p:cSld>
+    <p:spTree>
+      <p:nvGrpSpPr>
+        <p:cNvPr id="1" name=""/>
+        <p:cNvGrpSpPr/>
+        <p:nvPr/>
+      </p:nvGrpSpPr>
+      <p:grpSpPr>
+        <a:xfrm>
+          <a:off x="0" y="0"/>
+          <a:ext cx="0" cy="0"/>
+          <a:chOff x="0" y="0"/>
+          <a:chExt cx="0" cy="0"/>
+        </a:xfrm>
+      </p:grpSpPr>
+      <p:sp>
+        <p:nvSpPr>
+          <p:cNvPr id="5" name="TextBox 4">
+            <a:extLst>
+              <a:ext uri="{FF2B5EF4-FFF2-40B4-BE49-F238E27FC236}">
+                <a16:creationId xmlns:a16="http://schemas.microsoft.com/office/drawing/2014/main" id="{E2AE8678-7B4E-9F27-8355-B39CE8F07171}"/>
+              </a:ext>
+            </a:extLst>
+          </p:cNvPr>
+          <p:cNvSpPr txBox="1"/>
+          <p:nvPr/>
+        </p:nvSpPr>
+        <p:spPr>
+          <a:xfrm>
+            <a:off x="106379" y="93294"/>
+            <a:ext cx="6097508" cy="369332"/>
+          </a:xfrm>
+          <a:prstGeom prst="rect">
+            <a:avLst/>
+          </a:prstGeom>
+          <a:noFill/>
+        </p:spPr>
+        <p:txBody>
+          <a:bodyPr wrap="square">
+            <a:spAutoFit/>
+          </a:bodyPr>
+          <a:lstStyle/>
+          <a:p>
+            <a:r>
+              <a:rPr lang="LID4096" dirty="0">
+                <a:solidFill>
+                  <a:srgbClr val="0000FF"/>
+                </a:solidFill>
+              </a:rPr>
+              <a:t>https://www.youtube.com/watch?v=jfDzFPaPPug           ||06|| </a:t>
+            </a:r>
+          </a:p>
+        </p:txBody>
+      </p:sp>
+      <p:pic>
+        <p:nvPicPr>
+          <p:cNvPr id="3" name="Picture 2">
+            <a:extLst>
+              <a:ext uri="{FF2B5EF4-FFF2-40B4-BE49-F238E27FC236}">
+                <a16:creationId xmlns:a16="http://schemas.microsoft.com/office/drawing/2014/main" id="{6B5CA5DE-B4A8-ADF1-55BF-D037D79B40E6}"/>
+              </a:ext>
+            </a:extLst>
+          </p:cNvPr>
+          <p:cNvPicPr>
+            <a:picLocks noChangeAspect="1"/>
+          </p:cNvPicPr>
+          <p:nvPr/>
+        </p:nvPicPr>
+        <p:blipFill>
+          <a:blip r:embed="rId2"/>
+          <a:stretch>
+            <a:fillRect/>
+          </a:stretch>
+        </p:blipFill>
+        <p:spPr>
+          <a:xfrm>
+            <a:off x="650860" y="787542"/>
+            <a:ext cx="2146662" cy="1990881"/>
+          </a:xfrm>
+          <a:prstGeom prst="rect">
+            <a:avLst/>
+          </a:prstGeom>
+          <a:ln>
+            <a:solidFill>
+              <a:schemeClr val="tx1"/>
+            </a:solidFill>
+          </a:ln>
+          <a:effectLst>
+            <a:outerShdw blurRad="50800" dist="38100" dir="8100000" algn="tr" rotWithShape="0">
+              <a:prstClr val="black">
+                <a:alpha val="40000"/>
+              </a:prstClr>
+            </a:outerShdw>
+          </a:effectLst>
+        </p:spPr>
+      </p:pic>
+      <p:grpSp>
+        <p:nvGrpSpPr>
+          <p:cNvPr id="13" name="Group 12">
+            <a:extLst>
+              <a:ext uri="{FF2B5EF4-FFF2-40B4-BE49-F238E27FC236}">
+                <a16:creationId xmlns:a16="http://schemas.microsoft.com/office/drawing/2014/main" id="{5CE1B230-B85B-14E4-EEF6-3DAE4CDDBC25}"/>
+              </a:ext>
+            </a:extLst>
+          </p:cNvPr>
+          <p:cNvGrpSpPr/>
+          <p:nvPr/>
+        </p:nvGrpSpPr>
+        <p:grpSpPr>
+          <a:xfrm>
+            <a:off x="2931952" y="995752"/>
+            <a:ext cx="3765147" cy="1422358"/>
+            <a:chOff x="2931952" y="995752"/>
+            <a:chExt cx="3765147" cy="1422358"/>
+          </a:xfrm>
+        </p:grpSpPr>
+        <p:grpSp>
+          <p:nvGrpSpPr>
+            <p:cNvPr id="4" name="Group 3">
+              <a:extLst>
+                <a:ext uri="{FF2B5EF4-FFF2-40B4-BE49-F238E27FC236}">
+                  <a16:creationId xmlns:a16="http://schemas.microsoft.com/office/drawing/2014/main" id="{C8D3CF3E-5F7F-66BC-B495-6CBC029C1DF1}"/>
+                </a:ext>
+              </a:extLst>
+            </p:cNvPr>
+            <p:cNvGrpSpPr/>
+            <p:nvPr/>
+          </p:nvGrpSpPr>
+          <p:grpSpPr>
+            <a:xfrm>
+              <a:off x="2931952" y="995752"/>
+              <a:ext cx="3765147" cy="1295400"/>
+              <a:chOff x="8101480" y="5268987"/>
+              <a:chExt cx="3765147" cy="1295400"/>
+            </a:xfrm>
+          </p:grpSpPr>
+          <p:grpSp>
+            <p:nvGrpSpPr>
+              <p:cNvPr id="6" name="Group 5">
+                <a:extLst>
+                  <a:ext uri="{FF2B5EF4-FFF2-40B4-BE49-F238E27FC236}">
+                    <a16:creationId xmlns:a16="http://schemas.microsoft.com/office/drawing/2014/main" id="{B76709A0-31D2-472A-3DF7-931E1A758EF9}"/>
+                  </a:ext>
+                </a:extLst>
+              </p:cNvPr>
+              <p:cNvGrpSpPr/>
+              <p:nvPr/>
+            </p:nvGrpSpPr>
+            <p:grpSpPr>
+              <a:xfrm>
+                <a:off x="8101480" y="5268987"/>
+                <a:ext cx="3762375" cy="1295400"/>
+                <a:chOff x="7529768" y="4495989"/>
+                <a:chExt cx="3762375" cy="1295400"/>
+              </a:xfrm>
+            </p:grpSpPr>
+            <p:pic>
+              <p:nvPicPr>
+                <p:cNvPr id="9" name="Picture 8">
+                  <a:extLst>
+                    <a:ext uri="{FF2B5EF4-FFF2-40B4-BE49-F238E27FC236}">
+                      <a16:creationId xmlns:a16="http://schemas.microsoft.com/office/drawing/2014/main" id="{69B769A0-3FA4-5722-6A09-048D55FAE803}"/>
+                    </a:ext>
+                  </a:extLst>
+                </p:cNvPr>
+                <p:cNvPicPr>
+                  <a:picLocks noChangeAspect="1"/>
+                </p:cNvPicPr>
+                <p:nvPr/>
+              </p:nvPicPr>
+              <p:blipFill>
+                <a:blip r:embed="rId3"/>
+                <a:stretch>
+                  <a:fillRect/>
+                </a:stretch>
+              </p:blipFill>
+              <p:spPr>
+                <a:xfrm>
+                  <a:off x="7529768" y="4495989"/>
+                  <a:ext cx="3762375" cy="1295400"/>
+                </a:xfrm>
+                <a:prstGeom prst="rect">
+                  <a:avLst/>
+                </a:prstGeom>
+              </p:spPr>
+            </p:pic>
+            <p:cxnSp>
+              <p:nvCxnSpPr>
+                <p:cNvPr id="11" name="Straight Arrow Connector 10">
+                  <a:extLst>
+                    <a:ext uri="{FF2B5EF4-FFF2-40B4-BE49-F238E27FC236}">
+                      <a16:creationId xmlns:a16="http://schemas.microsoft.com/office/drawing/2014/main" id="{6C65D725-6839-4633-A154-C76578C5FA2E}"/>
+                    </a:ext>
+                  </a:extLst>
+                </p:cNvPr>
+                <p:cNvCxnSpPr>
+                  <a:cxnSpLocks/>
+                </p:cNvCxnSpPr>
+                <p:nvPr/>
+              </p:nvCxnSpPr>
+              <p:spPr>
+                <a:xfrm flipV="1">
+                  <a:off x="10419043" y="4929376"/>
+                  <a:ext cx="645765" cy="773846"/>
+                </a:xfrm>
+                <a:prstGeom prst="straightConnector1">
+                  <a:avLst/>
+                </a:prstGeom>
+                <a:ln>
+                  <a:solidFill>
+                    <a:srgbClr val="0000FF"/>
+                  </a:solidFill>
+                  <a:tailEnd type="triangle"/>
+                </a:ln>
+              </p:spPr>
+              <p:style>
+                <a:lnRef idx="1">
+                  <a:schemeClr val="accent1"/>
+                </a:lnRef>
+                <a:fillRef idx="0">
+                  <a:schemeClr val="accent1"/>
+                </a:fillRef>
+                <a:effectRef idx="0">
+                  <a:schemeClr val="accent1"/>
+                </a:effectRef>
+                <a:fontRef idx="minor">
+                  <a:schemeClr val="tx1"/>
+                </a:fontRef>
+              </p:style>
+            </p:cxnSp>
+          </p:grpSp>
+          <p:sp>
+            <p:nvSpPr>
+              <p:cNvPr id="8" name="TextBox 7">
+                <a:extLst>
+                  <a:ext uri="{FF2B5EF4-FFF2-40B4-BE49-F238E27FC236}">
+                    <a16:creationId xmlns:a16="http://schemas.microsoft.com/office/drawing/2014/main" id="{38FA44A0-EC2E-C825-E5C6-57D8D72E414A}"/>
+                  </a:ext>
+                </a:extLst>
+              </p:cNvPr>
+              <p:cNvSpPr txBox="1"/>
+              <p:nvPr/>
+            </p:nvSpPr>
+            <p:spPr>
+              <a:xfrm>
+                <a:off x="11561878" y="5655077"/>
+                <a:ext cx="304749" cy="261610"/>
+              </a:xfrm>
+              <a:prstGeom prst="rect">
+                <a:avLst/>
+              </a:prstGeom>
+              <a:noFill/>
+            </p:spPr>
+            <p:txBody>
+              <a:bodyPr wrap="square" rtlCol="0">
+                <a:spAutoFit/>
+              </a:bodyPr>
+              <a:lstStyle>
+                <a:defPPr>
+                  <a:defRPr lang="LID4096"/>
+                </a:defPPr>
+                <a:lvl1pPr>
+                  <a:defRPr sz="1050" b="1">
+                    <a:solidFill>
+                      <a:srgbClr val="0000FF"/>
+                    </a:solidFill>
+                  </a:defRPr>
+                </a:lvl1pPr>
+              </a:lstStyle>
+              <a:p>
+                <a:r>
+                  <a:rPr lang="en-GB" sz="1100" noProof="0" dirty="0"/>
+                  <a:t>0</a:t>
+                </a:r>
+                <a:endParaRPr lang="en-GB" sz="1400" noProof="0" dirty="0">
+                  <a:solidFill>
+                    <a:srgbClr val="FF0000"/>
+                  </a:solidFill>
+                </a:endParaRPr>
+              </a:p>
+            </p:txBody>
+          </p:sp>
+        </p:grpSp>
+        <p:sp>
+          <p:nvSpPr>
+            <p:cNvPr id="12" name="TextBox 11">
+              <a:extLst>
+                <a:ext uri="{FF2B5EF4-FFF2-40B4-BE49-F238E27FC236}">
+                  <a16:creationId xmlns:a16="http://schemas.microsoft.com/office/drawing/2014/main" id="{A633CD5F-4C23-9C01-BA92-714C82BE9031}"/>
+                </a:ext>
+              </a:extLst>
+            </p:cNvPr>
+            <p:cNvSpPr txBox="1"/>
+            <p:nvPr/>
+          </p:nvSpPr>
+          <p:spPr>
+            <a:xfrm>
+              <a:off x="5686797" y="2164194"/>
+              <a:ext cx="718582" cy="253916"/>
+            </a:xfrm>
+            <a:prstGeom prst="rect">
+              <a:avLst/>
+            </a:prstGeom>
+            <a:noFill/>
+          </p:spPr>
+          <p:txBody>
+            <a:bodyPr wrap="square" rtlCol="0">
+              <a:spAutoFit/>
+            </a:bodyPr>
+            <a:lstStyle>
+              <a:defPPr>
+                <a:defRPr lang="LID4096"/>
+              </a:defPPr>
+              <a:lvl1pPr>
+                <a:defRPr sz="1050" b="1">
+                  <a:solidFill>
+                    <a:srgbClr val="0000FF"/>
+                  </a:solidFill>
+                </a:defRPr>
+              </a:lvl1pPr>
+            </a:lstStyle>
+            <a:p>
+              <a:pPr algn="ctr"/>
+              <a:r>
+                <a:rPr lang="en-GB" noProof="0" dirty="0"/>
+                <a:t>Diffusion</a:t>
+              </a:r>
+              <a:endParaRPr lang="en-GB" sz="1400" noProof="0" dirty="0">
+                <a:solidFill>
+                  <a:srgbClr val="FF0000"/>
+                </a:solidFill>
+              </a:endParaRPr>
+            </a:p>
+          </p:txBody>
+        </p:sp>
+      </p:grpSp>
+      <p:pic>
+        <p:nvPicPr>
+          <p:cNvPr id="15" name="Picture 14">
+            <a:extLst>
+              <a:ext uri="{FF2B5EF4-FFF2-40B4-BE49-F238E27FC236}">
+                <a16:creationId xmlns:a16="http://schemas.microsoft.com/office/drawing/2014/main" id="{12FA4556-30DB-BCB6-590C-022479A97621}"/>
+              </a:ext>
+            </a:extLst>
+          </p:cNvPr>
+          <p:cNvPicPr>
+            <a:picLocks noChangeAspect="1"/>
+          </p:cNvPicPr>
+          <p:nvPr/>
+        </p:nvPicPr>
+        <p:blipFill>
+          <a:blip r:embed="rId4"/>
+          <a:stretch>
+            <a:fillRect/>
+          </a:stretch>
+        </p:blipFill>
+        <p:spPr>
+          <a:xfrm>
+            <a:off x="7006450" y="2849994"/>
+            <a:ext cx="4826299" cy="1818605"/>
+          </a:xfrm>
+          <a:prstGeom prst="rect">
+            <a:avLst/>
+          </a:prstGeom>
+          <a:ln>
+            <a:solidFill>
+              <a:schemeClr val="tx1"/>
+            </a:solidFill>
+          </a:ln>
+          <a:effectLst>
+            <a:outerShdw blurRad="50800" dist="38100" dir="8100000" algn="tr" rotWithShape="0">
+              <a:prstClr val="black">
+                <a:alpha val="40000"/>
+              </a:prstClr>
+            </a:outerShdw>
+          </a:effectLst>
+        </p:spPr>
+      </p:pic>
+      <p:pic>
+        <p:nvPicPr>
+          <p:cNvPr id="17" name="Picture 16">
+            <a:extLst>
+              <a:ext uri="{FF2B5EF4-FFF2-40B4-BE49-F238E27FC236}">
+                <a16:creationId xmlns:a16="http://schemas.microsoft.com/office/drawing/2014/main" id="{912C531B-4958-06A9-5082-8306EB991D71}"/>
+              </a:ext>
+            </a:extLst>
+          </p:cNvPr>
+          <p:cNvPicPr>
+            <a:picLocks noChangeAspect="1"/>
+          </p:cNvPicPr>
+          <p:nvPr/>
+        </p:nvPicPr>
+        <p:blipFill>
+          <a:blip r:embed="rId5"/>
+          <a:stretch>
+            <a:fillRect/>
+          </a:stretch>
+        </p:blipFill>
+        <p:spPr>
+          <a:xfrm>
+            <a:off x="6967590" y="4841062"/>
+            <a:ext cx="4904017" cy="1795290"/>
+          </a:xfrm>
+          <a:prstGeom prst="rect">
+            <a:avLst/>
+          </a:prstGeom>
+          <a:ln>
+            <a:solidFill>
+              <a:schemeClr val="tx1"/>
+            </a:solidFill>
+          </a:ln>
+          <a:effectLst>
+            <a:outerShdw blurRad="50800" dist="38100" dir="8100000" algn="tr" rotWithShape="0">
+              <a:prstClr val="black">
+                <a:alpha val="40000"/>
+              </a:prstClr>
+            </a:outerShdw>
+          </a:effectLst>
+        </p:spPr>
+      </p:pic>
+    </p:spTree>
+    <p:extLst>
+      <p:ext uri="{BB962C8B-B14F-4D97-AF65-F5344CB8AC3E}">
+        <p14:creationId xmlns:p14="http://schemas.microsoft.com/office/powerpoint/2010/main" val="342490078"/>
+      </p:ext>
+    </p:extLst>
+  </p:cSld>
+  <p:clrMapOvr>
+    <a:masterClrMapping/>
+  </p:clrMapOvr>
+</p:sld>
+</file>
+
 <file path=ppt/slides/slide2.xml><?xml version="1.0" encoding="utf-8"?>
 <p:sld xmlns:a="http://schemas.openxmlformats.org/drawingml/2006/main" xmlns:r="http://schemas.openxmlformats.org/officeDocument/2006/relationships" xmlns:p="http://schemas.openxmlformats.org/presentationml/2006/main">
   <p:cSld>
@@ -5021,7 +6452,7 @@
         <p:spPr>
           <a:xfrm>
             <a:off x="132806" y="0"/>
-            <a:ext cx="1243148" cy="3162404"/>
+            <a:ext cx="1243148" cy="3308598"/>
           </a:xfrm>
           <a:prstGeom prst="rect">
             <a:avLst/>
@@ -5035,823 +6466,1040 @@
           <a:lstStyle/>
           <a:p>
             <a:r>
-              <a:rPr lang="en-US" sz="1050" dirty="0"/>
+              <a:rPr lang="en-US" sz="1100" b="1" dirty="0"/>
               <a:t>vertices</a:t>
             </a:r>
           </a:p>
           <a:p>
             <a:r>
-              <a:rPr lang="en-US" sz="1050" dirty="0"/>
+              <a:rPr lang="en-US" sz="1100" b="1" dirty="0"/>
               <a:t>(</a:t>
             </a:r>
           </a:p>
           <a:p>
             <a:r>
-              <a:rPr lang="en-US" sz="1050" dirty="0"/>
+              <a:rPr lang="en-US" sz="1100" b="1" dirty="0"/>
               <a:t>    (0 0 -0.05)</a:t>
             </a:r>
           </a:p>
           <a:p>
             <a:r>
-              <a:rPr lang="en-US" sz="1050" dirty="0"/>
+              <a:rPr lang="en-US" sz="1100" b="1" dirty="0"/>
               <a:t>    (0.6 0 -0.05)</a:t>
             </a:r>
           </a:p>
           <a:p>
             <a:r>
-              <a:rPr lang="en-US" sz="1050" dirty="0"/>
+              <a:rPr lang="en-US" sz="1100" b="1" dirty="0"/>
               <a:t>    (0 0.2 -0.05)</a:t>
             </a:r>
           </a:p>
           <a:p>
             <a:r>
-              <a:rPr lang="en-US" sz="1050" dirty="0"/>
+              <a:rPr lang="en-US" sz="1100" b="1" dirty="0"/>
               <a:t>    (0.6 0.2 -0.05)</a:t>
             </a:r>
           </a:p>
           <a:p>
             <a:r>
-              <a:rPr lang="en-US" sz="1050" dirty="0"/>
+              <a:rPr lang="en-US" sz="1100" b="1" dirty="0"/>
               <a:t>    (3 0.2 -0.05)</a:t>
             </a:r>
           </a:p>
           <a:p>
             <a:r>
-              <a:rPr lang="en-US" sz="1050" dirty="0"/>
+              <a:rPr lang="en-US" sz="1100" b="1" dirty="0"/>
               <a:t>    (0 1 -0.05)</a:t>
             </a:r>
           </a:p>
           <a:p>
             <a:r>
-              <a:rPr lang="en-US" sz="1050" dirty="0"/>
+              <a:rPr lang="en-US" sz="1100" b="1" dirty="0"/>
               <a:t>    (0.6 1 -0.05)</a:t>
             </a:r>
           </a:p>
           <a:p>
             <a:r>
-              <a:rPr lang="en-US" sz="1050" dirty="0"/>
+              <a:rPr lang="en-US" sz="1100" b="1" dirty="0"/>
               <a:t>    (3 1 -0.05)</a:t>
             </a:r>
           </a:p>
           <a:p>
             <a:r>
-              <a:rPr lang="en-US" sz="1050" dirty="0"/>
+              <a:rPr lang="en-US" sz="1100" b="1" dirty="0"/>
               <a:t>    (0 0 0.05)</a:t>
             </a:r>
           </a:p>
           <a:p>
             <a:r>
-              <a:rPr lang="en-US" sz="1050" dirty="0"/>
+              <a:rPr lang="en-US" sz="1100" b="1" dirty="0"/>
               <a:t>    (0.6 0 0.05)</a:t>
             </a:r>
           </a:p>
           <a:p>
             <a:r>
-              <a:rPr lang="en-US" sz="1050" dirty="0"/>
+              <a:rPr lang="en-US" sz="1100" b="1" dirty="0"/>
               <a:t>    (0 0.2 0.05)</a:t>
             </a:r>
           </a:p>
           <a:p>
             <a:r>
-              <a:rPr lang="en-US" sz="1050" dirty="0"/>
+              <a:rPr lang="en-US" sz="1100" b="1" dirty="0"/>
               <a:t>    (0.6 0.2 0.05)</a:t>
             </a:r>
           </a:p>
           <a:p>
             <a:r>
-              <a:rPr lang="en-US" sz="1050" dirty="0"/>
+              <a:rPr lang="en-US" sz="1100" b="1" dirty="0"/>
               <a:t>    (3 0.2 0.05)</a:t>
             </a:r>
           </a:p>
           <a:p>
             <a:r>
-              <a:rPr lang="en-US" sz="1050" dirty="0"/>
+              <a:rPr lang="en-US" sz="1100" b="1" dirty="0"/>
               <a:t>    (0 1 0.05)</a:t>
             </a:r>
           </a:p>
           <a:p>
             <a:r>
-              <a:rPr lang="en-US" sz="1050" dirty="0"/>
+              <a:rPr lang="en-US" sz="1100" b="1" dirty="0"/>
               <a:t>    (0.6 1 0.05)</a:t>
             </a:r>
           </a:p>
           <a:p>
             <a:r>
-              <a:rPr lang="en-US" sz="1050" dirty="0"/>
+              <a:rPr lang="en-US" sz="1100" b="1" dirty="0"/>
               <a:t>    (3 1 0.05)</a:t>
             </a:r>
           </a:p>
           <a:p>
             <a:r>
-              <a:rPr lang="en-US" sz="1050" dirty="0"/>
+              <a:rPr lang="en-US" sz="1100" b="1" dirty="0"/>
               <a:t>);</a:t>
             </a:r>
           </a:p>
         </p:txBody>
       </p:sp>
-      <p:sp>
-        <p:nvSpPr>
-          <p:cNvPr id="6" name="TextBox 5">
-            <a:extLst>
-              <a:ext uri="{FF2B5EF4-FFF2-40B4-BE49-F238E27FC236}">
-                <a16:creationId xmlns:a16="http://schemas.microsoft.com/office/drawing/2014/main" id="{C0FF627E-339E-533D-9471-545A08AE73E6}"/>
-              </a:ext>
-            </a:extLst>
-          </p:cNvPr>
-          <p:cNvSpPr txBox="1"/>
+      <p:grpSp>
+        <p:nvGrpSpPr>
+          <p:cNvPr id="4" name="Group 3">
+            <a:extLst>
+              <a:ext uri="{FF2B5EF4-FFF2-40B4-BE49-F238E27FC236}">
+                <a16:creationId xmlns:a16="http://schemas.microsoft.com/office/drawing/2014/main" id="{95F8E5B8-8EC6-6EFD-A161-1D6C0D85DFF6}"/>
+              </a:ext>
+            </a:extLst>
+          </p:cNvPr>
+          <p:cNvGrpSpPr/>
           <p:nvPr/>
-        </p:nvSpPr>
+        </p:nvGrpSpPr>
+        <p:grpSpPr>
+          <a:xfrm>
+            <a:off x="1423446" y="0"/>
+            <a:ext cx="8185253" cy="6762675"/>
+            <a:chOff x="471338" y="0"/>
+            <a:chExt cx="8185253" cy="6762675"/>
+          </a:xfrm>
+        </p:grpSpPr>
+        <p:sp>
+          <p:nvSpPr>
+            <p:cNvPr id="6" name="TextBox 5">
+              <a:extLst>
+                <a:ext uri="{FF2B5EF4-FFF2-40B4-BE49-F238E27FC236}">
+                  <a16:creationId xmlns:a16="http://schemas.microsoft.com/office/drawing/2014/main" id="{C0FF627E-339E-533D-9471-545A08AE73E6}"/>
+                </a:ext>
+              </a:extLst>
+            </p:cNvPr>
+            <p:cNvSpPr txBox="1"/>
+            <p:nvPr/>
+          </p:nvSpPr>
+          <p:spPr>
+            <a:xfrm>
+              <a:off x="471338" y="0"/>
+              <a:ext cx="4123553" cy="1938992"/>
+            </a:xfrm>
+            <a:prstGeom prst="rect">
+              <a:avLst/>
+            </a:prstGeom>
+            <a:noFill/>
+          </p:spPr>
+          <p:txBody>
+            <a:bodyPr wrap="square" rtlCol="0">
+              <a:spAutoFit/>
+            </a:bodyPr>
+            <a:lstStyle/>
+            <a:p>
+              <a:r>
+                <a:rPr lang="en-US" sz="1200" dirty="0"/>
+                <a:t>blocks</a:t>
+              </a:r>
+            </a:p>
+            <a:p>
+              <a:r>
+                <a:rPr lang="en-US" sz="1200" dirty="0"/>
+                <a:t>(</a:t>
+              </a:r>
+            </a:p>
+            <a:p>
+              <a:r>
+                <a:rPr lang="en-US" sz="1200" dirty="0"/>
+                <a:t>    hex (0 1 3 2 8 9 11 10) </a:t>
+              </a:r>
+              <a:r>
+                <a:rPr lang="en-US" sz="1200" dirty="0">
+                  <a:solidFill>
+                    <a:srgbClr val="0000FF"/>
+                  </a:solidFill>
+                </a:rPr>
+                <a:t>(25 10 1)</a:t>
+              </a:r>
+              <a:r>
+                <a:rPr lang="en-US" sz="1200" dirty="0"/>
+                <a:t> </a:t>
+              </a:r>
+              <a:r>
+                <a:rPr lang="en-US" sz="1200" dirty="0" err="1"/>
+                <a:t>simpleGrading</a:t>
+              </a:r>
+              <a:r>
+                <a:rPr lang="en-US" sz="1200" dirty="0"/>
+                <a:t> (1 1 1)</a:t>
+              </a:r>
+            </a:p>
+            <a:p>
+              <a:r>
+                <a:rPr lang="en-US" sz="1200" dirty="0"/>
+                <a:t>    hex (2 3 6 5 10 11 14 13) (25 40 1) </a:t>
+              </a:r>
+              <a:r>
+                <a:rPr lang="en-US" sz="1200" dirty="0" err="1"/>
+                <a:t>simpleGrading</a:t>
+              </a:r>
+              <a:r>
+                <a:rPr lang="en-US" sz="1200" dirty="0"/>
+                <a:t> (1 1 1)</a:t>
+              </a:r>
+            </a:p>
+            <a:p>
+              <a:r>
+                <a:rPr lang="en-US" sz="1200" dirty="0"/>
+                <a:t>    hex (3 4 7 6 11 12 15 14) (100 40 1) </a:t>
+              </a:r>
+              <a:r>
+                <a:rPr lang="en-US" sz="1200" dirty="0" err="1"/>
+                <a:t>simpleGrading</a:t>
+              </a:r>
+              <a:r>
+                <a:rPr lang="en-US" sz="1200" dirty="0"/>
+                <a:t> (1 1 1)</a:t>
+              </a:r>
+            </a:p>
+            <a:p>
+              <a:r>
+                <a:rPr lang="en-US" sz="1200" dirty="0"/>
+                <a:t>);</a:t>
+              </a:r>
+            </a:p>
+            <a:p>
+              <a:endParaRPr lang="en-US" sz="1200" dirty="0"/>
+            </a:p>
+            <a:p>
+              <a:r>
+                <a:rPr lang="en-US" sz="1200" dirty="0"/>
+                <a:t>edges</a:t>
+              </a:r>
+            </a:p>
+            <a:p>
+              <a:r>
+                <a:rPr lang="en-US" sz="1200" dirty="0"/>
+                <a:t>(</a:t>
+              </a:r>
+            </a:p>
+            <a:p>
+              <a:r>
+                <a:rPr lang="en-US" sz="1200" dirty="0"/>
+                <a:t>);</a:t>
+              </a:r>
+            </a:p>
+          </p:txBody>
+        </p:sp>
+        <p:sp>
+          <p:nvSpPr>
+            <p:cNvPr id="7" name="TextBox 6">
+              <a:extLst>
+                <a:ext uri="{FF2B5EF4-FFF2-40B4-BE49-F238E27FC236}">
+                  <a16:creationId xmlns:a16="http://schemas.microsoft.com/office/drawing/2014/main" id="{2D390098-F73D-3BA8-1B5C-A54E9D6EA111}"/>
+                </a:ext>
+              </a:extLst>
+            </p:cNvPr>
+            <p:cNvSpPr txBox="1"/>
+            <p:nvPr/>
+          </p:nvSpPr>
+          <p:spPr>
+            <a:xfrm>
+              <a:off x="4615000" y="22368"/>
+              <a:ext cx="1981940" cy="6740307"/>
+            </a:xfrm>
+            <a:prstGeom prst="rect">
+              <a:avLst/>
+            </a:prstGeom>
+            <a:noFill/>
+          </p:spPr>
+          <p:txBody>
+            <a:bodyPr wrap="square" rtlCol="0">
+              <a:spAutoFit/>
+            </a:bodyPr>
+            <a:lstStyle/>
+            <a:p>
+              <a:r>
+                <a:rPr lang="en-US" sz="1200" b="1" dirty="0"/>
+                <a:t>boundary</a:t>
+              </a:r>
+            </a:p>
+            <a:p>
+              <a:r>
+                <a:rPr lang="en-US" sz="1200" b="1" dirty="0"/>
+                <a:t>(</a:t>
+              </a:r>
+            </a:p>
+            <a:p>
+              <a:r>
+                <a:rPr lang="en-US" sz="1200" b="1" dirty="0"/>
+                <a:t>    inlet</a:t>
+              </a:r>
+            </a:p>
+            <a:p>
+              <a:r>
+                <a:rPr lang="en-US" sz="1200" b="1" dirty="0"/>
+                <a:t>    {</a:t>
+              </a:r>
+            </a:p>
+            <a:p>
+              <a:r>
+                <a:rPr lang="en-US" sz="1200" b="1" dirty="0"/>
+                <a:t>        type patch;</a:t>
+              </a:r>
+            </a:p>
+            <a:p>
+              <a:r>
+                <a:rPr lang="en-US" sz="1200" b="1" dirty="0"/>
+                <a:t>        faces</a:t>
+              </a:r>
+            </a:p>
+            <a:p>
+              <a:r>
+                <a:rPr lang="en-US" sz="1200" b="1" dirty="0"/>
+                <a:t>        (</a:t>
+              </a:r>
+            </a:p>
+            <a:p>
+              <a:r>
+                <a:rPr lang="en-US" sz="1200" b="1" dirty="0"/>
+                <a:t>            (0 8 10 2)</a:t>
+              </a:r>
+            </a:p>
+            <a:p>
+              <a:r>
+                <a:rPr lang="en-US" sz="1200" b="1" dirty="0"/>
+                <a:t>            (2 10 13 5)</a:t>
+              </a:r>
+            </a:p>
+            <a:p>
+              <a:r>
+                <a:rPr lang="en-US" sz="1200" b="1" dirty="0"/>
+                <a:t>        );</a:t>
+              </a:r>
+            </a:p>
+            <a:p>
+              <a:r>
+                <a:rPr lang="en-US" sz="1200" b="1" dirty="0"/>
+                <a:t>    }</a:t>
+              </a:r>
+            </a:p>
+            <a:p>
+              <a:r>
+                <a:rPr lang="en-US" sz="1200" b="1" dirty="0">
+                  <a:solidFill>
+                    <a:srgbClr val="0000FF"/>
+                  </a:solidFill>
+                </a:rPr>
+                <a:t>    outlet</a:t>
+              </a:r>
+            </a:p>
+            <a:p>
+              <a:r>
+                <a:rPr lang="en-US" sz="1200" b="1" dirty="0">
+                  <a:solidFill>
+                    <a:srgbClr val="0000FF"/>
+                  </a:solidFill>
+                </a:rPr>
+                <a:t>    {</a:t>
+              </a:r>
+            </a:p>
+            <a:p>
+              <a:r>
+                <a:rPr lang="en-US" sz="1200" b="1" dirty="0">
+                  <a:solidFill>
+                    <a:srgbClr val="0000FF"/>
+                  </a:solidFill>
+                </a:rPr>
+                <a:t>        type patch;</a:t>
+              </a:r>
+            </a:p>
+            <a:p>
+              <a:r>
+                <a:rPr lang="en-US" sz="1200" b="1" dirty="0">
+                  <a:solidFill>
+                    <a:srgbClr val="0000FF"/>
+                  </a:solidFill>
+                </a:rPr>
+                <a:t>        faces</a:t>
+              </a:r>
+            </a:p>
+            <a:p>
+              <a:r>
+                <a:rPr lang="en-US" sz="1200" b="1" dirty="0">
+                  <a:solidFill>
+                    <a:srgbClr val="0000FF"/>
+                  </a:solidFill>
+                </a:rPr>
+                <a:t>        (</a:t>
+              </a:r>
+            </a:p>
+            <a:p>
+              <a:r>
+                <a:rPr lang="en-US" sz="1200" b="1" dirty="0">
+                  <a:solidFill>
+                    <a:srgbClr val="0000FF"/>
+                  </a:solidFill>
+                </a:rPr>
+                <a:t>            (4 7 15 12)</a:t>
+              </a:r>
+            </a:p>
+            <a:p>
+              <a:r>
+                <a:rPr lang="en-US" sz="1200" b="1" dirty="0">
+                  <a:solidFill>
+                    <a:srgbClr val="0000FF"/>
+                  </a:solidFill>
+                </a:rPr>
+                <a:t>        );</a:t>
+              </a:r>
+            </a:p>
+            <a:p>
+              <a:r>
+                <a:rPr lang="en-US" sz="1200" b="1" dirty="0">
+                  <a:solidFill>
+                    <a:srgbClr val="0000FF"/>
+                  </a:solidFill>
+                </a:rPr>
+                <a:t>    }</a:t>
+              </a:r>
+            </a:p>
+            <a:p>
+              <a:r>
+                <a:rPr lang="en-US" sz="1200" b="1" dirty="0"/>
+                <a:t>    bottom</a:t>
+              </a:r>
+            </a:p>
+            <a:p>
+              <a:r>
+                <a:rPr lang="en-US" sz="1200" b="1" dirty="0"/>
+                <a:t>    {</a:t>
+              </a:r>
+            </a:p>
+            <a:p>
+              <a:r>
+                <a:rPr lang="en-US" sz="1200" b="1" dirty="0"/>
+                <a:t>        type </a:t>
+              </a:r>
+              <a:r>
+                <a:rPr lang="en-US" sz="1200" b="1" dirty="0" err="1"/>
+                <a:t>symmetryPlane</a:t>
+              </a:r>
+              <a:r>
+                <a:rPr lang="en-US" sz="1200" b="1" dirty="0"/>
+                <a:t>;</a:t>
+              </a:r>
+            </a:p>
+            <a:p>
+              <a:r>
+                <a:rPr lang="en-US" sz="1200" b="1" dirty="0"/>
+                <a:t>        faces</a:t>
+              </a:r>
+            </a:p>
+            <a:p>
+              <a:r>
+                <a:rPr lang="en-US" sz="1200" b="1" dirty="0"/>
+                <a:t>        (</a:t>
+              </a:r>
+            </a:p>
+            <a:p>
+              <a:r>
+                <a:rPr lang="en-US" sz="1200" b="1" dirty="0"/>
+                <a:t>            (0 1 9 8)</a:t>
+              </a:r>
+            </a:p>
+            <a:p>
+              <a:r>
+                <a:rPr lang="en-US" sz="1200" b="1" dirty="0"/>
+                <a:t>        );</a:t>
+              </a:r>
+            </a:p>
+            <a:p>
+              <a:r>
+                <a:rPr lang="en-US" sz="1200" b="1" dirty="0"/>
+                <a:t>    }</a:t>
+              </a:r>
+            </a:p>
+            <a:p>
+              <a:r>
+                <a:rPr lang="en-US" sz="1200" b="1" dirty="0"/>
+                <a:t>    top</a:t>
+              </a:r>
+            </a:p>
+            <a:p>
+              <a:r>
+                <a:rPr lang="en-US" sz="1200" b="1" dirty="0"/>
+                <a:t>    {</a:t>
+              </a:r>
+            </a:p>
+            <a:p>
+              <a:r>
+                <a:rPr lang="en-US" sz="1200" b="1" dirty="0"/>
+                <a:t>        type </a:t>
+              </a:r>
+              <a:r>
+                <a:rPr lang="en-US" sz="1200" b="1" dirty="0" err="1"/>
+                <a:t>symmetryPlane</a:t>
+              </a:r>
+              <a:r>
+                <a:rPr lang="en-US" sz="1200" b="1" dirty="0"/>
+                <a:t>;</a:t>
+              </a:r>
+            </a:p>
+            <a:p>
+              <a:r>
+                <a:rPr lang="en-US" sz="1200" b="1" dirty="0"/>
+                <a:t>        faces</a:t>
+              </a:r>
+            </a:p>
+            <a:p>
+              <a:r>
+                <a:rPr lang="en-US" sz="1200" b="1" dirty="0"/>
+                <a:t>        (</a:t>
+              </a:r>
+            </a:p>
+            <a:p>
+              <a:r>
+                <a:rPr lang="en-US" sz="1200" b="1" dirty="0"/>
+                <a:t>            (5 13 14 6)</a:t>
+              </a:r>
+            </a:p>
+            <a:p>
+              <a:r>
+                <a:rPr lang="en-US" sz="1200" b="1" dirty="0"/>
+                <a:t>            (6 14 15 7)</a:t>
+              </a:r>
+            </a:p>
+            <a:p>
+              <a:r>
+                <a:rPr lang="en-US" sz="1200" b="1" dirty="0"/>
+                <a:t>        );</a:t>
+              </a:r>
+            </a:p>
+            <a:p>
+              <a:r>
+                <a:rPr lang="en-US" sz="1200" b="1" dirty="0"/>
+                <a:t>    }</a:t>
+              </a:r>
+              <a:endParaRPr lang="LID4096" sz="1200" b="1" dirty="0"/>
+            </a:p>
+          </p:txBody>
+        </p:sp>
+        <p:sp>
+          <p:nvSpPr>
+            <p:cNvPr id="8" name="TextBox 7">
+              <a:extLst>
+                <a:ext uri="{FF2B5EF4-FFF2-40B4-BE49-F238E27FC236}">
+                  <a16:creationId xmlns:a16="http://schemas.microsoft.com/office/drawing/2014/main" id="{20A9D77A-19B6-B8B3-F42E-392909C893EF}"/>
+                </a:ext>
+              </a:extLst>
+            </p:cNvPr>
+            <p:cNvSpPr txBox="1"/>
+            <p:nvPr/>
+          </p:nvSpPr>
+          <p:spPr>
+            <a:xfrm>
+              <a:off x="6587407" y="22368"/>
+              <a:ext cx="2069184" cy="3970318"/>
+            </a:xfrm>
+            <a:prstGeom prst="rect">
+              <a:avLst/>
+            </a:prstGeom>
+            <a:noFill/>
+          </p:spPr>
+          <p:txBody>
+            <a:bodyPr wrap="square" rtlCol="0">
+              <a:spAutoFit/>
+            </a:bodyPr>
+            <a:lstStyle/>
+            <a:p>
+              <a:r>
+                <a:rPr lang="en-US" sz="1400" b="1" dirty="0"/>
+                <a:t>boundary</a:t>
+              </a:r>
+            </a:p>
+            <a:p>
+              <a:r>
+                <a:rPr lang="en-US" sz="1400" b="1" dirty="0"/>
+                <a:t>(</a:t>
+              </a:r>
+            </a:p>
+            <a:p>
+              <a:endParaRPr lang="en-US" sz="1400" b="1" dirty="0"/>
+            </a:p>
+            <a:p>
+              <a:pPr lvl="1"/>
+              <a:r>
+                <a:rPr lang="en-US" sz="1400" b="1" dirty="0"/>
+                <a:t>obstacle</a:t>
+              </a:r>
+            </a:p>
+            <a:p>
+              <a:pPr lvl="1"/>
+              <a:r>
+                <a:rPr lang="en-US" sz="1400" b="1" dirty="0"/>
+                <a:t>    {</a:t>
+              </a:r>
+            </a:p>
+            <a:p>
+              <a:pPr lvl="1"/>
+              <a:r>
+                <a:rPr lang="en-US" sz="1400" b="1" dirty="0"/>
+                <a:t>        type </a:t>
+              </a:r>
+              <a:r>
+                <a:rPr lang="en-US" sz="1400" b="1" dirty="0">
+                  <a:solidFill>
+                    <a:srgbClr val="0000FF"/>
+                  </a:solidFill>
+                </a:rPr>
+                <a:t>wall</a:t>
+              </a:r>
+              <a:r>
+                <a:rPr lang="en-US" sz="1400" b="1" dirty="0"/>
+                <a:t>;</a:t>
+              </a:r>
+            </a:p>
+            <a:p>
+              <a:pPr lvl="1"/>
+              <a:r>
+                <a:rPr lang="en-US" sz="1400" b="1" dirty="0"/>
+                <a:t>        faces</a:t>
+              </a:r>
+            </a:p>
+            <a:p>
+              <a:pPr lvl="1"/>
+              <a:r>
+                <a:rPr lang="en-US" sz="1400" b="1" dirty="0"/>
+                <a:t>        (</a:t>
+              </a:r>
+            </a:p>
+            <a:p>
+              <a:pPr lvl="1"/>
+              <a:r>
+                <a:rPr lang="en-US" sz="1400" b="1" dirty="0"/>
+                <a:t>            (1 3 11 9)</a:t>
+              </a:r>
+            </a:p>
+            <a:p>
+              <a:pPr lvl="1"/>
+              <a:r>
+                <a:rPr lang="en-US" sz="1400" b="1" dirty="0"/>
+                <a:t>            (3 4 12 11)</a:t>
+              </a:r>
+            </a:p>
+            <a:p>
+              <a:pPr lvl="1"/>
+              <a:r>
+                <a:rPr lang="en-US" sz="1400" b="1" dirty="0"/>
+                <a:t>        );</a:t>
+              </a:r>
+            </a:p>
+            <a:p>
+              <a:pPr lvl="1"/>
+              <a:r>
+                <a:rPr lang="en-US" sz="1400" b="1" dirty="0"/>
+                <a:t>    }</a:t>
+              </a:r>
+            </a:p>
+            <a:p>
+              <a:pPr lvl="1"/>
+              <a:r>
+                <a:rPr lang="en-US" sz="1400" b="1" dirty="0"/>
+                <a:t>);</a:t>
+              </a:r>
+            </a:p>
+            <a:p>
+              <a:pPr lvl="1"/>
+              <a:endParaRPr lang="en-US" sz="1400" b="1" dirty="0"/>
+            </a:p>
+            <a:p>
+              <a:pPr lvl="1"/>
+              <a:r>
+                <a:rPr lang="en-US" sz="1400" b="1" dirty="0" err="1"/>
+                <a:t>mergePatchPairs</a:t>
+              </a:r>
+              <a:endParaRPr lang="en-US" sz="1400" b="1" dirty="0"/>
+            </a:p>
+            <a:p>
+              <a:pPr lvl="1"/>
+              <a:r>
+                <a:rPr lang="en-US" sz="1400" b="1" dirty="0"/>
+                <a:t>(</a:t>
+              </a:r>
+            </a:p>
+            <a:p>
+              <a:pPr lvl="1"/>
+              <a:r>
+                <a:rPr lang="en-US" sz="1400" b="1" dirty="0"/>
+                <a:t>);</a:t>
+              </a:r>
+            </a:p>
+            <a:p>
+              <a:pPr lvl="1"/>
+              <a:endParaRPr lang="en-US" sz="1400" b="1" dirty="0"/>
+            </a:p>
+          </p:txBody>
+        </p:sp>
+        <p:sp>
+          <p:nvSpPr>
+            <p:cNvPr id="11" name="TextBox 10">
+              <a:extLst>
+                <a:ext uri="{FF2B5EF4-FFF2-40B4-BE49-F238E27FC236}">
+                  <a16:creationId xmlns:a16="http://schemas.microsoft.com/office/drawing/2014/main" id="{6DC14CCF-4BFF-313D-AD9B-7312714FA942}"/>
+                </a:ext>
+              </a:extLst>
+            </p:cNvPr>
+            <p:cNvSpPr txBox="1"/>
+            <p:nvPr/>
+          </p:nvSpPr>
+          <p:spPr>
+            <a:xfrm>
+              <a:off x="2086380" y="55251"/>
+              <a:ext cx="470262" cy="248933"/>
+            </a:xfrm>
+            <a:prstGeom prst="rect">
+              <a:avLst/>
+            </a:prstGeom>
+            <a:solidFill>
+              <a:schemeClr val="accent2">
+                <a:lumMod val="40000"/>
+                <a:lumOff val="60000"/>
+              </a:schemeClr>
+            </a:solidFill>
+          </p:spPr>
+          <p:txBody>
+            <a:bodyPr wrap="none" lIns="0" tIns="0" rIns="0" bIns="0" rtlCol="0" anchor="ctr" anchorCtr="0">
+              <a:noAutofit/>
+            </a:bodyPr>
+            <a:lstStyle/>
+            <a:p>
+              <a:pPr algn="ctr"/>
+              <a:r>
+                <a:rPr lang="en-US" sz="1200" b="1" dirty="0">
+                  <a:solidFill>
+                    <a:srgbClr val="0000FF"/>
+                  </a:solidFill>
+                </a:rPr>
+                <a:t>mesh</a:t>
+              </a:r>
+            </a:p>
+          </p:txBody>
+        </p:sp>
+      </p:grpSp>
+      <p:grpSp>
+        <p:nvGrpSpPr>
+          <p:cNvPr id="12" name="Group 11">
+            <a:extLst>
+              <a:ext uri="{FF2B5EF4-FFF2-40B4-BE49-F238E27FC236}">
+                <a16:creationId xmlns:a16="http://schemas.microsoft.com/office/drawing/2014/main" id="{3154686C-FBE7-33DB-52E8-E1D79A1A8674}"/>
+              </a:ext>
+            </a:extLst>
+          </p:cNvPr>
+          <p:cNvGrpSpPr/>
+          <p:nvPr/>
+        </p:nvGrpSpPr>
+        <p:grpSpPr>
+          <a:xfrm>
+            <a:off x="1545725" y="3127122"/>
+            <a:ext cx="3626032" cy="3551160"/>
+            <a:chOff x="1545725" y="3127122"/>
+            <a:chExt cx="3626032" cy="3551160"/>
+          </a:xfrm>
+        </p:grpSpPr>
+        <p:pic>
+          <p:nvPicPr>
+            <p:cNvPr id="10" name="Picture 9">
+              <a:extLst>
+                <a:ext uri="{FF2B5EF4-FFF2-40B4-BE49-F238E27FC236}">
+                  <a16:creationId xmlns:a16="http://schemas.microsoft.com/office/drawing/2014/main" id="{DC2BEF24-0035-6C2F-84E6-B0A681C000CC}"/>
+                </a:ext>
+              </a:extLst>
+            </p:cNvPr>
+            <p:cNvPicPr>
+              <a:picLocks noChangeAspect="1"/>
+            </p:cNvPicPr>
+            <p:nvPr/>
+          </p:nvPicPr>
+          <p:blipFill>
+            <a:blip r:embed="rId2"/>
+            <a:stretch>
+              <a:fillRect/>
+            </a:stretch>
+          </p:blipFill>
+          <p:spPr>
+            <a:xfrm>
+              <a:off x="1585691" y="3127122"/>
+              <a:ext cx="3371516" cy="1708160"/>
+            </a:xfrm>
+            <a:prstGeom prst="rect">
+              <a:avLst/>
+            </a:prstGeom>
+          </p:spPr>
+        </p:pic>
+        <p:pic>
+          <p:nvPicPr>
+            <p:cNvPr id="13" name="Picture 12">
+              <a:extLst>
+                <a:ext uri="{FF2B5EF4-FFF2-40B4-BE49-F238E27FC236}">
+                  <a16:creationId xmlns:a16="http://schemas.microsoft.com/office/drawing/2014/main" id="{5FF999FE-4044-9898-FF95-9FD88133F33E}"/>
+                </a:ext>
+              </a:extLst>
+            </p:cNvPr>
+            <p:cNvPicPr>
+              <a:picLocks noChangeAspect="1"/>
+            </p:cNvPicPr>
+            <p:nvPr/>
+          </p:nvPicPr>
+          <p:blipFill>
+            <a:blip r:embed="rId3"/>
+            <a:stretch>
+              <a:fillRect/>
+            </a:stretch>
+          </p:blipFill>
+          <p:spPr>
+            <a:xfrm>
+              <a:off x="1545725" y="4921223"/>
+              <a:ext cx="3626032" cy="1757059"/>
+            </a:xfrm>
+            <a:prstGeom prst="rect">
+              <a:avLst/>
+            </a:prstGeom>
+          </p:spPr>
+        </p:pic>
+      </p:grpSp>
+      <p:grpSp>
+        <p:nvGrpSpPr>
+          <p:cNvPr id="3" name="Group 2">
+            <a:extLst>
+              <a:ext uri="{FF2B5EF4-FFF2-40B4-BE49-F238E27FC236}">
+                <a16:creationId xmlns:a16="http://schemas.microsoft.com/office/drawing/2014/main" id="{2845CFA0-DEB1-078E-5C32-5847C7D5799B}"/>
+              </a:ext>
+            </a:extLst>
+          </p:cNvPr>
+          <p:cNvGrpSpPr>
+            <a:grpSpLocks noChangeAspect="1"/>
+          </p:cNvGrpSpPr>
+          <p:nvPr/>
+        </p:nvGrpSpPr>
+        <p:grpSpPr>
+          <a:xfrm>
+            <a:off x="8380429" y="1928050"/>
+            <a:ext cx="3688833" cy="4834626"/>
+            <a:chOff x="8569234" y="2184300"/>
+            <a:chExt cx="3434041" cy="4500693"/>
+          </a:xfrm>
+        </p:grpSpPr>
+        <p:pic>
+          <p:nvPicPr>
+            <p:cNvPr id="15" name="Picture 14">
+              <a:extLst>
+                <a:ext uri="{FF2B5EF4-FFF2-40B4-BE49-F238E27FC236}">
+                  <a16:creationId xmlns:a16="http://schemas.microsoft.com/office/drawing/2014/main" id="{D5B76521-C922-6CA1-DA66-70DB9D07B50A}"/>
+                </a:ext>
+              </a:extLst>
+            </p:cNvPr>
+            <p:cNvPicPr>
+              <a:picLocks noChangeAspect="1"/>
+            </p:cNvPicPr>
+            <p:nvPr/>
+          </p:nvPicPr>
+          <p:blipFill>
+            <a:blip r:embed="rId4"/>
+            <a:stretch>
+              <a:fillRect/>
+            </a:stretch>
+          </p:blipFill>
+          <p:spPr>
+            <a:xfrm>
+              <a:off x="8569234" y="4993308"/>
+              <a:ext cx="3262535" cy="1691685"/>
+            </a:xfrm>
+            <a:prstGeom prst="rect">
+              <a:avLst/>
+            </a:prstGeom>
+            <a:ln>
+              <a:solidFill>
+                <a:schemeClr val="tx1"/>
+              </a:solidFill>
+            </a:ln>
+            <a:effectLst>
+              <a:outerShdw blurRad="50800" dist="38100" dir="8100000" algn="tr" rotWithShape="0">
+                <a:prstClr val="black">
+                  <a:alpha val="40000"/>
+                </a:prstClr>
+              </a:outerShdw>
+            </a:effectLst>
+          </p:spPr>
+        </p:pic>
+        <p:grpSp>
+          <p:nvGrpSpPr>
+            <p:cNvPr id="2" name="Group 1">
+              <a:extLst>
+                <a:ext uri="{FF2B5EF4-FFF2-40B4-BE49-F238E27FC236}">
+                  <a16:creationId xmlns:a16="http://schemas.microsoft.com/office/drawing/2014/main" id="{B5A53BBB-6EA4-8F23-0D3F-20DE275D7F98}"/>
+                </a:ext>
+              </a:extLst>
+            </p:cNvPr>
+            <p:cNvGrpSpPr>
+              <a:grpSpLocks noChangeAspect="1"/>
+            </p:cNvGrpSpPr>
+            <p:nvPr/>
+          </p:nvGrpSpPr>
+          <p:grpSpPr>
+            <a:xfrm>
+              <a:off x="10021335" y="2184300"/>
+              <a:ext cx="1981940" cy="2650982"/>
+              <a:chOff x="9318806" y="214181"/>
+              <a:chExt cx="2862943" cy="3829384"/>
+            </a:xfrm>
+          </p:grpSpPr>
+          <p:pic>
+            <p:nvPicPr>
+              <p:cNvPr id="17" name="Picture 16">
+                <a:extLst>
+                  <a:ext uri="{FF2B5EF4-FFF2-40B4-BE49-F238E27FC236}">
+                    <a16:creationId xmlns:a16="http://schemas.microsoft.com/office/drawing/2014/main" id="{A6D97666-6249-9FEA-B07B-32171F4B9A71}"/>
+                  </a:ext>
+                </a:extLst>
+              </p:cNvPr>
+              <p:cNvPicPr>
+                <a:picLocks noChangeAspect="1"/>
+              </p:cNvPicPr>
+              <p:nvPr/>
+            </p:nvPicPr>
+            <p:blipFill>
+              <a:blip r:embed="rId5"/>
+              <a:stretch>
+                <a:fillRect/>
+              </a:stretch>
+            </p:blipFill>
+            <p:spPr>
+              <a:xfrm>
+                <a:off x="9631679" y="214181"/>
+                <a:ext cx="2302329" cy="3829384"/>
+              </a:xfrm>
+              <a:prstGeom prst="rect">
+                <a:avLst/>
+              </a:prstGeom>
+              <a:ln>
+                <a:solidFill>
+                  <a:schemeClr val="tx1"/>
+                </a:solidFill>
+              </a:ln>
+              <a:effectLst>
+                <a:outerShdw blurRad="50800" dist="38100" dir="8100000" algn="tr" rotWithShape="0">
+                  <a:prstClr val="black">
+                    <a:alpha val="40000"/>
+                  </a:prstClr>
+                </a:outerShdw>
+              </a:effectLst>
+            </p:spPr>
+          </p:pic>
+          <p:sp>
+            <p:nvSpPr>
+              <p:cNvPr id="18" name="Rectangle 17">
+                <a:extLst>
+                  <a:ext uri="{FF2B5EF4-FFF2-40B4-BE49-F238E27FC236}">
+                    <a16:creationId xmlns:a16="http://schemas.microsoft.com/office/drawing/2014/main" id="{0E546A47-D3CE-97B8-C716-942FC2F6C28E}"/>
+                  </a:ext>
+                </a:extLst>
+              </p:cNvPr>
+              <p:cNvSpPr/>
+              <p:nvPr/>
+            </p:nvSpPr>
+            <p:spPr>
+              <a:xfrm>
+                <a:off x="9318806" y="979852"/>
+                <a:ext cx="2862943" cy="1619796"/>
+              </a:xfrm>
+              <a:prstGeom prst="rect">
+                <a:avLst/>
+              </a:prstGeom>
+              <a:noFill/>
+              <a:ln w="28575">
+                <a:solidFill>
+                  <a:srgbClr val="FF0000"/>
+                </a:solidFill>
+                <a:prstDash val="dash"/>
+              </a:ln>
+            </p:spPr>
+            <p:style>
+              <a:lnRef idx="2">
+                <a:schemeClr val="accent1">
+                  <a:shade val="15000"/>
+                </a:schemeClr>
+              </a:lnRef>
+              <a:fillRef idx="1">
+                <a:schemeClr val="accent1"/>
+              </a:fillRef>
+              <a:effectRef idx="0">
+                <a:schemeClr val="accent1"/>
+              </a:effectRef>
+              <a:fontRef idx="minor">
+                <a:schemeClr val="lt1"/>
+              </a:fontRef>
+            </p:style>
+            <p:txBody>
+              <a:bodyPr rtlCol="0" anchor="ctr"/>
+              <a:lstStyle/>
+              <a:p>
+                <a:pPr algn="ctr"/>
+                <a:endParaRPr lang="LID4096"/>
+              </a:p>
+            </p:txBody>
+          </p:sp>
+        </p:grpSp>
+      </p:grpSp>
+      <p:cxnSp>
+        <p:nvCxnSpPr>
+          <p:cNvPr id="9" name="Straight Connector 8">
+            <a:extLst>
+              <a:ext uri="{FF2B5EF4-FFF2-40B4-BE49-F238E27FC236}">
+                <a16:creationId xmlns:a16="http://schemas.microsoft.com/office/drawing/2014/main" id="{A1F51B08-827C-1905-ED98-F9443DB432F1}"/>
+              </a:ext>
+            </a:extLst>
+          </p:cNvPr>
+          <p:cNvCxnSpPr/>
+          <p:nvPr/>
+        </p:nvCxnSpPr>
         <p:spPr>
           <a:xfrm>
-            <a:off x="1375954" y="0"/>
-            <a:ext cx="3718560" cy="1708160"/>
-          </a:xfrm>
-          <a:prstGeom prst="rect">
-            <a:avLst/>
-          </a:prstGeom>
-          <a:noFill/>
-        </p:spPr>
-        <p:txBody>
-          <a:bodyPr wrap="square" rtlCol="0">
-            <a:spAutoFit/>
-          </a:bodyPr>
-          <a:lstStyle/>
-          <a:p>
-            <a:r>
-              <a:rPr lang="en-US" sz="1050" dirty="0"/>
-              <a:t>blocks</a:t>
-            </a:r>
-          </a:p>
-          <a:p>
-            <a:r>
-              <a:rPr lang="en-US" sz="1050" dirty="0"/>
-              <a:t>(</a:t>
-            </a:r>
-          </a:p>
-          <a:p>
-            <a:r>
-              <a:rPr lang="en-US" sz="1050" dirty="0"/>
-              <a:t>    hex (0 1 3 2 8 9 11 10) </a:t>
-            </a:r>
-            <a:r>
-              <a:rPr lang="en-US" sz="1050" dirty="0">
-                <a:solidFill>
-                  <a:srgbClr val="0000FF"/>
-                </a:solidFill>
-              </a:rPr>
-              <a:t>(25 10 1)</a:t>
-            </a:r>
-            <a:r>
-              <a:rPr lang="en-US" sz="1050" dirty="0"/>
-              <a:t> </a:t>
-            </a:r>
-            <a:r>
-              <a:rPr lang="en-US" sz="1050" dirty="0" err="1"/>
-              <a:t>simpleGrading</a:t>
-            </a:r>
-            <a:r>
-              <a:rPr lang="en-US" sz="1050" dirty="0"/>
-              <a:t> (1 1 1)</a:t>
-            </a:r>
-          </a:p>
-          <a:p>
-            <a:r>
-              <a:rPr lang="en-US" sz="1050" dirty="0"/>
-              <a:t>    hex (2 3 6 5 10 11 14 13) (25 40 1) </a:t>
-            </a:r>
-            <a:r>
-              <a:rPr lang="en-US" sz="1050" dirty="0" err="1"/>
-              <a:t>simpleGrading</a:t>
-            </a:r>
-            <a:r>
-              <a:rPr lang="en-US" sz="1050" dirty="0"/>
-              <a:t> (1 1 1)</a:t>
-            </a:r>
-          </a:p>
-          <a:p>
-            <a:r>
-              <a:rPr lang="en-US" sz="1050" dirty="0"/>
-              <a:t>    hex (3 4 7 6 11 12 15 14) (100 40 1) </a:t>
-            </a:r>
-            <a:r>
-              <a:rPr lang="en-US" sz="1050" dirty="0" err="1"/>
-              <a:t>simpleGrading</a:t>
-            </a:r>
-            <a:r>
-              <a:rPr lang="en-US" sz="1050" dirty="0"/>
-              <a:t> (1 1 1)</a:t>
-            </a:r>
-          </a:p>
-          <a:p>
-            <a:r>
-              <a:rPr lang="en-US" sz="1050" dirty="0"/>
-              <a:t>);</a:t>
-            </a:r>
-          </a:p>
-          <a:p>
-            <a:endParaRPr lang="en-US" sz="1050" dirty="0"/>
-          </a:p>
-          <a:p>
-            <a:r>
-              <a:rPr lang="en-US" sz="1050" dirty="0"/>
-              <a:t>edges</a:t>
-            </a:r>
-          </a:p>
-          <a:p>
-            <a:r>
-              <a:rPr lang="en-US" sz="1050" dirty="0"/>
-              <a:t>(</a:t>
-            </a:r>
-          </a:p>
-          <a:p>
-            <a:r>
-              <a:rPr lang="en-US" sz="1050" dirty="0"/>
-              <a:t>);</a:t>
-            </a:r>
-          </a:p>
-        </p:txBody>
-      </p:sp>
-      <p:sp>
-        <p:nvSpPr>
-          <p:cNvPr id="7" name="TextBox 6">
-            <a:extLst>
-              <a:ext uri="{FF2B5EF4-FFF2-40B4-BE49-F238E27FC236}">
-                <a16:creationId xmlns:a16="http://schemas.microsoft.com/office/drawing/2014/main" id="{2D390098-F73D-3BA8-1B5C-A54E9D6EA111}"/>
-              </a:ext>
-            </a:extLst>
-          </p:cNvPr>
-          <p:cNvSpPr txBox="1"/>
-          <p:nvPr/>
-        </p:nvSpPr>
-        <p:spPr>
-          <a:xfrm>
-            <a:off x="4850674" y="22368"/>
-            <a:ext cx="1602377" cy="5909310"/>
-          </a:xfrm>
-          <a:prstGeom prst="rect">
-            <a:avLst/>
-          </a:prstGeom>
-          <a:noFill/>
-        </p:spPr>
-        <p:txBody>
-          <a:bodyPr wrap="square" rtlCol="0">
-            <a:spAutoFit/>
-          </a:bodyPr>
-          <a:lstStyle/>
-          <a:p>
-            <a:r>
-              <a:rPr lang="en-US" sz="1050" dirty="0"/>
-              <a:t>boundary</a:t>
-            </a:r>
-          </a:p>
-          <a:p>
-            <a:r>
-              <a:rPr lang="en-US" sz="1050" dirty="0"/>
-              <a:t>(</a:t>
-            </a:r>
-          </a:p>
-          <a:p>
-            <a:r>
-              <a:rPr lang="en-US" sz="1050" dirty="0"/>
-              <a:t>    inlet</a:t>
-            </a:r>
-          </a:p>
-          <a:p>
-            <a:r>
-              <a:rPr lang="en-US" sz="1050" dirty="0"/>
-              <a:t>    {</a:t>
-            </a:r>
-          </a:p>
-          <a:p>
-            <a:r>
-              <a:rPr lang="en-US" sz="1050" dirty="0"/>
-              <a:t>        type patch;</a:t>
-            </a:r>
-          </a:p>
-          <a:p>
-            <a:r>
-              <a:rPr lang="en-US" sz="1050" dirty="0"/>
-              <a:t>        faces</a:t>
-            </a:r>
-          </a:p>
-          <a:p>
-            <a:r>
-              <a:rPr lang="en-US" sz="1050" dirty="0"/>
-              <a:t>        (</a:t>
-            </a:r>
-          </a:p>
-          <a:p>
-            <a:r>
-              <a:rPr lang="en-US" sz="1050" dirty="0"/>
-              <a:t>            (0 8 10 2)</a:t>
-            </a:r>
-          </a:p>
-          <a:p>
-            <a:r>
-              <a:rPr lang="en-US" sz="1050" dirty="0"/>
-              <a:t>            (2 10 13 5)</a:t>
-            </a:r>
-          </a:p>
-          <a:p>
-            <a:r>
-              <a:rPr lang="en-US" sz="1050" dirty="0"/>
-              <a:t>        );</a:t>
-            </a:r>
-          </a:p>
-          <a:p>
-            <a:r>
-              <a:rPr lang="en-US" sz="1050" dirty="0"/>
-              <a:t>    }</a:t>
-            </a:r>
-          </a:p>
-          <a:p>
-            <a:r>
-              <a:rPr lang="en-US" sz="1050" dirty="0">
-                <a:solidFill>
-                  <a:srgbClr val="0000FF"/>
-                </a:solidFill>
-              </a:rPr>
-              <a:t>    outlet</a:t>
-            </a:r>
-          </a:p>
-          <a:p>
-            <a:r>
-              <a:rPr lang="en-US" sz="1050" dirty="0">
-                <a:solidFill>
-                  <a:srgbClr val="0000FF"/>
-                </a:solidFill>
-              </a:rPr>
-              <a:t>    {</a:t>
-            </a:r>
-          </a:p>
-          <a:p>
-            <a:r>
-              <a:rPr lang="en-US" sz="1050" dirty="0">
-                <a:solidFill>
-                  <a:srgbClr val="0000FF"/>
-                </a:solidFill>
-              </a:rPr>
-              <a:t>        type patch;</a:t>
-            </a:r>
-          </a:p>
-          <a:p>
-            <a:r>
-              <a:rPr lang="en-US" sz="1050" dirty="0">
-                <a:solidFill>
-                  <a:srgbClr val="0000FF"/>
-                </a:solidFill>
-              </a:rPr>
-              <a:t>        faces</a:t>
-            </a:r>
-          </a:p>
-          <a:p>
-            <a:r>
-              <a:rPr lang="en-US" sz="1050" dirty="0">
-                <a:solidFill>
-                  <a:srgbClr val="0000FF"/>
-                </a:solidFill>
-              </a:rPr>
-              <a:t>        (</a:t>
-            </a:r>
-          </a:p>
-          <a:p>
-            <a:r>
-              <a:rPr lang="en-US" sz="1050" dirty="0">
-                <a:solidFill>
-                  <a:srgbClr val="0000FF"/>
-                </a:solidFill>
-              </a:rPr>
-              <a:t>            (4 7 15 12)</a:t>
-            </a:r>
-          </a:p>
-          <a:p>
-            <a:r>
-              <a:rPr lang="en-US" sz="1050" dirty="0">
-                <a:solidFill>
-                  <a:srgbClr val="0000FF"/>
-                </a:solidFill>
-              </a:rPr>
-              <a:t>        );</a:t>
-            </a:r>
-          </a:p>
-          <a:p>
-            <a:r>
-              <a:rPr lang="en-US" sz="1050" dirty="0">
-                <a:solidFill>
-                  <a:srgbClr val="0000FF"/>
-                </a:solidFill>
-              </a:rPr>
-              <a:t>    }</a:t>
-            </a:r>
-          </a:p>
-          <a:p>
-            <a:r>
-              <a:rPr lang="en-US" sz="1050" dirty="0"/>
-              <a:t>    bottom</a:t>
-            </a:r>
-          </a:p>
-          <a:p>
-            <a:r>
-              <a:rPr lang="en-US" sz="1050" dirty="0"/>
-              <a:t>    {</a:t>
-            </a:r>
-          </a:p>
-          <a:p>
-            <a:r>
-              <a:rPr lang="en-US" sz="1050" dirty="0"/>
-              <a:t>        type </a:t>
-            </a:r>
-            <a:r>
-              <a:rPr lang="en-US" sz="1050" dirty="0" err="1"/>
-              <a:t>symmetryPlane</a:t>
-            </a:r>
-            <a:r>
-              <a:rPr lang="en-US" sz="1050" dirty="0"/>
-              <a:t>;</a:t>
-            </a:r>
-          </a:p>
-          <a:p>
-            <a:r>
-              <a:rPr lang="en-US" sz="1050" dirty="0"/>
-              <a:t>        faces</a:t>
-            </a:r>
-          </a:p>
-          <a:p>
-            <a:r>
-              <a:rPr lang="en-US" sz="1050" dirty="0"/>
-              <a:t>        (</a:t>
-            </a:r>
-          </a:p>
-          <a:p>
-            <a:r>
-              <a:rPr lang="en-US" sz="1050" dirty="0"/>
-              <a:t>            (0 1 9 8)</a:t>
-            </a:r>
-          </a:p>
-          <a:p>
-            <a:r>
-              <a:rPr lang="en-US" sz="1050" dirty="0"/>
-              <a:t>        );</a:t>
-            </a:r>
-          </a:p>
-          <a:p>
-            <a:r>
-              <a:rPr lang="en-US" sz="1050" dirty="0"/>
-              <a:t>    }</a:t>
-            </a:r>
-          </a:p>
-          <a:p>
-            <a:r>
-              <a:rPr lang="en-US" sz="1050" dirty="0"/>
-              <a:t>    top</a:t>
-            </a:r>
-          </a:p>
-          <a:p>
-            <a:r>
-              <a:rPr lang="en-US" sz="1050" dirty="0"/>
-              <a:t>    {</a:t>
-            </a:r>
-          </a:p>
-          <a:p>
-            <a:r>
-              <a:rPr lang="en-US" sz="1050" dirty="0"/>
-              <a:t>        type </a:t>
-            </a:r>
-            <a:r>
-              <a:rPr lang="en-US" sz="1050" dirty="0" err="1"/>
-              <a:t>symmetryPlane</a:t>
-            </a:r>
-            <a:r>
-              <a:rPr lang="en-US" sz="1050" dirty="0"/>
-              <a:t>;</a:t>
-            </a:r>
-          </a:p>
-          <a:p>
-            <a:r>
-              <a:rPr lang="en-US" sz="1050" dirty="0"/>
-              <a:t>        faces</a:t>
-            </a:r>
-          </a:p>
-          <a:p>
-            <a:r>
-              <a:rPr lang="en-US" sz="1050" dirty="0"/>
-              <a:t>        (</a:t>
-            </a:r>
-          </a:p>
-          <a:p>
-            <a:r>
-              <a:rPr lang="en-US" sz="1050" dirty="0"/>
-              <a:t>            (5 13 14 6)</a:t>
-            </a:r>
-          </a:p>
-          <a:p>
-            <a:r>
-              <a:rPr lang="en-US" sz="1050" dirty="0"/>
-              <a:t>            (6 14 15 7)</a:t>
-            </a:r>
-          </a:p>
-          <a:p>
-            <a:r>
-              <a:rPr lang="en-US" sz="1050" dirty="0"/>
-              <a:t>        );</a:t>
-            </a:r>
-          </a:p>
-          <a:p>
-            <a:r>
-              <a:rPr lang="en-US" sz="1050" dirty="0"/>
-              <a:t>    }</a:t>
-            </a:r>
-            <a:endParaRPr lang="LID4096" sz="1050" dirty="0"/>
-          </a:p>
-        </p:txBody>
-      </p:sp>
-      <p:sp>
-        <p:nvSpPr>
-          <p:cNvPr id="8" name="TextBox 7">
-            <a:extLst>
-              <a:ext uri="{FF2B5EF4-FFF2-40B4-BE49-F238E27FC236}">
-                <a16:creationId xmlns:a16="http://schemas.microsoft.com/office/drawing/2014/main" id="{20A9D77A-19B6-B8B3-F42E-392909C893EF}"/>
-              </a:ext>
-            </a:extLst>
-          </p:cNvPr>
-          <p:cNvSpPr txBox="1"/>
-          <p:nvPr/>
-        </p:nvSpPr>
-        <p:spPr>
-          <a:xfrm>
-            <a:off x="6709954" y="22368"/>
-            <a:ext cx="1859280" cy="3000821"/>
-          </a:xfrm>
-          <a:prstGeom prst="rect">
-            <a:avLst/>
-          </a:prstGeom>
-          <a:noFill/>
-        </p:spPr>
-        <p:txBody>
-          <a:bodyPr wrap="square" rtlCol="0">
-            <a:spAutoFit/>
-          </a:bodyPr>
-          <a:lstStyle/>
-          <a:p>
-            <a:r>
-              <a:rPr lang="en-US" sz="1050" dirty="0"/>
-              <a:t>boundary</a:t>
-            </a:r>
-          </a:p>
-          <a:p>
-            <a:r>
-              <a:rPr lang="en-US" sz="1050" dirty="0"/>
-              <a:t>(</a:t>
-            </a:r>
-          </a:p>
-          <a:p>
-            <a:endParaRPr lang="en-US" sz="1050" dirty="0"/>
-          </a:p>
-          <a:p>
-            <a:pPr lvl="1"/>
-            <a:r>
-              <a:rPr lang="en-US" sz="1050" dirty="0"/>
-              <a:t>obstacle</a:t>
-            </a:r>
-          </a:p>
-          <a:p>
-            <a:pPr lvl="1"/>
-            <a:r>
-              <a:rPr lang="en-US" sz="1050" dirty="0"/>
-              <a:t>    {</a:t>
-            </a:r>
-          </a:p>
-          <a:p>
-            <a:pPr lvl="1"/>
-            <a:r>
-              <a:rPr lang="en-US" sz="1050" dirty="0"/>
-              <a:t>        type </a:t>
-            </a:r>
-            <a:r>
-              <a:rPr lang="en-US" sz="1050" dirty="0">
-                <a:solidFill>
-                  <a:srgbClr val="0000FF"/>
-                </a:solidFill>
-              </a:rPr>
-              <a:t>wall</a:t>
-            </a:r>
-            <a:r>
-              <a:rPr lang="en-US" sz="1050" dirty="0"/>
-              <a:t>;</a:t>
-            </a:r>
-          </a:p>
-          <a:p>
-            <a:pPr lvl="1"/>
-            <a:r>
-              <a:rPr lang="en-US" sz="1050" dirty="0"/>
-              <a:t>        faces</a:t>
-            </a:r>
-          </a:p>
-          <a:p>
-            <a:pPr lvl="1"/>
-            <a:r>
-              <a:rPr lang="en-US" sz="1050" dirty="0"/>
-              <a:t>        (</a:t>
-            </a:r>
-          </a:p>
-          <a:p>
-            <a:pPr lvl="1"/>
-            <a:r>
-              <a:rPr lang="en-US" sz="1050" dirty="0"/>
-              <a:t>            (1 3 11 9)</a:t>
-            </a:r>
-          </a:p>
-          <a:p>
-            <a:pPr lvl="1"/>
-            <a:r>
-              <a:rPr lang="en-US" sz="1050" dirty="0"/>
-              <a:t>            (3 4 12 11)</a:t>
-            </a:r>
-          </a:p>
-          <a:p>
-            <a:pPr lvl="1"/>
-            <a:r>
-              <a:rPr lang="en-US" sz="1050" dirty="0"/>
-              <a:t>        );</a:t>
-            </a:r>
-          </a:p>
-          <a:p>
-            <a:pPr lvl="1"/>
-            <a:r>
-              <a:rPr lang="en-US" sz="1050" dirty="0"/>
-              <a:t>    }</a:t>
-            </a:r>
-          </a:p>
-          <a:p>
-            <a:pPr lvl="1"/>
-            <a:r>
-              <a:rPr lang="en-US" sz="1050" dirty="0"/>
-              <a:t>);</a:t>
-            </a:r>
-          </a:p>
-          <a:p>
-            <a:pPr lvl="1"/>
-            <a:endParaRPr lang="en-US" sz="1050" dirty="0"/>
-          </a:p>
-          <a:p>
-            <a:pPr lvl="1"/>
-            <a:r>
-              <a:rPr lang="en-US" sz="1050" dirty="0" err="1"/>
-              <a:t>mergePatchPairs</a:t>
-            </a:r>
-            <a:endParaRPr lang="en-US" sz="1050" dirty="0"/>
-          </a:p>
-          <a:p>
-            <a:pPr lvl="1"/>
-            <a:r>
-              <a:rPr lang="en-US" sz="1050" dirty="0"/>
-              <a:t>(</a:t>
-            </a:r>
-          </a:p>
-          <a:p>
-            <a:pPr lvl="1"/>
-            <a:r>
-              <a:rPr lang="en-US" sz="1050" dirty="0"/>
-              <a:t>);</a:t>
-            </a:r>
-          </a:p>
-          <a:p>
-            <a:pPr lvl="1"/>
-            <a:endParaRPr lang="en-US" sz="1050" dirty="0"/>
-          </a:p>
-        </p:txBody>
-      </p:sp>
-      <p:pic>
-        <p:nvPicPr>
-          <p:cNvPr id="10" name="Picture 9">
-            <a:extLst>
-              <a:ext uri="{FF2B5EF4-FFF2-40B4-BE49-F238E27FC236}">
-                <a16:creationId xmlns:a16="http://schemas.microsoft.com/office/drawing/2014/main" id="{DC2BEF24-0035-6C2F-84E6-B0A681C000CC}"/>
-              </a:ext>
-            </a:extLst>
-          </p:cNvPr>
-          <p:cNvPicPr>
-            <a:picLocks noChangeAspect="1"/>
-          </p:cNvPicPr>
-          <p:nvPr/>
-        </p:nvPicPr>
-        <p:blipFill>
-          <a:blip r:embed="rId2"/>
-          <a:stretch>
-            <a:fillRect/>
-          </a:stretch>
-        </p:blipFill>
-        <p:spPr>
-          <a:xfrm>
-            <a:off x="1504678" y="1772979"/>
-            <a:ext cx="2742406" cy="1389425"/>
-          </a:xfrm>
-          <a:prstGeom prst="rect">
-            <a:avLst/>
-          </a:prstGeom>
-        </p:spPr>
-      </p:pic>
-      <p:sp>
-        <p:nvSpPr>
-          <p:cNvPr id="11" name="TextBox 10">
-            <a:extLst>
-              <a:ext uri="{FF2B5EF4-FFF2-40B4-BE49-F238E27FC236}">
-                <a16:creationId xmlns:a16="http://schemas.microsoft.com/office/drawing/2014/main" id="{6DC14CCF-4BFF-313D-AD9B-7312714FA942}"/>
-              </a:ext>
-            </a:extLst>
-          </p:cNvPr>
-          <p:cNvSpPr txBox="1"/>
-          <p:nvPr/>
-        </p:nvSpPr>
-        <p:spPr>
-          <a:xfrm>
-            <a:off x="2887521" y="22368"/>
-            <a:ext cx="470262" cy="248933"/>
-          </a:xfrm>
-          <a:prstGeom prst="rect">
-            <a:avLst/>
-          </a:prstGeom>
-          <a:solidFill>
-            <a:schemeClr val="accent2">
-              <a:lumMod val="40000"/>
-              <a:lumOff val="60000"/>
-            </a:schemeClr>
-          </a:solidFill>
-        </p:spPr>
-        <p:txBody>
-          <a:bodyPr wrap="none" lIns="0" tIns="0" rIns="0" bIns="0" rtlCol="0" anchor="ctr" anchorCtr="0">
-            <a:noAutofit/>
-          </a:bodyPr>
-          <a:lstStyle/>
-          <a:p>
-            <a:pPr algn="ctr"/>
-            <a:r>
-              <a:rPr lang="en-US" sz="1200" b="1" dirty="0">
-                <a:solidFill>
-                  <a:srgbClr val="0000FF"/>
-                </a:solidFill>
-              </a:rPr>
-              <a:t>mesh</a:t>
-            </a:r>
-          </a:p>
-        </p:txBody>
-      </p:sp>
-      <p:pic>
-        <p:nvPicPr>
-          <p:cNvPr id="13" name="Picture 12">
-            <a:extLst>
-              <a:ext uri="{FF2B5EF4-FFF2-40B4-BE49-F238E27FC236}">
-                <a16:creationId xmlns:a16="http://schemas.microsoft.com/office/drawing/2014/main" id="{5FF999FE-4044-9898-FF95-9FD88133F33E}"/>
-              </a:ext>
-            </a:extLst>
-          </p:cNvPr>
-          <p:cNvPicPr>
-            <a:picLocks noChangeAspect="1"/>
-          </p:cNvPicPr>
-          <p:nvPr/>
-        </p:nvPicPr>
-        <p:blipFill>
-          <a:blip r:embed="rId3"/>
-          <a:stretch>
-            <a:fillRect/>
-          </a:stretch>
-        </p:blipFill>
-        <p:spPr>
-          <a:xfrm>
-            <a:off x="775063" y="3695597"/>
-            <a:ext cx="3626032" cy="1757059"/>
-          </a:xfrm>
-          <a:prstGeom prst="rect">
-            <a:avLst/>
-          </a:prstGeom>
-        </p:spPr>
-      </p:pic>
-      <p:pic>
-        <p:nvPicPr>
-          <p:cNvPr id="15" name="Picture 14">
-            <a:extLst>
-              <a:ext uri="{FF2B5EF4-FFF2-40B4-BE49-F238E27FC236}">
-                <a16:creationId xmlns:a16="http://schemas.microsoft.com/office/drawing/2014/main" id="{D5B76521-C922-6CA1-DA66-70DB9D07B50A}"/>
-              </a:ext>
-            </a:extLst>
-          </p:cNvPr>
-          <p:cNvPicPr>
-            <a:picLocks noChangeAspect="1"/>
-          </p:cNvPicPr>
-          <p:nvPr/>
-        </p:nvPicPr>
-        <p:blipFill>
-          <a:blip r:embed="rId4"/>
-          <a:stretch>
-            <a:fillRect/>
-          </a:stretch>
-        </p:blipFill>
-        <p:spPr>
-          <a:xfrm>
-            <a:off x="7769978" y="4507363"/>
-            <a:ext cx="4061791" cy="2106114"/>
-          </a:xfrm>
-          <a:prstGeom prst="rect">
+            <a:off x="1375954" y="160257"/>
+            <a:ext cx="0" cy="3200400"/>
+          </a:xfrm>
+          <a:prstGeom prst="line">
             <a:avLst/>
           </a:prstGeom>
           <a:ln>
@@ -5867,33 +7515,39 @@
             </a:outerShdw>
           </a:effectLst>
         </p:spPr>
-      </p:pic>
-      <p:pic>
-        <p:nvPicPr>
-          <p:cNvPr id="17" name="Picture 16">
-            <a:extLst>
-              <a:ext uri="{FF2B5EF4-FFF2-40B4-BE49-F238E27FC236}">
-                <a16:creationId xmlns:a16="http://schemas.microsoft.com/office/drawing/2014/main" id="{A6D97666-6249-9FEA-B07B-32171F4B9A71}"/>
-              </a:ext>
-            </a:extLst>
-          </p:cNvPr>
-          <p:cNvPicPr>
-            <a:picLocks noChangeAspect="1"/>
-          </p:cNvPicPr>
+        <p:style>
+          <a:lnRef idx="1">
+            <a:schemeClr val="accent1"/>
+          </a:lnRef>
+          <a:fillRef idx="0">
+            <a:schemeClr val="accent1"/>
+          </a:fillRef>
+          <a:effectRef idx="0">
+            <a:schemeClr val="accent1"/>
+          </a:effectRef>
+          <a:fontRef idx="minor">
+            <a:schemeClr val="tx1"/>
+          </a:fontRef>
+        </p:style>
+      </p:cxnSp>
+      <p:cxnSp>
+        <p:nvCxnSpPr>
+          <p:cNvPr id="14" name="Straight Connector 13">
+            <a:extLst>
+              <a:ext uri="{FF2B5EF4-FFF2-40B4-BE49-F238E27FC236}">
+                <a16:creationId xmlns:a16="http://schemas.microsoft.com/office/drawing/2014/main" id="{F4F758BF-E651-A694-5D5B-047882BBAC8A}"/>
+              </a:ext>
+            </a:extLst>
+          </p:cNvPr>
+          <p:cNvCxnSpPr/>
           <p:nvPr/>
-        </p:nvPicPr>
-        <p:blipFill>
-          <a:blip r:embed="rId5"/>
-          <a:stretch>
-            <a:fillRect/>
-          </a:stretch>
-        </p:blipFill>
+        </p:nvCxnSpPr>
         <p:spPr>
           <a:xfrm>
-            <a:off x="9631679" y="244523"/>
-            <a:ext cx="2302329" cy="3829384"/>
-          </a:xfrm>
-          <a:prstGeom prst="rect">
+            <a:off x="5553600" y="160257"/>
+            <a:ext cx="0" cy="6583680"/>
+          </a:xfrm>
+          <a:prstGeom prst="line">
             <a:avLst/>
           </a:prstGeom>
           <a:ln>
@@ -5909,60 +7563,117 @@
             </a:outerShdw>
           </a:effectLst>
         </p:spPr>
-      </p:pic>
-      <p:sp>
-        <p:nvSpPr>
-          <p:cNvPr id="18" name="Rectangle 17">
-            <a:extLst>
-              <a:ext uri="{FF2B5EF4-FFF2-40B4-BE49-F238E27FC236}">
-                <a16:creationId xmlns:a16="http://schemas.microsoft.com/office/drawing/2014/main" id="{0E546A47-D3CE-97B8-C716-942FC2F6C28E}"/>
-              </a:ext>
-            </a:extLst>
-          </p:cNvPr>
-          <p:cNvSpPr/>
-          <p:nvPr/>
-        </p:nvSpPr>
-        <p:spPr>
-          <a:xfrm>
-            <a:off x="9196251" y="1010194"/>
-            <a:ext cx="2862943" cy="1619795"/>
-          </a:xfrm>
-          <a:prstGeom prst="rect">
-            <a:avLst/>
-          </a:prstGeom>
-          <a:noFill/>
-          <a:ln w="28575">
-            <a:solidFill>
-              <a:srgbClr val="FF0000"/>
-            </a:solidFill>
-            <a:prstDash val="dash"/>
-          </a:ln>
-        </p:spPr>
         <p:style>
-          <a:lnRef idx="2">
-            <a:schemeClr val="accent1">
-              <a:shade val="15000"/>
-            </a:schemeClr>
+          <a:lnRef idx="1">
+            <a:schemeClr val="accent1"/>
           </a:lnRef>
-          <a:fillRef idx="1">
+          <a:fillRef idx="0">
             <a:schemeClr val="accent1"/>
           </a:fillRef>
           <a:effectRef idx="0">
             <a:schemeClr val="accent1"/>
           </a:effectRef>
           <a:fontRef idx="minor">
-            <a:schemeClr val="lt1"/>
+            <a:schemeClr val="tx1"/>
           </a:fontRef>
         </p:style>
-        <p:txBody>
-          <a:bodyPr rtlCol="0" anchor="ctr"/>
-          <a:lstStyle/>
-          <a:p>
-            <a:pPr algn="ctr"/>
-            <a:endParaRPr lang="LID4096"/>
-          </a:p>
-        </p:txBody>
-      </p:sp>
+      </p:cxnSp>
+      <p:cxnSp>
+        <p:nvCxnSpPr>
+          <p:cNvPr id="16" name="Straight Connector 15">
+            <a:extLst>
+              <a:ext uri="{FF2B5EF4-FFF2-40B4-BE49-F238E27FC236}">
+                <a16:creationId xmlns:a16="http://schemas.microsoft.com/office/drawing/2014/main" id="{9D1F3925-F10E-11D4-A111-509A5B3C15B2}"/>
+              </a:ext>
+            </a:extLst>
+          </p:cNvPr>
+          <p:cNvCxnSpPr/>
+          <p:nvPr/>
+        </p:nvCxnSpPr>
+        <p:spPr>
+          <a:xfrm>
+            <a:off x="7464095" y="160257"/>
+            <a:ext cx="0" cy="6583680"/>
+          </a:xfrm>
+          <a:prstGeom prst="line">
+            <a:avLst/>
+          </a:prstGeom>
+          <a:ln>
+            <a:solidFill>
+              <a:schemeClr val="tx1"/>
+            </a:solidFill>
+          </a:ln>
+          <a:effectLst>
+            <a:outerShdw blurRad="50800" dist="38100" dir="8100000" algn="tr" rotWithShape="0">
+              <a:prstClr val="black">
+                <a:alpha val="40000"/>
+              </a:prstClr>
+            </a:outerShdw>
+          </a:effectLst>
+        </p:spPr>
+        <p:style>
+          <a:lnRef idx="1">
+            <a:schemeClr val="accent1"/>
+          </a:lnRef>
+          <a:fillRef idx="0">
+            <a:schemeClr val="accent1"/>
+          </a:fillRef>
+          <a:effectRef idx="0">
+            <a:schemeClr val="accent1"/>
+          </a:effectRef>
+          <a:fontRef idx="minor">
+            <a:schemeClr val="tx1"/>
+          </a:fontRef>
+        </p:style>
+      </p:cxnSp>
+      <p:cxnSp>
+        <p:nvCxnSpPr>
+          <p:cNvPr id="19" name="Straight Connector 18">
+            <a:extLst>
+              <a:ext uri="{FF2B5EF4-FFF2-40B4-BE49-F238E27FC236}">
+                <a16:creationId xmlns:a16="http://schemas.microsoft.com/office/drawing/2014/main" id="{CA2604F5-7A9C-338E-32FF-3CAD53D6F68D}"/>
+              </a:ext>
+            </a:extLst>
+          </p:cNvPr>
+          <p:cNvCxnSpPr/>
+          <p:nvPr/>
+        </p:nvCxnSpPr>
+        <p:spPr>
+          <a:xfrm>
+            <a:off x="9591056" y="160257"/>
+            <a:ext cx="0" cy="3749040"/>
+          </a:xfrm>
+          <a:prstGeom prst="line">
+            <a:avLst/>
+          </a:prstGeom>
+          <a:ln>
+            <a:solidFill>
+              <a:schemeClr val="tx1"/>
+            </a:solidFill>
+          </a:ln>
+          <a:effectLst>
+            <a:outerShdw blurRad="50800" dist="38100" dir="8100000" algn="tr" rotWithShape="0">
+              <a:prstClr val="black">
+                <a:alpha val="40000"/>
+              </a:prstClr>
+            </a:outerShdw>
+          </a:effectLst>
+        </p:spPr>
+        <p:style>
+          <a:lnRef idx="1">
+            <a:schemeClr val="accent1"/>
+          </a:lnRef>
+          <a:fillRef idx="0">
+            <a:schemeClr val="accent1"/>
+          </a:fillRef>
+          <a:effectRef idx="0">
+            <a:schemeClr val="accent1"/>
+          </a:effectRef>
+          <a:fontRef idx="minor">
+            <a:schemeClr val="tx1"/>
+          </a:fontRef>
+        </p:style>
+      </p:cxnSp>
     </p:spTree>
     <p:extLst>
       <p:ext uri="{BB962C8B-B14F-4D97-AF65-F5344CB8AC3E}">
@@ -6101,7 +7812,7 @@
         </p:blipFill>
         <p:spPr>
           <a:xfrm>
-            <a:off x="5608320" y="493589"/>
+            <a:off x="5900551" y="493589"/>
             <a:ext cx="5683823" cy="3081024"/>
           </a:xfrm>
           <a:prstGeom prst="rect">
@@ -6135,7 +7846,7 @@
         </p:nvSpPr>
         <p:spPr>
           <a:xfrm>
-            <a:off x="5608320" y="117565"/>
+            <a:off x="5900551" y="117565"/>
             <a:ext cx="5817281" cy="253916"/>
           </a:xfrm>
           <a:prstGeom prst="rect">
@@ -6166,80 +7877,113 @@
           </a:p>
         </p:txBody>
       </p:sp>
-      <p:pic>
-        <p:nvPicPr>
-          <p:cNvPr id="8" name="Picture 7">
-            <a:extLst>
-              <a:ext uri="{FF2B5EF4-FFF2-40B4-BE49-F238E27FC236}">
-                <a16:creationId xmlns:a16="http://schemas.microsoft.com/office/drawing/2014/main" id="{8EBDCF9C-C1D7-DBFC-3F6A-5C6B97C1CEE6}"/>
-              </a:ext>
-            </a:extLst>
-          </p:cNvPr>
-          <p:cNvPicPr>
-            <a:picLocks noChangeAspect="1"/>
-          </p:cNvPicPr>
+      <p:grpSp>
+        <p:nvGrpSpPr>
+          <p:cNvPr id="2" name="Group 1">
+            <a:extLst>
+              <a:ext uri="{FF2B5EF4-FFF2-40B4-BE49-F238E27FC236}">
+                <a16:creationId xmlns:a16="http://schemas.microsoft.com/office/drawing/2014/main" id="{A8FD971A-DF1B-514C-CAED-2593CB20A855}"/>
+              </a:ext>
+            </a:extLst>
+          </p:cNvPr>
+          <p:cNvGrpSpPr/>
           <p:nvPr/>
-        </p:nvPicPr>
-        <p:blipFill>
-          <a:blip r:embed="rId5"/>
-          <a:stretch>
-            <a:fillRect/>
-          </a:stretch>
-        </p:blipFill>
-        <p:spPr>
-          <a:xfrm>
-            <a:off x="4798952" y="4906978"/>
-            <a:ext cx="1820288" cy="1080236"/>
-          </a:xfrm>
-          <a:prstGeom prst="rect">
-            <a:avLst/>
-          </a:prstGeom>
-        </p:spPr>
-      </p:pic>
-      <p:sp>
-        <p:nvSpPr>
-          <p:cNvPr id="11" name="TextBox 10">
-            <a:extLst>
-              <a:ext uri="{FF2B5EF4-FFF2-40B4-BE49-F238E27FC236}">
-                <a16:creationId xmlns:a16="http://schemas.microsoft.com/office/drawing/2014/main" id="{10EDFECB-13AA-A014-E4C3-FB50C12FB86E}"/>
-              </a:ext>
-            </a:extLst>
-          </p:cNvPr>
-          <p:cNvSpPr txBox="1"/>
-          <p:nvPr/>
-        </p:nvSpPr>
-        <p:spPr>
-          <a:xfrm>
-            <a:off x="6417884" y="5833179"/>
-            <a:ext cx="447996" cy="338554"/>
-          </a:xfrm>
-          <a:prstGeom prst="rect">
-            <a:avLst/>
-          </a:prstGeom>
-          <a:noFill/>
-        </p:spPr>
-        <p:txBody>
-          <a:bodyPr wrap="square" rtlCol="0">
-            <a:spAutoFit/>
-          </a:bodyPr>
-          <a:lstStyle/>
-          <a:p>
-            <a:r>
-              <a:rPr lang="en-GB" sz="1600" b="1" dirty="0">
+        </p:nvGrpSpPr>
+        <p:grpSpPr>
+          <a:xfrm>
+            <a:off x="4568991" y="4906977"/>
+            <a:ext cx="2344022" cy="1390127"/>
+            <a:chOff x="4568991" y="4906977"/>
+            <a:chExt cx="2344022" cy="1390127"/>
+          </a:xfrm>
+        </p:grpSpPr>
+        <p:pic>
+          <p:nvPicPr>
+            <p:cNvPr id="8" name="Picture 7">
+              <a:extLst>
+                <a:ext uri="{FF2B5EF4-FFF2-40B4-BE49-F238E27FC236}">
+                  <a16:creationId xmlns:a16="http://schemas.microsoft.com/office/drawing/2014/main" id="{8EBDCF9C-C1D7-DBFC-3F6A-5C6B97C1CEE6}"/>
+                </a:ext>
+              </a:extLst>
+            </p:cNvPr>
+            <p:cNvPicPr>
+              <a:picLocks noChangeAspect="1"/>
+            </p:cNvPicPr>
+            <p:nvPr/>
+          </p:nvPicPr>
+          <p:blipFill>
+            <a:blip r:embed="rId5"/>
+            <a:stretch>
+              <a:fillRect/>
+            </a:stretch>
+          </p:blipFill>
+          <p:spPr>
+            <a:xfrm>
+              <a:off x="4568991" y="4906977"/>
+              <a:ext cx="2342480" cy="1390127"/>
+            </a:xfrm>
+            <a:prstGeom prst="rect">
+              <a:avLst/>
+            </a:prstGeom>
+            <a:ln>
+              <a:solidFill>
+                <a:schemeClr val="tx1"/>
+              </a:solidFill>
+            </a:ln>
+            <a:effectLst>
+              <a:outerShdw blurRad="50800" dist="38100" dir="8100000" algn="tr" rotWithShape="0">
+                <a:prstClr val="black">
+                  <a:alpha val="40000"/>
+                </a:prstClr>
+              </a:outerShdw>
+            </a:effectLst>
+          </p:spPr>
+        </p:pic>
+        <p:sp>
+          <p:nvSpPr>
+            <p:cNvPr id="11" name="TextBox 10">
+              <a:extLst>
+                <a:ext uri="{FF2B5EF4-FFF2-40B4-BE49-F238E27FC236}">
+                  <a16:creationId xmlns:a16="http://schemas.microsoft.com/office/drawing/2014/main" id="{10EDFECB-13AA-A014-E4C3-FB50C12FB86E}"/>
+                </a:ext>
+              </a:extLst>
+            </p:cNvPr>
+            <p:cNvSpPr txBox="1"/>
+            <p:nvPr/>
+          </p:nvSpPr>
+          <p:spPr>
+            <a:xfrm>
+              <a:off x="6465017" y="5776618"/>
+              <a:ext cx="447996" cy="338554"/>
+            </a:xfrm>
+            <a:prstGeom prst="rect">
+              <a:avLst/>
+            </a:prstGeom>
+            <a:noFill/>
+          </p:spPr>
+          <p:txBody>
+            <a:bodyPr wrap="square" rtlCol="0">
+              <a:spAutoFit/>
+            </a:bodyPr>
+            <a:lstStyle/>
+            <a:p>
+              <a:r>
+                <a:rPr lang="en-GB" sz="1600" b="1" dirty="0">
+                  <a:solidFill>
+                    <a:srgbClr val="0000FF"/>
+                  </a:solidFill>
+                </a:rPr>
+                <a:t>(T)</a:t>
+              </a:r>
+              <a:endParaRPr lang="en-US" sz="1050" b="1" dirty="0">
                 <a:solidFill>
                   <a:srgbClr val="0000FF"/>
                 </a:solidFill>
-              </a:rPr>
-              <a:t>(T)</a:t>
-            </a:r>
-            <a:endParaRPr lang="en-US" sz="1050" b="1" dirty="0">
-              <a:solidFill>
-                <a:srgbClr val="0000FF"/>
-              </a:solidFill>
-            </a:endParaRPr>
-          </a:p>
-        </p:txBody>
-      </p:sp>
+              </a:endParaRPr>
+            </a:p>
+          </p:txBody>
+        </p:sp>
+      </p:grpSp>
       <p:grpSp>
         <p:nvGrpSpPr>
           <p:cNvPr id="33" name="Group 32">
@@ -6516,8 +8260,8 @@
         </p:nvSpPr>
         <p:spPr>
           <a:xfrm>
-            <a:off x="4997513" y="3696721"/>
-            <a:ext cx="6809091" cy="646331"/>
+            <a:off x="5289745" y="3696721"/>
+            <a:ext cx="6294630" cy="646331"/>
           </a:xfrm>
           <a:prstGeom prst="rect">
             <a:avLst/>
@@ -6628,10 +8372,10 @@
         </p:nvGrpSpPr>
         <p:grpSpPr>
           <a:xfrm>
-            <a:off x="-742523" y="0"/>
-            <a:ext cx="8689952" cy="5164358"/>
-            <a:chOff x="-563414" y="573115"/>
-            <a:chExt cx="8689952" cy="5164358"/>
+            <a:off x="42018" y="0"/>
+            <a:ext cx="7905411" cy="5157379"/>
+            <a:chOff x="221127" y="573115"/>
+            <a:chExt cx="7905411" cy="5157379"/>
           </a:xfrm>
         </p:grpSpPr>
         <p:sp>
@@ -7743,7 +9487,7 @@
           </p:nvSpPr>
           <p:spPr>
             <a:xfrm>
-              <a:off x="-563414" y="3920950"/>
+              <a:off x="349961" y="3913971"/>
               <a:ext cx="3309488" cy="1816523"/>
             </a:xfrm>
             <a:prstGeom prst="rect">
@@ -8275,8 +10019,8 @@
         </p:nvCxnSpPr>
         <p:spPr>
           <a:xfrm>
-            <a:off x="2281471" y="0"/>
-            <a:ext cx="0" cy="2976420"/>
+            <a:off x="2281471" y="141404"/>
+            <a:ext cx="0" cy="2743200"/>
           </a:xfrm>
           <a:prstGeom prst="line">
             <a:avLst/>
@@ -8323,8 +10067,8 @@
         </p:nvCxnSpPr>
         <p:spPr>
           <a:xfrm>
-            <a:off x="4582336" y="0"/>
-            <a:ext cx="0" cy="2976420"/>
+            <a:off x="4582336" y="141404"/>
+            <a:ext cx="0" cy="2743200"/>
           </a:xfrm>
           <a:prstGeom prst="line">
             <a:avLst/>
@@ -8373,7 +10117,7 @@
         </p:nvCxnSpPr>
         <p:spPr>
           <a:xfrm flipH="1">
-            <a:off x="-1" y="3223369"/>
+            <a:off x="122549" y="3223369"/>
             <a:ext cx="2651760" cy="0"/>
           </a:xfrm>
           <a:prstGeom prst="line">
@@ -8409,10 +10153,10 @@
       </p:cxnSp>
       <p:grpSp>
         <p:nvGrpSpPr>
-          <p:cNvPr id="2" name="Group 1">
-            <a:extLst>
-              <a:ext uri="{FF2B5EF4-FFF2-40B4-BE49-F238E27FC236}">
-                <a16:creationId xmlns:a16="http://schemas.microsoft.com/office/drawing/2014/main" id="{051CCABA-8607-D586-7106-5DA1296E9831}"/>
+          <p:cNvPr id="14" name="Group 13">
+            <a:extLst>
+              <a:ext uri="{FF2B5EF4-FFF2-40B4-BE49-F238E27FC236}">
+                <a16:creationId xmlns:a16="http://schemas.microsoft.com/office/drawing/2014/main" id="{D4049F80-5F93-F46D-787A-BF64E63FB5E7}"/>
               </a:ext>
             </a:extLst>
           </p:cNvPr>
@@ -8429,10 +10173,10 @@
         </p:grpSpPr>
         <p:grpSp>
           <p:nvGrpSpPr>
-            <p:cNvPr id="6" name="Group 5">
+            <p:cNvPr id="15" name="Group 14">
               <a:extLst>
                 <a:ext uri="{FF2B5EF4-FFF2-40B4-BE49-F238E27FC236}">
-                  <a16:creationId xmlns:a16="http://schemas.microsoft.com/office/drawing/2014/main" id="{0DAA7A88-D56D-8BE9-EA30-7DE1708ACAB3}"/>
+                  <a16:creationId xmlns:a16="http://schemas.microsoft.com/office/drawing/2014/main" id="{3A1B90B2-823E-BEB6-61B6-E4520D3C97CE}"/>
                 </a:ext>
               </a:extLst>
             </p:cNvPr>
@@ -8449,10 +10193,10 @@
           </p:grpSpPr>
           <p:pic>
             <p:nvPicPr>
-              <p:cNvPr id="10" name="Picture 9">
+              <p:cNvPr id="21" name="Picture 20">
                 <a:extLst>
                   <a:ext uri="{FF2B5EF4-FFF2-40B4-BE49-F238E27FC236}">
-                    <a16:creationId xmlns:a16="http://schemas.microsoft.com/office/drawing/2014/main" id="{FC0762AB-F0CF-5155-27AD-BDCFD18E2E2F}"/>
+                    <a16:creationId xmlns:a16="http://schemas.microsoft.com/office/drawing/2014/main" id="{5A4E9A50-CCF6-614B-3A17-F203672C796E}"/>
                   </a:ext>
                 </a:extLst>
               </p:cNvPr>
@@ -8479,10 +10223,10 @@
           </p:pic>
           <p:cxnSp>
             <p:nvCxnSpPr>
-              <p:cNvPr id="19" name="Straight Arrow Connector 18">
+              <p:cNvPr id="22" name="Straight Arrow Connector 21">
                 <a:extLst>
                   <a:ext uri="{FF2B5EF4-FFF2-40B4-BE49-F238E27FC236}">
-                    <a16:creationId xmlns:a16="http://schemas.microsoft.com/office/drawing/2014/main" id="{6BA37FF9-ED07-2C8D-2317-E5CFDA435431}"/>
+                    <a16:creationId xmlns:a16="http://schemas.microsoft.com/office/drawing/2014/main" id="{F521D7FD-4A84-752D-020F-2500AD5EC58B}"/>
                   </a:ext>
                 </a:extLst>
               </p:cNvPr>
@@ -8523,10 +10267,10 @@
           </p:cxnSp>
           <p:cxnSp>
             <p:nvCxnSpPr>
-              <p:cNvPr id="20" name="Straight Arrow Connector 19">
+              <p:cNvPr id="23" name="Straight Arrow Connector 22">
                 <a:extLst>
                   <a:ext uri="{FF2B5EF4-FFF2-40B4-BE49-F238E27FC236}">
-                    <a16:creationId xmlns:a16="http://schemas.microsoft.com/office/drawing/2014/main" id="{49324717-13D5-3900-88AA-96717ABEA68A}"/>
+                    <a16:creationId xmlns:a16="http://schemas.microsoft.com/office/drawing/2014/main" id="{3BA00BC8-B9A3-5E63-23A7-DF1D03909BCB}"/>
                   </a:ext>
                 </a:extLst>
               </p:cNvPr>
@@ -8568,10 +10312,10 @@
         </p:grpSp>
         <p:sp>
           <p:nvSpPr>
-            <p:cNvPr id="8" name="TextBox 7">
+            <p:cNvPr id="16" name="TextBox 15">
               <a:extLst>
                 <a:ext uri="{FF2B5EF4-FFF2-40B4-BE49-F238E27FC236}">
-                  <a16:creationId xmlns:a16="http://schemas.microsoft.com/office/drawing/2014/main" id="{F87225EA-5AF9-B4FE-8C64-309762066871}"/>
+                  <a16:creationId xmlns:a16="http://schemas.microsoft.com/office/drawing/2014/main" id="{92183B8A-537F-EA14-CB15-8528BA28FAE3}"/>
                 </a:ext>
               </a:extLst>
             </p:cNvPr>
@@ -8619,10 +10363,10 @@
         </p:sp>
         <p:sp>
           <p:nvSpPr>
-            <p:cNvPr id="9" name="TextBox 8">
+            <p:cNvPr id="17" name="TextBox 16">
               <a:extLst>
                 <a:ext uri="{FF2B5EF4-FFF2-40B4-BE49-F238E27FC236}">
-                  <a16:creationId xmlns:a16="http://schemas.microsoft.com/office/drawing/2014/main" id="{F5740558-4FC4-1394-C638-467DC8B82AB7}"/>
+                  <a16:creationId xmlns:a16="http://schemas.microsoft.com/office/drawing/2014/main" id="{91180E8A-6463-33FD-2F98-89EB5EA57607}"/>
                 </a:ext>
               </a:extLst>
             </p:cNvPr>
@@ -10746,6 +12490,11 @@
             <a:prstGeom prst="rect">
               <a:avLst/>
             </a:prstGeom>
+            <a:ln w="38100">
+              <a:solidFill>
+                <a:srgbClr val="FFC000"/>
+              </a:solidFill>
+            </a:ln>
           </p:spPr>
         </p:pic>
         <p:sp>
@@ -11542,48 +13291,6 @@
           </a:p>
         </p:txBody>
       </p:sp>
-      <p:pic>
-        <p:nvPicPr>
-          <p:cNvPr id="11" name="Picture 10">
-            <a:extLst>
-              <a:ext uri="{FF2B5EF4-FFF2-40B4-BE49-F238E27FC236}">
-                <a16:creationId xmlns:a16="http://schemas.microsoft.com/office/drawing/2014/main" id="{272E92E0-772C-6B76-9AC6-C4B3999E1428}"/>
-              </a:ext>
-            </a:extLst>
-          </p:cNvPr>
-          <p:cNvPicPr>
-            <a:picLocks noChangeAspect="1"/>
-          </p:cNvPicPr>
-          <p:nvPr/>
-        </p:nvPicPr>
-        <p:blipFill>
-          <a:blip r:embed="rId3"/>
-          <a:stretch>
-            <a:fillRect/>
-          </a:stretch>
-        </p:blipFill>
-        <p:spPr>
-          <a:xfrm>
-            <a:off x="3150719" y="1731803"/>
-            <a:ext cx="3133725" cy="704850"/>
-          </a:xfrm>
-          <a:prstGeom prst="rect">
-            <a:avLst/>
-          </a:prstGeom>
-          <a:ln>
-            <a:solidFill>
-              <a:schemeClr val="tx1"/>
-            </a:solidFill>
-          </a:ln>
-          <a:effectLst>
-            <a:outerShdw blurRad="50800" dist="38100" dir="8100000" algn="tr" rotWithShape="0">
-              <a:prstClr val="black">
-                <a:alpha val="40000"/>
-              </a:prstClr>
-            </a:outerShdw>
-          </a:effectLst>
-        </p:spPr>
-      </p:pic>
       <p:cxnSp>
         <p:nvCxnSpPr>
           <p:cNvPr id="15" name="Straight Connector 14">
@@ -11660,7 +13367,7 @@
             <p:nvPr/>
           </p:nvPicPr>
           <p:blipFill>
-            <a:blip r:embed="rId4"/>
+            <a:blip r:embed="rId3"/>
             <a:stretch>
               <a:fillRect/>
             </a:stretch>
@@ -11926,7 +13633,7 @@
           <p:nvPr/>
         </p:nvPicPr>
         <p:blipFill>
-          <a:blip r:embed="rId5"/>
+          <a:blip r:embed="rId4"/>
           <a:stretch>
             <a:fillRect/>
           </a:stretch>
@@ -11968,7 +13675,7 @@
           <p:nvPr/>
         </p:nvPicPr>
         <p:blipFill>
-          <a:blip r:embed="rId6"/>
+          <a:blip r:embed="rId5"/>
           <a:srcRect t="31390"/>
           <a:stretch>
             <a:fillRect/>
@@ -12063,7 +13770,7 @@
           <p:nvPr/>
         </p:nvPicPr>
         <p:blipFill>
-          <a:blip r:embed="rId7"/>
+          <a:blip r:embed="rId6"/>
           <a:stretch>
             <a:fillRect/>
           </a:stretch>
@@ -12093,7 +13800,7 @@
           <p:nvPr/>
         </p:nvPicPr>
         <p:blipFill>
-          <a:blip r:embed="rId8"/>
+          <a:blip r:embed="rId7"/>
           <a:srcRect l="54284" t="31225"/>
           <a:stretch>
             <a:fillRect/>
@@ -12121,55 +13828,12 @@
           </a:effectLst>
         </p:spPr>
       </p:pic>
-      <p:pic>
-        <p:nvPicPr>
-          <p:cNvPr id="37" name="Picture 36">
-            <a:extLst>
-              <a:ext uri="{FF2B5EF4-FFF2-40B4-BE49-F238E27FC236}">
-                <a16:creationId xmlns:a16="http://schemas.microsoft.com/office/drawing/2014/main" id="{90E4E47D-D5B8-C141-16D5-C39B3CB0F068}"/>
-              </a:ext>
-            </a:extLst>
-          </p:cNvPr>
-          <p:cNvPicPr>
-            <a:picLocks noChangeAspect="1"/>
-          </p:cNvPicPr>
-          <p:nvPr/>
-        </p:nvPicPr>
-        <p:blipFill>
-          <a:blip r:embed="rId8"/>
-          <a:srcRect l="50848" t="8857" b="79704"/>
-          <a:stretch>
-            <a:fillRect/>
-          </a:stretch>
-        </p:blipFill>
-        <p:spPr>
-          <a:xfrm>
-            <a:off x="325343" y="177197"/>
-            <a:ext cx="2668857" cy="439962"/>
-          </a:xfrm>
-          <a:prstGeom prst="rect">
-            <a:avLst/>
-          </a:prstGeom>
-          <a:ln>
-            <a:solidFill>
-              <a:srgbClr val="FF0000"/>
-            </a:solidFill>
-          </a:ln>
-          <a:effectLst>
-            <a:outerShdw blurRad="50800" dist="38100" dir="8100000" algn="tr" rotWithShape="0">
-              <a:prstClr val="black">
-                <a:alpha val="40000"/>
-              </a:prstClr>
-            </a:outerShdw>
-          </a:effectLst>
-        </p:spPr>
-      </p:pic>
       <p:sp>
         <p:nvSpPr>
-          <p:cNvPr id="39" name="TextBox 38">
-            <a:extLst>
-              <a:ext uri="{FF2B5EF4-FFF2-40B4-BE49-F238E27FC236}">
-                <a16:creationId xmlns:a16="http://schemas.microsoft.com/office/drawing/2014/main" id="{AED467F5-D444-1A41-D334-718CE46F9493}"/>
+          <p:cNvPr id="41" name="TextBox 40">
+            <a:extLst>
+              <a:ext uri="{FF2B5EF4-FFF2-40B4-BE49-F238E27FC236}">
+                <a16:creationId xmlns:a16="http://schemas.microsoft.com/office/drawing/2014/main" id="{D36FF3E7-C7CB-41FC-B157-7E7B92557382}"/>
               </a:ext>
             </a:extLst>
           </p:cNvPr>
@@ -12178,8 +13842,8 @@
         </p:nvSpPr>
         <p:spPr>
           <a:xfrm>
-            <a:off x="5842186" y="4777263"/>
-            <a:ext cx="2646878" cy="669384"/>
+            <a:off x="1571" y="6556041"/>
+            <a:ext cx="10028547" cy="307777"/>
           </a:xfrm>
           <a:prstGeom prst="rect">
             <a:avLst/>
@@ -12193,51 +13857,6 @@
           <a:lstStyle/>
           <a:p>
             <a:r>
-              <a:rPr lang="en-US" sz="1800" b="1" i="0" u="none" strike="noStrike" baseline="0" dirty="0">
-                <a:solidFill>
-                  <a:srgbClr val="FF0000"/>
-                </a:solidFill>
-                <a:latin typeface="CMBX12"/>
-              </a:rPr>
-              <a:t>4.4.1 Interpolation schemes</a:t>
-            </a:r>
-            <a:endParaRPr lang="LID4096" b="1" dirty="0">
-              <a:solidFill>
-                <a:srgbClr val="FF0000"/>
-              </a:solidFill>
-            </a:endParaRPr>
-          </a:p>
-        </p:txBody>
-      </p:sp>
-      <p:sp>
-        <p:nvSpPr>
-          <p:cNvPr id="41" name="TextBox 40">
-            <a:extLst>
-              <a:ext uri="{FF2B5EF4-FFF2-40B4-BE49-F238E27FC236}">
-                <a16:creationId xmlns:a16="http://schemas.microsoft.com/office/drawing/2014/main" id="{D36FF3E7-C7CB-41FC-B157-7E7B92557382}"/>
-              </a:ext>
-            </a:extLst>
-          </p:cNvPr>
-          <p:cNvSpPr txBox="1"/>
-          <p:nvPr/>
-        </p:nvSpPr>
-        <p:spPr>
-          <a:xfrm>
-            <a:off x="1571" y="6556041"/>
-            <a:ext cx="10028547" cy="307777"/>
-          </a:xfrm>
-          <a:prstGeom prst="rect">
-            <a:avLst/>
-          </a:prstGeom>
-          <a:noFill/>
-        </p:spPr>
-        <p:txBody>
-          <a:bodyPr wrap="square">
-            <a:spAutoFit/>
-          </a:bodyPr>
-          <a:lstStyle/>
-          <a:p>
-            <a:r>
               <a:rPr lang="LID4096" sz="1400" dirty="0"/>
               <a:t>E:\15_REPOS\a___________________\09_CFD_ON\04_OpenFoam</a:t>
             </a:r>
@@ -12269,147 +13888,6 @@
           </a:p>
         </p:txBody>
       </p:sp>
-      <p:sp>
-        <p:nvSpPr>
-          <p:cNvPr id="43" name="TextBox 42">
-            <a:extLst>
-              <a:ext uri="{FF2B5EF4-FFF2-40B4-BE49-F238E27FC236}">
-                <a16:creationId xmlns:a16="http://schemas.microsoft.com/office/drawing/2014/main" id="{CA3EF1DB-6E83-6370-F797-933367EDED79}"/>
-              </a:ext>
-            </a:extLst>
-          </p:cNvPr>
-          <p:cNvSpPr txBox="1"/>
-          <p:nvPr/>
-        </p:nvSpPr>
-        <p:spPr>
-          <a:xfrm>
-            <a:off x="5927716" y="5410873"/>
-            <a:ext cx="6103856" cy="1169551"/>
-          </a:xfrm>
-          <a:prstGeom prst="rect">
-            <a:avLst/>
-          </a:prstGeom>
-          <a:noFill/>
-        </p:spPr>
-        <p:txBody>
-          <a:bodyPr wrap="square">
-            <a:spAutoFit/>
-          </a:bodyPr>
-          <a:lstStyle/>
-          <a:p>
-            <a:r>
-              <a:rPr lang="LID4096" sz="1400" dirty="0">
-                <a:solidFill>
-                  <a:srgbClr val="0000FF"/>
-                </a:solidFill>
-              </a:rPr>
-              <a:t>4.4.1.2 Schemes for vector fields</a:t>
-            </a:r>
-          </a:p>
-          <a:p>
-            <a:r>
-              <a:rPr lang="LID4096" sz="1400" dirty="0">
-                <a:solidFill>
-                  <a:srgbClr val="0000FF"/>
-                </a:solidFill>
-              </a:rPr>
-              <a:t>4.4.2 Surface normal gradient </a:t>
-            </a:r>
-            <a:r>
-              <a:rPr lang="LID4096" sz="1200" dirty="0">
-                <a:solidFill>
-                  <a:srgbClr val="0000FF"/>
-                </a:solidFill>
-              </a:rPr>
-              <a:t>schemes</a:t>
-            </a:r>
-            <a:endParaRPr lang="LID4096" sz="1400" dirty="0">
-              <a:solidFill>
-                <a:srgbClr val="0000FF"/>
-              </a:solidFill>
-            </a:endParaRPr>
-          </a:p>
-          <a:p>
-            <a:r>
-              <a:rPr lang="LID4096" sz="1400" dirty="0">
-                <a:solidFill>
-                  <a:srgbClr val="0000FF"/>
-                </a:solidFill>
-              </a:rPr>
-              <a:t>4.4.3 Gradient schemes</a:t>
-            </a:r>
-          </a:p>
-          <a:p>
-            <a:r>
-              <a:rPr lang="LID4096" sz="1400" dirty="0">
-                <a:solidFill>
-                  <a:srgbClr val="0000FF"/>
-                </a:solidFill>
-              </a:rPr>
-              <a:t>4.4.4 Laplacian schemes</a:t>
-            </a:r>
-          </a:p>
-          <a:p>
-            <a:r>
-              <a:rPr lang="LID4096" sz="1400" dirty="0">
-                <a:solidFill>
-                  <a:srgbClr val="0000FF"/>
-                </a:solidFill>
-              </a:rPr>
-              <a:t>4.4.5 Divergence schemes</a:t>
-            </a:r>
-          </a:p>
-        </p:txBody>
-      </p:sp>
-      <p:sp>
-        <p:nvSpPr>
-          <p:cNvPr id="44" name="Arrow: Down 43">
-            <a:extLst>
-              <a:ext uri="{FF2B5EF4-FFF2-40B4-BE49-F238E27FC236}">
-                <a16:creationId xmlns:a16="http://schemas.microsoft.com/office/drawing/2014/main" id="{33CCCBE2-B6DC-C6ED-85FD-D9EB35015757}"/>
-              </a:ext>
-            </a:extLst>
-          </p:cNvPr>
-          <p:cNvSpPr/>
-          <p:nvPr/>
-        </p:nvSpPr>
-        <p:spPr>
-          <a:xfrm rot="7696881">
-            <a:off x="2302398" y="415177"/>
-            <a:ext cx="175414" cy="203496"/>
-          </a:xfrm>
-          <a:prstGeom prst="downArrow">
-            <a:avLst/>
-          </a:prstGeom>
-          <a:solidFill>
-            <a:srgbClr val="0000FF"/>
-          </a:solidFill>
-        </p:spPr>
-        <p:style>
-          <a:lnRef idx="2">
-            <a:schemeClr val="accent1">
-              <a:shade val="15000"/>
-            </a:schemeClr>
-          </a:lnRef>
-          <a:fillRef idx="1">
-            <a:schemeClr val="accent1"/>
-          </a:fillRef>
-          <a:effectRef idx="0">
-            <a:schemeClr val="accent1"/>
-          </a:effectRef>
-          <a:fontRef idx="minor">
-            <a:schemeClr val="lt1"/>
-          </a:fontRef>
-        </p:style>
-        <p:txBody>
-          <a:bodyPr rtlCol="0" anchor="ctr"/>
-          <a:lstStyle/>
-          <a:p>
-            <a:pPr algn="ctr"/>
-            <a:endParaRPr lang="LID4096"/>
-          </a:p>
-        </p:txBody>
-      </p:sp>
       <p:pic>
         <p:nvPicPr>
           <p:cNvPr id="46" name="Picture 45">
@@ -12425,7 +13903,7 @@
           <p:nvPr/>
         </p:nvPicPr>
         <p:blipFill>
-          <a:blip r:embed="rId9"/>
+          <a:blip r:embed="rId8"/>
           <a:stretch>
             <a:fillRect/>
           </a:stretch>
@@ -12483,7 +13961,19 @@
             <a:pPr algn="ctr"/>
             <a:r>
               <a:rPr lang="LID4096" sz="1400" b="1" dirty="0"/>
-              <a:t>|| _upwind || _linear || _linearUpwind || _quick || _cubic ||</a:t>
+              <a:t>|| _upwind || _linear || </a:t>
+            </a:r>
+            <a:r>
+              <a:rPr lang="LID4096" sz="1400" b="1" dirty="0">
+                <a:solidFill>
+                  <a:srgbClr val="0000FF"/>
+                </a:solidFill>
+              </a:rPr>
+              <a:t>_linearUpwind </a:t>
+            </a:r>
+            <a:r>
+              <a:rPr lang="LID4096" sz="1400" b="1" dirty="0"/>
+              <a:t>|| _quick || _cubic ||</a:t>
             </a:r>
           </a:p>
         </p:txBody>
@@ -12503,7 +13993,7 @@
           <p:nvPr/>
         </p:nvPicPr>
         <p:blipFill>
-          <a:blip r:embed="rId8"/>
+          <a:blip r:embed="rId7"/>
           <a:srcRect t="-1" r="40724" b="90394"/>
           <a:stretch>
             <a:fillRect/>
@@ -12546,7 +14036,7 @@
           <p:nvPr/>
         </p:nvPicPr>
         <p:blipFill>
-          <a:blip r:embed="rId8"/>
+          <a:blip r:embed="rId7"/>
           <a:srcRect l="47054" t="8946" b="82016"/>
           <a:stretch>
             <a:fillRect/>
@@ -12589,7 +14079,7 @@
           <p:nvPr/>
         </p:nvPicPr>
         <p:blipFill>
-          <a:blip r:embed="rId10"/>
+          <a:blip r:embed="rId9"/>
           <a:srcRect l="36245" t="8583"/>
           <a:stretch>
             <a:fillRect/>
@@ -12632,7 +14122,7 @@
           <p:nvPr/>
         </p:nvPicPr>
         <p:blipFill>
-          <a:blip r:embed="rId10"/>
+          <a:blip r:embed="rId9"/>
           <a:srcRect l="-1" t="-1" r="59098" b="90781"/>
           <a:stretch>
             <a:fillRect/>
@@ -12746,7 +14236,7 @@
             <p:nvPr/>
           </p:nvPicPr>
           <p:blipFill>
-            <a:blip r:embed="rId11"/>
+            <a:blip r:embed="rId10"/>
             <a:srcRect l="29646" t="6839" b="60522"/>
             <a:stretch>
               <a:fillRect/>
@@ -12789,7 +14279,7 @@
             <p:nvPr/>
           </p:nvPicPr>
           <p:blipFill>
-            <a:blip r:embed="rId12"/>
+            <a:blip r:embed="rId11"/>
             <a:stretch>
               <a:fillRect/>
             </a:stretch>
@@ -12819,7 +14309,7 @@
             <p:nvPr/>
           </p:nvPicPr>
           <p:blipFill>
-            <a:blip r:embed="rId11"/>
+            <a:blip r:embed="rId10"/>
             <a:srcRect l="38694" t="37637" r="29787" b="278"/>
             <a:stretch>
               <a:fillRect/>
@@ -12862,7 +14352,7 @@
             <p:nvPr/>
           </p:nvPicPr>
           <p:blipFill>
-            <a:blip r:embed="rId11"/>
+            <a:blip r:embed="rId10"/>
             <a:srcRect r="71052" b="88722"/>
             <a:stretch>
               <a:fillRect/>
@@ -12906,7 +14396,7 @@
           <p:nvPr/>
         </p:nvPicPr>
         <p:blipFill>
-          <a:blip r:embed="rId6"/>
+          <a:blip r:embed="rId5"/>
           <a:srcRect l="15331" t="2354" r="39310" b="87977"/>
           <a:stretch>
             <a:fillRect/>
@@ -12934,6 +14424,196 @@
           </a:effectLst>
         </p:spPr>
       </p:pic>
+      <p:pic>
+        <p:nvPicPr>
+          <p:cNvPr id="21" name="Picture 20">
+            <a:extLst>
+              <a:ext uri="{FF2B5EF4-FFF2-40B4-BE49-F238E27FC236}">
+                <a16:creationId xmlns:a16="http://schemas.microsoft.com/office/drawing/2014/main" id="{D6BEC325-443F-2839-3256-2741CD44DB42}"/>
+              </a:ext>
+            </a:extLst>
+          </p:cNvPr>
+          <p:cNvPicPr>
+            <a:picLocks noChangeAspect="1"/>
+          </p:cNvPicPr>
+          <p:nvPr/>
+        </p:nvPicPr>
+        <p:blipFill>
+          <a:blip r:embed="rId12"/>
+          <a:stretch>
+            <a:fillRect/>
+          </a:stretch>
+        </p:blipFill>
+        <p:spPr>
+          <a:xfrm>
+            <a:off x="3235681" y="1813458"/>
+            <a:ext cx="3038475" cy="476250"/>
+          </a:xfrm>
+          <a:prstGeom prst="rect">
+            <a:avLst/>
+          </a:prstGeom>
+          <a:ln w="38100">
+            <a:solidFill>
+              <a:srgbClr val="FFC000"/>
+            </a:solidFill>
+          </a:ln>
+        </p:spPr>
+      </p:pic>
+      <p:sp>
+        <p:nvSpPr>
+          <p:cNvPr id="22" name="TextBox 21">
+            <a:extLst>
+              <a:ext uri="{FF2B5EF4-FFF2-40B4-BE49-F238E27FC236}">
+                <a16:creationId xmlns:a16="http://schemas.microsoft.com/office/drawing/2014/main" id="{88765C38-73AC-C003-A60D-CF160154840B}"/>
+              </a:ext>
+            </a:extLst>
+          </p:cNvPr>
+          <p:cNvSpPr txBox="1"/>
+          <p:nvPr/>
+        </p:nvSpPr>
+        <p:spPr>
+          <a:xfrm>
+            <a:off x="6096000" y="4879165"/>
+            <a:ext cx="2560030" cy="1600438"/>
+          </a:xfrm>
+          <a:prstGeom prst="rect">
+            <a:avLst/>
+          </a:prstGeom>
+          <a:noFill/>
+        </p:spPr>
+        <p:txBody>
+          <a:bodyPr wrap="square">
+            <a:spAutoFit/>
+          </a:bodyPr>
+          <a:lstStyle/>
+          <a:p>
+            <a:pPr algn="l"/>
+            <a:r>
+              <a:rPr lang="en-US" sz="1400" b="0" i="0" u="none" strike="noStrike" baseline="0" dirty="0">
+                <a:solidFill>
+                  <a:srgbClr val="FF0000"/>
+                </a:solidFill>
+                <a:latin typeface="CMR12"/>
+              </a:rPr>
+              <a:t>4.4.1 Interpolation schemes</a:t>
+            </a:r>
+          </a:p>
+          <a:p>
+            <a:pPr algn="l"/>
+            <a:r>
+              <a:rPr lang="fr-FR" sz="1400" dirty="0"/>
+              <a:t>4.4.2 Surface normal ∆ </a:t>
+            </a:r>
+            <a:r>
+              <a:rPr lang="fr-FR" sz="1400" dirty="0" err="1"/>
+              <a:t>schemes</a:t>
+            </a:r>
+            <a:endParaRPr lang="en-US" sz="1400" b="0" i="0" u="none" strike="noStrike" baseline="0" dirty="0">
+              <a:solidFill>
+                <a:srgbClr val="FF0000"/>
+              </a:solidFill>
+              <a:latin typeface="CMR12"/>
+            </a:endParaRPr>
+          </a:p>
+          <a:p>
+            <a:pPr algn="l"/>
+            <a:r>
+              <a:rPr lang="en-US" sz="1400" b="0" i="0" u="none" strike="noStrike" baseline="0" dirty="0">
+                <a:solidFill>
+                  <a:srgbClr val="FF0000"/>
+                </a:solidFill>
+                <a:latin typeface="CMR12"/>
+              </a:rPr>
+              <a:t>4.4.3 Gradient schemes</a:t>
+            </a:r>
+            <a:endParaRPr lang="en-US" sz="1400" b="0" i="0" u="none" strike="noStrike" baseline="0" dirty="0">
+              <a:solidFill>
+                <a:srgbClr val="000000"/>
+              </a:solidFill>
+              <a:latin typeface="CMR12"/>
+            </a:endParaRPr>
+          </a:p>
+          <a:p>
+            <a:pPr algn="l"/>
+            <a:r>
+              <a:rPr lang="en-US" sz="1400" b="0" i="0" u="none" strike="noStrike" baseline="0" dirty="0">
+                <a:latin typeface="CMR12"/>
+              </a:rPr>
+              <a:t>4.4.4 Laplacian schemes</a:t>
+            </a:r>
+          </a:p>
+          <a:p>
+            <a:pPr algn="l"/>
+            <a:r>
+              <a:rPr lang="en-US" sz="1400" b="1" i="0" u="none" strike="noStrike" baseline="0" dirty="0">
+                <a:solidFill>
+                  <a:srgbClr val="0000FF"/>
+                </a:solidFill>
+                <a:latin typeface="CMR12"/>
+              </a:rPr>
+              <a:t>4.4.5 Divergence schemes ____</a:t>
+            </a:r>
+          </a:p>
+          <a:p>
+            <a:pPr algn="l"/>
+            <a:r>
+              <a:rPr lang="en-US" sz="1400" b="0" i="0" u="none" strike="noStrike" baseline="0" dirty="0">
+                <a:latin typeface="CMR12"/>
+              </a:rPr>
+              <a:t>4.4.6 Time schemes</a:t>
+            </a:r>
+          </a:p>
+          <a:p>
+            <a:pPr algn="l"/>
+            <a:r>
+              <a:rPr lang="en-US" sz="1400" b="0" i="0" u="none" strike="noStrike" baseline="0" dirty="0">
+                <a:solidFill>
+                  <a:srgbClr val="FF0000"/>
+                </a:solidFill>
+                <a:latin typeface="CMR12"/>
+              </a:rPr>
+              <a:t>4.4.7 Flux calculation</a:t>
+            </a:r>
+            <a:endParaRPr lang="LID4096" sz="1400" dirty="0"/>
+          </a:p>
+        </p:txBody>
+      </p:sp>
+      <p:sp>
+        <p:nvSpPr>
+          <p:cNvPr id="35" name="TextBox 34">
+            <a:extLst>
+              <a:ext uri="{FF2B5EF4-FFF2-40B4-BE49-F238E27FC236}">
+                <a16:creationId xmlns:a16="http://schemas.microsoft.com/office/drawing/2014/main" id="{B51FAFDF-D873-ED97-D6C6-42A680BE703F}"/>
+              </a:ext>
+            </a:extLst>
+          </p:cNvPr>
+          <p:cNvSpPr txBox="1"/>
+          <p:nvPr/>
+        </p:nvSpPr>
+        <p:spPr>
+          <a:xfrm>
+            <a:off x="7306021" y="6447531"/>
+            <a:ext cx="810368" cy="369332"/>
+          </a:xfrm>
+          <a:prstGeom prst="rect">
+            <a:avLst/>
+          </a:prstGeom>
+          <a:noFill/>
+        </p:spPr>
+        <p:txBody>
+          <a:bodyPr wrap="square">
+            <a:spAutoFit/>
+          </a:bodyPr>
+          <a:lstStyle/>
+          <a:p>
+            <a:r>
+              <a:rPr lang="pt-BR" b="1" dirty="0"/>
+              <a:t>118</a:t>
+            </a:r>
+            <a:endParaRPr lang="LID4096" b="1" dirty="0"/>
+          </a:p>
+        </p:txBody>
+      </p:sp>
     </p:spTree>
     <p:extLst>
       <p:ext uri="{BB962C8B-B14F-4D97-AF65-F5344CB8AC3E}">
@@ -12952,7 +14632,13 @@
   <p:cSld>
     <p:spTree>
       <p:nvGrpSpPr>
-        <p:cNvPr id="1" name=""/>
+        <p:cNvPr id="1" name="">
+          <a:extLst>
+            <a:ext uri="{FF2B5EF4-FFF2-40B4-BE49-F238E27FC236}">
+              <a16:creationId xmlns:a16="http://schemas.microsoft.com/office/drawing/2014/main" id="{68CC13B5-A7AC-6066-1359-54FAE3AF0E0D}"/>
+            </a:ext>
+          </a:extLst>
+        </p:cNvPr>
         <p:cNvGrpSpPr/>
         <p:nvPr/>
       </p:nvGrpSpPr>
@@ -12964,51 +14650,12 @@
           <a:chExt cx="0" cy="0"/>
         </a:xfrm>
       </p:grpSpPr>
-      <p:sp>
-        <p:nvSpPr>
-          <p:cNvPr id="5" name="TextBox 4">
-            <a:extLst>
-              <a:ext uri="{FF2B5EF4-FFF2-40B4-BE49-F238E27FC236}">
-                <a16:creationId xmlns:a16="http://schemas.microsoft.com/office/drawing/2014/main" id="{E2AE8678-7B4E-9F27-8355-B39CE8F07171}"/>
-              </a:ext>
-            </a:extLst>
-          </p:cNvPr>
-          <p:cNvSpPr txBox="1"/>
-          <p:nvPr/>
-        </p:nvSpPr>
-        <p:spPr>
-          <a:xfrm>
-            <a:off x="106379" y="93294"/>
-            <a:ext cx="6097508" cy="369332"/>
-          </a:xfrm>
-          <a:prstGeom prst="rect">
-            <a:avLst/>
-          </a:prstGeom>
-          <a:noFill/>
-        </p:spPr>
-        <p:txBody>
-          <a:bodyPr wrap="square">
-            <a:spAutoFit/>
-          </a:bodyPr>
-          <a:lstStyle/>
-          <a:p>
-            <a:r>
-              <a:rPr lang="LID4096" dirty="0">
-                <a:solidFill>
-                  <a:srgbClr val="0000FF"/>
-                </a:solidFill>
-              </a:rPr>
-              <a:t>https://www.youtube.com/watch?v=jfDzFPaPPug           ||06|| </a:t>
-            </a:r>
-          </a:p>
-        </p:txBody>
-      </p:sp>
       <p:pic>
         <p:nvPicPr>
-          <p:cNvPr id="3" name="Picture 2">
-            <a:extLst>
-              <a:ext uri="{FF2B5EF4-FFF2-40B4-BE49-F238E27FC236}">
-                <a16:creationId xmlns:a16="http://schemas.microsoft.com/office/drawing/2014/main" id="{6B5CA5DE-B4A8-ADF1-55BF-D037D79B40E6}"/>
+          <p:cNvPr id="4" name="Picture 3">
+            <a:extLst>
+              <a:ext uri="{FF2B5EF4-FFF2-40B4-BE49-F238E27FC236}">
+                <a16:creationId xmlns:a16="http://schemas.microsoft.com/office/drawing/2014/main" id="{B37DA91C-71F1-80A0-212A-B4FA5769ECD3}"/>
               </a:ext>
             </a:extLst>
           </p:cNvPr>
@@ -13025,8 +14672,8 @@
         </p:blipFill>
         <p:spPr>
           <a:xfrm>
-            <a:off x="650860" y="787542"/>
-            <a:ext cx="2146662" cy="1990881"/>
+            <a:off x="846782" y="784478"/>
+            <a:ext cx="5048250" cy="638175"/>
           </a:xfrm>
           <a:prstGeom prst="rect">
             <a:avLst/>
@@ -13047,10 +14694,10 @@
       </p:pic>
       <p:grpSp>
         <p:nvGrpSpPr>
-          <p:cNvPr id="13" name="Group 12">
-            <a:extLst>
-              <a:ext uri="{FF2B5EF4-FFF2-40B4-BE49-F238E27FC236}">
-                <a16:creationId xmlns:a16="http://schemas.microsoft.com/office/drawing/2014/main" id="{5CE1B230-B85B-14E4-EEF6-3DAE4CDDBC25}"/>
+          <p:cNvPr id="5" name="Group 4">
+            <a:extLst>
+              <a:ext uri="{FF2B5EF4-FFF2-40B4-BE49-F238E27FC236}">
+                <a16:creationId xmlns:a16="http://schemas.microsoft.com/office/drawing/2014/main" id="{74C146F6-C5EA-2826-9F0C-428C90183A31}"/>
               </a:ext>
             </a:extLst>
           </p:cNvPr>
@@ -13059,185 +14706,62 @@
         </p:nvGrpSpPr>
         <p:grpSpPr>
           <a:xfrm>
-            <a:off x="2931952" y="995752"/>
-            <a:ext cx="3765147" cy="1422358"/>
-            <a:chOff x="2931952" y="995752"/>
-            <a:chExt cx="3765147" cy="1422358"/>
+            <a:off x="5047705" y="539359"/>
+            <a:ext cx="950514" cy="883294"/>
+            <a:chOff x="9845949" y="5571569"/>
+            <a:chExt cx="950514" cy="883294"/>
           </a:xfrm>
         </p:grpSpPr>
-        <p:grpSp>
-          <p:nvGrpSpPr>
-            <p:cNvPr id="4" name="Group 3">
+        <p:cxnSp>
+          <p:nvCxnSpPr>
+            <p:cNvPr id="6" name="Straight Arrow Connector 5">
               <a:extLst>
                 <a:ext uri="{FF2B5EF4-FFF2-40B4-BE49-F238E27FC236}">
-                  <a16:creationId xmlns:a16="http://schemas.microsoft.com/office/drawing/2014/main" id="{C8D3CF3E-5F7F-66BC-B495-6CBC029C1DF1}"/>
+                  <a16:creationId xmlns:a16="http://schemas.microsoft.com/office/drawing/2014/main" id="{3DF67096-BDA3-62D2-4B80-E15B1C00704B}"/>
                 </a:ext>
               </a:extLst>
             </p:cNvPr>
-            <p:cNvGrpSpPr/>
+            <p:cNvCxnSpPr>
+              <a:cxnSpLocks/>
+            </p:cNvCxnSpPr>
             <p:nvPr/>
-          </p:nvGrpSpPr>
-          <p:grpSpPr>
-            <a:xfrm>
-              <a:off x="2931952" y="995752"/>
-              <a:ext cx="3765147" cy="1295400"/>
-              <a:chOff x="8101480" y="5268987"/>
-              <a:chExt cx="3765147" cy="1295400"/>
+          </p:nvCxnSpPr>
+          <p:spPr>
+            <a:xfrm flipV="1">
+              <a:off x="9845949" y="5681017"/>
+              <a:ext cx="645765" cy="773846"/>
             </a:xfrm>
-          </p:grpSpPr>
-          <p:grpSp>
-            <p:nvGrpSpPr>
-              <p:cNvPr id="6" name="Group 5">
-                <a:extLst>
-                  <a:ext uri="{FF2B5EF4-FFF2-40B4-BE49-F238E27FC236}">
-                    <a16:creationId xmlns:a16="http://schemas.microsoft.com/office/drawing/2014/main" id="{B76709A0-31D2-472A-3DF7-931E1A758EF9}"/>
-                  </a:ext>
-                </a:extLst>
-              </p:cNvPr>
-              <p:cNvGrpSpPr/>
-              <p:nvPr/>
-            </p:nvGrpSpPr>
-            <p:grpSpPr>
-              <a:xfrm>
-                <a:off x="8101480" y="5268987"/>
-                <a:ext cx="3762375" cy="1295400"/>
-                <a:chOff x="7529768" y="4495989"/>
-                <a:chExt cx="3762375" cy="1295400"/>
-              </a:xfrm>
-            </p:grpSpPr>
-            <p:pic>
-              <p:nvPicPr>
-                <p:cNvPr id="9" name="Picture 8">
-                  <a:extLst>
-                    <a:ext uri="{FF2B5EF4-FFF2-40B4-BE49-F238E27FC236}">
-                      <a16:creationId xmlns:a16="http://schemas.microsoft.com/office/drawing/2014/main" id="{69B769A0-3FA4-5722-6A09-048D55FAE803}"/>
-                    </a:ext>
-                  </a:extLst>
-                </p:cNvPr>
-                <p:cNvPicPr>
-                  <a:picLocks noChangeAspect="1"/>
-                </p:cNvPicPr>
-                <p:nvPr/>
-              </p:nvPicPr>
-              <p:blipFill>
-                <a:blip r:embed="rId3"/>
-                <a:stretch>
-                  <a:fillRect/>
-                </a:stretch>
-              </p:blipFill>
-              <p:spPr>
-                <a:xfrm>
-                  <a:off x="7529768" y="4495989"/>
-                  <a:ext cx="3762375" cy="1295400"/>
-                </a:xfrm>
-                <a:prstGeom prst="rect">
-                  <a:avLst/>
-                </a:prstGeom>
-              </p:spPr>
-            </p:pic>
-            <p:cxnSp>
-              <p:nvCxnSpPr>
-                <p:cNvPr id="11" name="Straight Arrow Connector 10">
-                  <a:extLst>
-                    <a:ext uri="{FF2B5EF4-FFF2-40B4-BE49-F238E27FC236}">
-                      <a16:creationId xmlns:a16="http://schemas.microsoft.com/office/drawing/2014/main" id="{6C65D725-6839-4633-A154-C76578C5FA2E}"/>
-                    </a:ext>
-                  </a:extLst>
-                </p:cNvPr>
-                <p:cNvCxnSpPr>
-                  <a:cxnSpLocks/>
-                </p:cNvCxnSpPr>
-                <p:nvPr/>
-              </p:nvCxnSpPr>
-              <p:spPr>
-                <a:xfrm flipV="1">
-                  <a:off x="10419043" y="4929376"/>
-                  <a:ext cx="645765" cy="773846"/>
-                </a:xfrm>
-                <a:prstGeom prst="straightConnector1">
-                  <a:avLst/>
-                </a:prstGeom>
-                <a:ln>
-                  <a:solidFill>
-                    <a:srgbClr val="0000FF"/>
-                  </a:solidFill>
-                  <a:tailEnd type="triangle"/>
-                </a:ln>
-              </p:spPr>
-              <p:style>
-                <a:lnRef idx="1">
-                  <a:schemeClr val="accent1"/>
-                </a:lnRef>
-                <a:fillRef idx="0">
-                  <a:schemeClr val="accent1"/>
-                </a:fillRef>
-                <a:effectRef idx="0">
-                  <a:schemeClr val="accent1"/>
-                </a:effectRef>
-                <a:fontRef idx="minor">
-                  <a:schemeClr val="tx1"/>
-                </a:fontRef>
-              </p:style>
-            </p:cxnSp>
-          </p:grpSp>
-          <p:sp>
-            <p:nvSpPr>
-              <p:cNvPr id="8" name="TextBox 7">
-                <a:extLst>
-                  <a:ext uri="{FF2B5EF4-FFF2-40B4-BE49-F238E27FC236}">
-                    <a16:creationId xmlns:a16="http://schemas.microsoft.com/office/drawing/2014/main" id="{38FA44A0-EC2E-C825-E5C6-57D8D72E414A}"/>
-                  </a:ext>
-                </a:extLst>
-              </p:cNvPr>
-              <p:cNvSpPr txBox="1"/>
-              <p:nvPr/>
-            </p:nvSpPr>
-            <p:spPr>
-              <a:xfrm>
-                <a:off x="11561878" y="5655077"/>
-                <a:ext cx="304749" cy="261610"/>
-              </a:xfrm>
-              <a:prstGeom prst="rect">
-                <a:avLst/>
-              </a:prstGeom>
-              <a:noFill/>
-            </p:spPr>
-            <p:txBody>
-              <a:bodyPr wrap="square" rtlCol="0">
-                <a:spAutoFit/>
-              </a:bodyPr>
-              <a:lstStyle>
-                <a:defPPr>
-                  <a:defRPr lang="LID4096"/>
-                </a:defPPr>
-                <a:lvl1pPr>
-                  <a:defRPr sz="1050" b="1">
-                    <a:solidFill>
-                      <a:srgbClr val="0000FF"/>
-                    </a:solidFill>
-                  </a:defRPr>
-                </a:lvl1pPr>
-              </a:lstStyle>
-              <a:p>
-                <a:r>
-                  <a:rPr lang="en-GB" sz="1100" noProof="0" dirty="0"/>
-                  <a:t>0</a:t>
-                </a:r>
-                <a:endParaRPr lang="en-GB" sz="1400" noProof="0" dirty="0">
-                  <a:solidFill>
-                    <a:srgbClr val="FF0000"/>
-                  </a:solidFill>
-                </a:endParaRPr>
-              </a:p>
-            </p:txBody>
-          </p:sp>
-        </p:grpSp>
+            <a:prstGeom prst="straightConnector1">
+              <a:avLst/>
+            </a:prstGeom>
+            <a:ln>
+              <a:solidFill>
+                <a:srgbClr val="0000FF"/>
+              </a:solidFill>
+              <a:tailEnd type="triangle"/>
+            </a:ln>
+          </p:spPr>
+          <p:style>
+            <a:lnRef idx="1">
+              <a:schemeClr val="accent1"/>
+            </a:lnRef>
+            <a:fillRef idx="0">
+              <a:schemeClr val="accent1"/>
+            </a:fillRef>
+            <a:effectRef idx="0">
+              <a:schemeClr val="accent1"/>
+            </a:effectRef>
+            <a:fontRef idx="minor">
+              <a:schemeClr val="tx1"/>
+            </a:fontRef>
+          </p:style>
+        </p:cxnSp>
         <p:sp>
           <p:nvSpPr>
-            <p:cNvPr id="12" name="TextBox 11">
+            <p:cNvPr id="7" name="TextBox 6">
               <a:extLst>
                 <a:ext uri="{FF2B5EF4-FFF2-40B4-BE49-F238E27FC236}">
-                  <a16:creationId xmlns:a16="http://schemas.microsoft.com/office/drawing/2014/main" id="{A633CD5F-4C23-9C01-BA92-714C82BE9031}"/>
+                  <a16:creationId xmlns:a16="http://schemas.microsoft.com/office/drawing/2014/main" id="{5BFFCA04-1B5A-5D48-A809-CBC6353E6ED9}"/>
                 </a:ext>
               </a:extLst>
             </p:cNvPr>
@@ -13246,8 +14770,8 @@
           </p:nvSpPr>
           <p:spPr>
             <a:xfrm>
-              <a:off x="5686797" y="2164194"/>
-              <a:ext cx="718582" cy="253916"/>
+              <a:off x="10491714" y="5571569"/>
+              <a:ext cx="304749" cy="261610"/>
             </a:xfrm>
             <a:prstGeom prst="rect">
               <a:avLst/>
@@ -13271,10 +14795,481 @@
               </a:lvl1pPr>
             </a:lstStyle>
             <a:p>
-              <a:pPr algn="ctr"/>
+              <a:r>
+                <a:rPr lang="en-GB" sz="1100" noProof="0" dirty="0"/>
+                <a:t>0</a:t>
+              </a:r>
+              <a:endParaRPr lang="en-GB" sz="1400" noProof="0" dirty="0">
+                <a:solidFill>
+                  <a:srgbClr val="FF0000"/>
+                </a:solidFill>
+              </a:endParaRPr>
+            </a:p>
+          </p:txBody>
+        </p:sp>
+      </p:grpSp>
+      <p:sp>
+        <p:nvSpPr>
+          <p:cNvPr id="8" name="Rectangle 7">
+            <a:extLst>
+              <a:ext uri="{FF2B5EF4-FFF2-40B4-BE49-F238E27FC236}">
+                <a16:creationId xmlns:a16="http://schemas.microsoft.com/office/drawing/2014/main" id="{70CCA92D-DB05-0D2C-11B1-F68CEA09573D}"/>
+              </a:ext>
+            </a:extLst>
+          </p:cNvPr>
+          <p:cNvSpPr/>
+          <p:nvPr/>
+        </p:nvSpPr>
+        <p:spPr>
+          <a:xfrm>
+            <a:off x="3402088" y="649386"/>
+            <a:ext cx="1283035" cy="874287"/>
+          </a:xfrm>
+          <a:prstGeom prst="rect">
+            <a:avLst/>
+          </a:prstGeom>
+          <a:noFill/>
+          <a:ln>
+            <a:solidFill>
+              <a:srgbClr val="0000FF"/>
+            </a:solidFill>
+          </a:ln>
+        </p:spPr>
+        <p:style>
+          <a:lnRef idx="2">
+            <a:schemeClr val="accent1">
+              <a:shade val="15000"/>
+            </a:schemeClr>
+          </a:lnRef>
+          <a:fillRef idx="1">
+            <a:schemeClr val="accent1"/>
+          </a:fillRef>
+          <a:effectRef idx="0">
+            <a:schemeClr val="accent1"/>
+          </a:effectRef>
+          <a:fontRef idx="minor">
+            <a:schemeClr val="lt1"/>
+          </a:fontRef>
+        </p:style>
+        <p:txBody>
+          <a:bodyPr rtlCol="0" anchor="ctr"/>
+          <a:lstStyle/>
+          <a:p>
+            <a:pPr algn="ctr"/>
+            <a:endParaRPr lang="LID4096"/>
+          </a:p>
+        </p:txBody>
+      </p:sp>
+      <p:sp>
+        <p:nvSpPr>
+          <p:cNvPr id="9" name="TextBox 8">
+            <a:extLst>
+              <a:ext uri="{FF2B5EF4-FFF2-40B4-BE49-F238E27FC236}">
+                <a16:creationId xmlns:a16="http://schemas.microsoft.com/office/drawing/2014/main" id="{2C970846-E9FB-A0E5-E60B-69C2751C2DCD}"/>
+              </a:ext>
+            </a:extLst>
+          </p:cNvPr>
+          <p:cNvSpPr txBox="1"/>
+          <p:nvPr/>
+        </p:nvSpPr>
+        <p:spPr>
+          <a:xfrm>
+            <a:off x="3572761" y="358307"/>
+            <a:ext cx="1771911" cy="253916"/>
+          </a:xfrm>
+          <a:prstGeom prst="rect">
+            <a:avLst/>
+          </a:prstGeom>
+          <a:noFill/>
+        </p:spPr>
+        <p:txBody>
+          <a:bodyPr wrap="square" rtlCol="0">
+            <a:spAutoFit/>
+          </a:bodyPr>
+          <a:lstStyle>
+            <a:defPPr>
+              <a:defRPr lang="LID4096"/>
+            </a:defPPr>
+            <a:lvl1pPr>
+              <a:defRPr sz="1050" b="1">
+                <a:solidFill>
+                  <a:srgbClr val="0000FF"/>
+                </a:solidFill>
+              </a:defRPr>
+            </a:lvl1pPr>
+          </a:lstStyle>
+          <a:p>
+            <a:r>
+              <a:rPr lang="en-GB" noProof="0" dirty="0"/>
+              <a:t>Diffusion</a:t>
+            </a:r>
+            <a:endParaRPr lang="en-GB" sz="1400" noProof="0" dirty="0">
+              <a:solidFill>
+                <a:srgbClr val="FF0000"/>
+              </a:solidFill>
+            </a:endParaRPr>
+          </a:p>
+        </p:txBody>
+      </p:sp>
+      <p:pic>
+        <p:nvPicPr>
+          <p:cNvPr id="11" name="Picture 10">
+            <a:extLst>
+              <a:ext uri="{FF2B5EF4-FFF2-40B4-BE49-F238E27FC236}">
+                <a16:creationId xmlns:a16="http://schemas.microsoft.com/office/drawing/2014/main" id="{1695E33F-CB3C-0F32-BA6E-F4FBAE58C921}"/>
+              </a:ext>
+            </a:extLst>
+          </p:cNvPr>
+          <p:cNvPicPr>
+            <a:picLocks noChangeAspect="1"/>
+          </p:cNvPicPr>
+          <p:nvPr/>
+        </p:nvPicPr>
+        <p:blipFill>
+          <a:blip r:embed="rId3"/>
+          <a:stretch>
+            <a:fillRect/>
+          </a:stretch>
+        </p:blipFill>
+        <p:spPr>
+          <a:xfrm>
+            <a:off x="3150719" y="1731803"/>
+            <a:ext cx="3133725" cy="704850"/>
+          </a:xfrm>
+          <a:prstGeom prst="rect">
+            <a:avLst/>
+          </a:prstGeom>
+          <a:ln>
+            <a:solidFill>
+              <a:schemeClr val="tx1"/>
+            </a:solidFill>
+          </a:ln>
+          <a:effectLst>
+            <a:outerShdw blurRad="50800" dist="38100" dir="8100000" algn="tr" rotWithShape="0">
+              <a:prstClr val="black">
+                <a:alpha val="40000"/>
+              </a:prstClr>
+            </a:outerShdw>
+          </a:effectLst>
+        </p:spPr>
+      </p:pic>
+      <p:cxnSp>
+        <p:nvCxnSpPr>
+          <p:cNvPr id="15" name="Straight Connector 14">
+            <a:extLst>
+              <a:ext uri="{FF2B5EF4-FFF2-40B4-BE49-F238E27FC236}">
+                <a16:creationId xmlns:a16="http://schemas.microsoft.com/office/drawing/2014/main" id="{C3FF661B-C657-C0A7-5680-A553A2E4ADEA}"/>
+              </a:ext>
+            </a:extLst>
+          </p:cNvPr>
+          <p:cNvCxnSpPr/>
+          <p:nvPr/>
+        </p:nvCxnSpPr>
+        <p:spPr>
+          <a:xfrm>
+            <a:off x="3874416" y="1329180"/>
+            <a:ext cx="707010" cy="0"/>
+          </a:xfrm>
+          <a:prstGeom prst="line">
+            <a:avLst/>
+          </a:prstGeom>
+          <a:ln w="28575">
+            <a:solidFill>
+              <a:srgbClr val="FF0000"/>
+            </a:solidFill>
+          </a:ln>
+        </p:spPr>
+        <p:style>
+          <a:lnRef idx="1">
+            <a:schemeClr val="accent1"/>
+          </a:lnRef>
+          <a:fillRef idx="0">
+            <a:schemeClr val="accent1"/>
+          </a:fillRef>
+          <a:effectRef idx="0">
+            <a:schemeClr val="accent1"/>
+          </a:effectRef>
+          <a:fontRef idx="minor">
+            <a:schemeClr val="tx1"/>
+          </a:fontRef>
+        </p:style>
+      </p:cxnSp>
+      <p:grpSp>
+        <p:nvGrpSpPr>
+          <p:cNvPr id="10" name="Group 9">
+            <a:extLst>
+              <a:ext uri="{FF2B5EF4-FFF2-40B4-BE49-F238E27FC236}">
+                <a16:creationId xmlns:a16="http://schemas.microsoft.com/office/drawing/2014/main" id="{3320EF52-7750-8DBE-F0EF-10C7C941607D}"/>
+              </a:ext>
+            </a:extLst>
+          </p:cNvPr>
+          <p:cNvGrpSpPr/>
+          <p:nvPr/>
+        </p:nvGrpSpPr>
+        <p:grpSpPr>
+          <a:xfrm>
+            <a:off x="2821443" y="2477613"/>
+            <a:ext cx="7105650" cy="1176162"/>
+            <a:chOff x="3253278" y="2631158"/>
+            <a:chExt cx="7105650" cy="1176162"/>
+          </a:xfrm>
+        </p:grpSpPr>
+        <p:pic>
+          <p:nvPicPr>
+            <p:cNvPr id="14" name="Picture 13">
+              <a:extLst>
+                <a:ext uri="{FF2B5EF4-FFF2-40B4-BE49-F238E27FC236}">
+                  <a16:creationId xmlns:a16="http://schemas.microsoft.com/office/drawing/2014/main" id="{0C6BBF59-292C-F40B-C16E-2F25AD37C380}"/>
+                </a:ext>
+              </a:extLst>
+            </p:cNvPr>
+            <p:cNvPicPr>
+              <a:picLocks noChangeAspect="1"/>
+            </p:cNvPicPr>
+            <p:nvPr/>
+          </p:nvPicPr>
+          <p:blipFill>
+            <a:blip r:embed="rId4"/>
+            <a:stretch>
+              <a:fillRect/>
+            </a:stretch>
+          </p:blipFill>
+          <p:spPr>
+            <a:xfrm>
+              <a:off x="3253278" y="2631158"/>
+              <a:ext cx="7105650" cy="1162050"/>
+            </a:xfrm>
+            <a:prstGeom prst="rect">
+              <a:avLst/>
+            </a:prstGeom>
+          </p:spPr>
+        </p:pic>
+        <p:cxnSp>
+          <p:nvCxnSpPr>
+            <p:cNvPr id="16" name="Straight Connector 15">
+              <a:extLst>
+                <a:ext uri="{FF2B5EF4-FFF2-40B4-BE49-F238E27FC236}">
+                  <a16:creationId xmlns:a16="http://schemas.microsoft.com/office/drawing/2014/main" id="{BB0AE702-0170-0164-2CE0-3766A578F737}"/>
+                </a:ext>
+              </a:extLst>
+            </p:cNvPr>
+            <p:cNvCxnSpPr/>
+            <p:nvPr/>
+          </p:nvCxnSpPr>
+          <p:spPr>
+            <a:xfrm>
+              <a:off x="4347329" y="3357513"/>
+              <a:ext cx="707010" cy="0"/>
+            </a:xfrm>
+            <a:prstGeom prst="line">
+              <a:avLst/>
+            </a:prstGeom>
+            <a:ln w="28575">
+              <a:solidFill>
+                <a:srgbClr val="FF0000"/>
+              </a:solidFill>
+            </a:ln>
+          </p:spPr>
+          <p:style>
+            <a:lnRef idx="1">
+              <a:schemeClr val="accent1"/>
+            </a:lnRef>
+            <a:fillRef idx="0">
+              <a:schemeClr val="accent1"/>
+            </a:fillRef>
+            <a:effectRef idx="0">
+              <a:schemeClr val="accent1"/>
+            </a:effectRef>
+            <a:fontRef idx="minor">
+              <a:schemeClr val="tx1"/>
+            </a:fontRef>
+          </p:style>
+        </p:cxnSp>
+        <p:cxnSp>
+          <p:nvCxnSpPr>
+            <p:cNvPr id="17" name="Straight Connector 16">
+              <a:extLst>
+                <a:ext uri="{FF2B5EF4-FFF2-40B4-BE49-F238E27FC236}">
+                  <a16:creationId xmlns:a16="http://schemas.microsoft.com/office/drawing/2014/main" id="{3A4B5A8F-B82A-132A-B22B-6C3958470EF4}"/>
+                </a:ext>
+              </a:extLst>
+            </p:cNvPr>
+            <p:cNvCxnSpPr/>
+            <p:nvPr/>
+          </p:nvCxnSpPr>
+          <p:spPr>
+            <a:xfrm>
+              <a:off x="6997832" y="3351228"/>
+              <a:ext cx="707010" cy="0"/>
+            </a:xfrm>
+            <a:prstGeom prst="line">
+              <a:avLst/>
+            </a:prstGeom>
+            <a:ln w="28575">
+              <a:solidFill>
+                <a:srgbClr val="FF0000"/>
+              </a:solidFill>
+            </a:ln>
+          </p:spPr>
+          <p:style>
+            <a:lnRef idx="1">
+              <a:schemeClr val="accent1"/>
+            </a:lnRef>
+            <a:fillRef idx="0">
+              <a:schemeClr val="accent1"/>
+            </a:fillRef>
+            <a:effectRef idx="0">
+              <a:schemeClr val="accent1"/>
+            </a:effectRef>
+            <a:fontRef idx="minor">
+              <a:schemeClr val="tx1"/>
+            </a:fontRef>
+          </p:style>
+        </p:cxnSp>
+        <p:sp>
+          <p:nvSpPr>
+            <p:cNvPr id="18" name="TextBox 17">
+              <a:extLst>
+                <a:ext uri="{FF2B5EF4-FFF2-40B4-BE49-F238E27FC236}">
+                  <a16:creationId xmlns:a16="http://schemas.microsoft.com/office/drawing/2014/main" id="{BD0EE40B-AA63-9048-6E17-C6F6B6E17449}"/>
+                </a:ext>
+              </a:extLst>
+            </p:cNvPr>
+            <p:cNvSpPr txBox="1"/>
+            <p:nvPr/>
+          </p:nvSpPr>
+          <p:spPr>
+            <a:xfrm>
+              <a:off x="4484631" y="3401290"/>
+              <a:ext cx="1771911" cy="253916"/>
+            </a:xfrm>
+            <a:prstGeom prst="rect">
+              <a:avLst/>
+            </a:prstGeom>
+            <a:noFill/>
+          </p:spPr>
+          <p:txBody>
+            <a:bodyPr wrap="square" rtlCol="0">
+              <a:spAutoFit/>
+            </a:bodyPr>
+            <a:lstStyle>
+              <a:defPPr>
+                <a:defRPr lang="LID4096"/>
+              </a:defPPr>
+              <a:lvl1pPr>
+                <a:defRPr sz="1050" b="1">
+                  <a:solidFill>
+                    <a:srgbClr val="0000FF"/>
+                  </a:solidFill>
+                </a:defRPr>
+              </a:lvl1pPr>
+            </a:lstStyle>
+            <a:p>
               <a:r>
                 <a:rPr lang="en-GB" noProof="0" dirty="0"/>
-                <a:t>Diffusion</a:t>
+                <a:t>Volume</a:t>
+              </a:r>
+              <a:endParaRPr lang="en-GB" sz="1400" noProof="0" dirty="0">
+                <a:solidFill>
+                  <a:srgbClr val="FF0000"/>
+                </a:solidFill>
+              </a:endParaRPr>
+            </a:p>
+          </p:txBody>
+        </p:sp>
+        <p:sp>
+          <p:nvSpPr>
+            <p:cNvPr id="19" name="TextBox 18">
+              <a:extLst>
+                <a:ext uri="{FF2B5EF4-FFF2-40B4-BE49-F238E27FC236}">
+                  <a16:creationId xmlns:a16="http://schemas.microsoft.com/office/drawing/2014/main" id="{3F428DFB-4593-E6B6-D972-D03A354CABDF}"/>
+                </a:ext>
+              </a:extLst>
+            </p:cNvPr>
+            <p:cNvSpPr txBox="1"/>
+            <p:nvPr/>
+          </p:nvSpPr>
+          <p:spPr>
+            <a:xfrm>
+              <a:off x="7025786" y="3401290"/>
+              <a:ext cx="1771911" cy="253916"/>
+            </a:xfrm>
+            <a:prstGeom prst="rect">
+              <a:avLst/>
+            </a:prstGeom>
+            <a:noFill/>
+          </p:spPr>
+          <p:txBody>
+            <a:bodyPr wrap="square" rtlCol="0">
+              <a:spAutoFit/>
+            </a:bodyPr>
+            <a:lstStyle>
+              <a:defPPr>
+                <a:defRPr lang="LID4096"/>
+              </a:defPPr>
+              <a:lvl1pPr>
+                <a:defRPr sz="1050" b="1">
+                  <a:solidFill>
+                    <a:srgbClr val="0000FF"/>
+                  </a:solidFill>
+                </a:defRPr>
+              </a:lvl1pPr>
+            </a:lstStyle>
+            <a:p>
+              <a:r>
+                <a:rPr lang="en-GB" noProof="0" dirty="0"/>
+                <a:t>Surfaces</a:t>
+              </a:r>
+              <a:endParaRPr lang="en-GB" sz="1400" noProof="0" dirty="0">
+                <a:solidFill>
+                  <a:srgbClr val="FF0000"/>
+                </a:solidFill>
+              </a:endParaRPr>
+            </a:p>
+          </p:txBody>
+        </p:sp>
+        <p:sp>
+          <p:nvSpPr>
+            <p:cNvPr id="20" name="TextBox 19">
+              <a:extLst>
+                <a:ext uri="{FF2B5EF4-FFF2-40B4-BE49-F238E27FC236}">
+                  <a16:creationId xmlns:a16="http://schemas.microsoft.com/office/drawing/2014/main" id="{6D2060A0-AFEA-43A3-3CF1-146EF0CC6EB9}"/>
+                </a:ext>
+              </a:extLst>
+            </p:cNvPr>
+            <p:cNvSpPr txBox="1"/>
+            <p:nvPr/>
+          </p:nvSpPr>
+          <p:spPr>
+            <a:xfrm>
+              <a:off x="7281486" y="3553404"/>
+              <a:ext cx="1771911" cy="253916"/>
+            </a:xfrm>
+            <a:prstGeom prst="rect">
+              <a:avLst/>
+            </a:prstGeom>
+            <a:noFill/>
+          </p:spPr>
+          <p:txBody>
+            <a:bodyPr wrap="square" rtlCol="0">
+              <a:spAutoFit/>
+            </a:bodyPr>
+            <a:lstStyle>
+              <a:defPPr>
+                <a:defRPr lang="LID4096"/>
+              </a:defPPr>
+              <a:lvl1pPr>
+                <a:defRPr sz="1050" b="1">
+                  <a:solidFill>
+                    <a:srgbClr val="0000FF"/>
+                  </a:solidFill>
+                </a:defRPr>
+              </a:lvl1pPr>
+            </a:lstStyle>
+            <a:p>
+              <a:r>
+                <a:rPr lang="en-GB" noProof="0" dirty="0"/>
+                <a:t>Cell Faces </a:t>
               </a:r>
               <a:endParaRPr lang="en-GB" sz="1400" noProof="0" dirty="0">
                 <a:solidFill>
@@ -13287,10 +15282,10 @@
       </p:grpSp>
       <p:pic>
         <p:nvPicPr>
-          <p:cNvPr id="15" name="Picture 14">
-            <a:extLst>
-              <a:ext uri="{FF2B5EF4-FFF2-40B4-BE49-F238E27FC236}">
-                <a16:creationId xmlns:a16="http://schemas.microsoft.com/office/drawing/2014/main" id="{12FA4556-30DB-BCB6-590C-022479A97621}"/>
+          <p:cNvPr id="23" name="Picture 22">
+            <a:extLst>
+              <a:ext uri="{FF2B5EF4-FFF2-40B4-BE49-F238E27FC236}">
+                <a16:creationId xmlns:a16="http://schemas.microsoft.com/office/drawing/2014/main" id="{15EE9415-72CE-159C-1643-2886814920BA}"/>
               </a:ext>
             </a:extLst>
           </p:cNvPr>
@@ -13300,15 +15295,15 @@
           <p:nvPr/>
         </p:nvPicPr>
         <p:blipFill>
-          <a:blip r:embed="rId4"/>
+          <a:blip r:embed="rId5"/>
           <a:stretch>
             <a:fillRect/>
           </a:stretch>
         </p:blipFill>
         <p:spPr>
           <a:xfrm>
-            <a:off x="7006450" y="2849994"/>
-            <a:ext cx="4826299" cy="1818605"/>
+            <a:off x="8971865" y="4920358"/>
+            <a:ext cx="2930034" cy="1585372"/>
           </a:xfrm>
           <a:prstGeom prst="rect">
             <a:avLst/>
@@ -13329,10 +15324,10 @@
       </p:pic>
       <p:pic>
         <p:nvPicPr>
-          <p:cNvPr id="17" name="Picture 16">
-            <a:extLst>
-              <a:ext uri="{FF2B5EF4-FFF2-40B4-BE49-F238E27FC236}">
-                <a16:creationId xmlns:a16="http://schemas.microsoft.com/office/drawing/2014/main" id="{912C531B-4958-06A9-5082-8306EB991D71}"/>
+          <p:cNvPr id="37" name="Picture 36">
+            <a:extLst>
+              <a:ext uri="{FF2B5EF4-FFF2-40B4-BE49-F238E27FC236}">
+                <a16:creationId xmlns:a16="http://schemas.microsoft.com/office/drawing/2014/main" id="{1556199B-CA6B-CA2D-E75F-4FBBDE0DCC14}"/>
               </a:ext>
             </a:extLst>
           </p:cNvPr>
@@ -13342,22 +15337,23 @@
           <p:nvPr/>
         </p:nvPicPr>
         <p:blipFill>
-          <a:blip r:embed="rId5"/>
+          <a:blip r:embed="rId6"/>
+          <a:srcRect l="50848" t="8857" b="79704"/>
           <a:stretch>
             <a:fillRect/>
           </a:stretch>
         </p:blipFill>
         <p:spPr>
           <a:xfrm>
-            <a:off x="6967590" y="4841062"/>
-            <a:ext cx="4904017" cy="1795290"/>
+            <a:off x="325343" y="177197"/>
+            <a:ext cx="2668857" cy="439962"/>
           </a:xfrm>
           <a:prstGeom prst="rect">
             <a:avLst/>
           </a:prstGeom>
           <a:ln>
             <a:solidFill>
-              <a:schemeClr val="tx1"/>
+              <a:srgbClr val="FF0000"/>
             </a:solidFill>
           </a:ln>
           <a:effectLst>
@@ -13369,10 +15365,360 @@
           </a:effectLst>
         </p:spPr>
       </p:pic>
+      <p:sp>
+        <p:nvSpPr>
+          <p:cNvPr id="44" name="Arrow: Down 43">
+            <a:extLst>
+              <a:ext uri="{FF2B5EF4-FFF2-40B4-BE49-F238E27FC236}">
+                <a16:creationId xmlns:a16="http://schemas.microsoft.com/office/drawing/2014/main" id="{96249C6B-28A3-3414-CD5A-EB25BEC13452}"/>
+              </a:ext>
+            </a:extLst>
+          </p:cNvPr>
+          <p:cNvSpPr/>
+          <p:nvPr/>
+        </p:nvSpPr>
+        <p:spPr>
+          <a:xfrm rot="7696881">
+            <a:off x="2302398" y="415177"/>
+            <a:ext cx="175414" cy="203496"/>
+          </a:xfrm>
+          <a:prstGeom prst="downArrow">
+            <a:avLst/>
+          </a:prstGeom>
+          <a:solidFill>
+            <a:srgbClr val="0000FF"/>
+          </a:solidFill>
+        </p:spPr>
+        <p:style>
+          <a:lnRef idx="2">
+            <a:schemeClr val="accent1">
+              <a:shade val="15000"/>
+            </a:schemeClr>
+          </a:lnRef>
+          <a:fillRef idx="1">
+            <a:schemeClr val="accent1"/>
+          </a:fillRef>
+          <a:effectRef idx="0">
+            <a:schemeClr val="accent1"/>
+          </a:effectRef>
+          <a:fontRef idx="minor">
+            <a:schemeClr val="lt1"/>
+          </a:fontRef>
+        </p:style>
+        <p:txBody>
+          <a:bodyPr rtlCol="0" anchor="ctr"/>
+          <a:lstStyle/>
+          <a:p>
+            <a:pPr algn="ctr"/>
+            <a:endParaRPr lang="LID4096"/>
+          </a:p>
+        </p:txBody>
+      </p:sp>
+      <p:pic>
+        <p:nvPicPr>
+          <p:cNvPr id="46" name="Picture 45">
+            <a:extLst>
+              <a:ext uri="{FF2B5EF4-FFF2-40B4-BE49-F238E27FC236}">
+                <a16:creationId xmlns:a16="http://schemas.microsoft.com/office/drawing/2014/main" id="{8572AC6B-B463-5D27-4F7A-584F9D88B810}"/>
+              </a:ext>
+            </a:extLst>
+          </p:cNvPr>
+          <p:cNvPicPr>
+            <a:picLocks noChangeAspect="1"/>
+          </p:cNvPicPr>
+          <p:nvPr/>
+        </p:nvPicPr>
+        <p:blipFill>
+          <a:blip r:embed="rId7"/>
+          <a:stretch>
+            <a:fillRect/>
+          </a:stretch>
+        </p:blipFill>
+        <p:spPr>
+          <a:xfrm>
+            <a:off x="9927093" y="3275923"/>
+            <a:ext cx="1903901" cy="1436276"/>
+          </a:xfrm>
+          <a:prstGeom prst="rect">
+            <a:avLst/>
+          </a:prstGeom>
+        </p:spPr>
+      </p:pic>
+      <p:sp>
+        <p:nvSpPr>
+          <p:cNvPr id="48" name="TextBox 47">
+            <a:extLst>
+              <a:ext uri="{FF2B5EF4-FFF2-40B4-BE49-F238E27FC236}">
+                <a16:creationId xmlns:a16="http://schemas.microsoft.com/office/drawing/2014/main" id="{0AF3D598-EF14-548C-9FB4-AA3F3EB197FD}"/>
+              </a:ext>
+            </a:extLst>
+          </p:cNvPr>
+          <p:cNvSpPr txBox="1"/>
+          <p:nvPr/>
+        </p:nvSpPr>
+        <p:spPr>
+          <a:xfrm>
+            <a:off x="2903321" y="3686284"/>
+            <a:ext cx="5118048" cy="307777"/>
+          </a:xfrm>
+          <a:prstGeom prst="rect">
+            <a:avLst/>
+          </a:prstGeom>
+          <a:solidFill>
+            <a:schemeClr val="accent4">
+              <a:lumMod val="40000"/>
+              <a:lumOff val="60000"/>
+            </a:schemeClr>
+          </a:solidFill>
+          <a:effectLst>
+            <a:outerShdw blurRad="50800" dist="38100" dir="8100000" algn="tr" rotWithShape="0">
+              <a:prstClr val="black">
+                <a:alpha val="40000"/>
+              </a:prstClr>
+            </a:outerShdw>
+          </a:effectLst>
+        </p:spPr>
+        <p:txBody>
+          <a:bodyPr wrap="square">
+            <a:spAutoFit/>
+          </a:bodyPr>
+          <a:lstStyle/>
+          <a:p>
+            <a:pPr algn="ctr"/>
+            <a:r>
+              <a:rPr lang="LID4096" sz="1400" b="1" dirty="0"/>
+              <a:t>|| _upwind || _linear || _linearUpwind || _quick || _cubic ||</a:t>
+            </a:r>
+          </a:p>
+        </p:txBody>
+      </p:sp>
+      <p:sp>
+        <p:nvSpPr>
+          <p:cNvPr id="27" name="TextBox 26">
+            <a:extLst>
+              <a:ext uri="{FF2B5EF4-FFF2-40B4-BE49-F238E27FC236}">
+                <a16:creationId xmlns:a16="http://schemas.microsoft.com/office/drawing/2014/main" id="{B98523BB-6DC0-86D4-6602-065CB8C90B92}"/>
+              </a:ext>
+            </a:extLst>
+          </p:cNvPr>
+          <p:cNvSpPr txBox="1"/>
+          <p:nvPr/>
+        </p:nvSpPr>
+        <p:spPr>
+          <a:xfrm>
+            <a:off x="9041137" y="5053275"/>
+            <a:ext cx="1771911" cy="261610"/>
+          </a:xfrm>
+          <a:prstGeom prst="rect">
+            <a:avLst/>
+          </a:prstGeom>
+          <a:noFill/>
+        </p:spPr>
+        <p:txBody>
+          <a:bodyPr wrap="square" rtlCol="0">
+            <a:spAutoFit/>
+          </a:bodyPr>
+          <a:lstStyle>
+            <a:defPPr>
+              <a:defRPr lang="LID4096"/>
+            </a:defPPr>
+            <a:lvl1pPr>
+              <a:defRPr sz="1050" b="1">
+                <a:solidFill>
+                  <a:srgbClr val="0000FF"/>
+                </a:solidFill>
+              </a:defRPr>
+            </a:lvl1pPr>
+          </a:lstStyle>
+          <a:p>
+            <a:r>
+              <a:rPr lang="en-GB" sz="1100" noProof="0" dirty="0"/>
+              <a:t>f</a:t>
+            </a:r>
+            <a:endParaRPr lang="en-GB" sz="1400" noProof="0" dirty="0">
+              <a:solidFill>
+                <a:srgbClr val="FF0000"/>
+              </a:solidFill>
+            </a:endParaRPr>
+          </a:p>
+        </p:txBody>
+      </p:sp>
+      <p:sp>
+        <p:nvSpPr>
+          <p:cNvPr id="2" name="TextBox 1">
+            <a:extLst>
+              <a:ext uri="{FF2B5EF4-FFF2-40B4-BE49-F238E27FC236}">
+                <a16:creationId xmlns:a16="http://schemas.microsoft.com/office/drawing/2014/main" id="{3FB5DD4F-8FE5-C04F-5697-0BA006507D12}"/>
+              </a:ext>
+            </a:extLst>
+          </p:cNvPr>
+          <p:cNvSpPr txBox="1"/>
+          <p:nvPr/>
+        </p:nvSpPr>
+        <p:spPr>
+          <a:xfrm>
+            <a:off x="6096000" y="4879165"/>
+            <a:ext cx="2560030" cy="1815882"/>
+          </a:xfrm>
+          <a:prstGeom prst="rect">
+            <a:avLst/>
+          </a:prstGeom>
+          <a:noFill/>
+        </p:spPr>
+        <p:txBody>
+          <a:bodyPr wrap="square">
+            <a:spAutoFit/>
+          </a:bodyPr>
+          <a:lstStyle/>
+          <a:p>
+            <a:pPr algn="l"/>
+            <a:r>
+              <a:rPr lang="en-US" sz="1400" b="0" i="0" u="none" strike="noStrike" baseline="0" dirty="0">
+                <a:solidFill>
+                  <a:srgbClr val="FF0000"/>
+                </a:solidFill>
+                <a:latin typeface="CMR12"/>
+              </a:rPr>
+              <a:t>4.4.1 Interpolation schemes</a:t>
+            </a:r>
+          </a:p>
+          <a:p>
+            <a:pPr algn="l"/>
+            <a:endParaRPr lang="en-US" sz="1400" b="0" i="0" u="none" strike="noStrike" baseline="0" dirty="0">
+              <a:solidFill>
+                <a:srgbClr val="FF0000"/>
+              </a:solidFill>
+              <a:latin typeface="CMR12"/>
+            </a:endParaRPr>
+          </a:p>
+          <a:p>
+            <a:pPr algn="l"/>
+            <a:r>
+              <a:rPr lang="fr-FR" sz="1400" dirty="0"/>
+              <a:t>4.4.2 Surface normal ∆ </a:t>
+            </a:r>
+            <a:r>
+              <a:rPr lang="fr-FR" sz="1400" dirty="0" err="1"/>
+              <a:t>schemes</a:t>
+            </a:r>
+            <a:endParaRPr lang="en-US" sz="1400" b="0" i="0" u="none" strike="noStrike" baseline="0" dirty="0">
+              <a:solidFill>
+                <a:srgbClr val="FF0000"/>
+              </a:solidFill>
+              <a:latin typeface="CMR12"/>
+            </a:endParaRPr>
+          </a:p>
+          <a:p>
+            <a:pPr algn="l"/>
+            <a:r>
+              <a:rPr lang="en-US" sz="1400" b="0" i="0" u="none" strike="noStrike" baseline="0" dirty="0">
+                <a:solidFill>
+                  <a:srgbClr val="FF0000"/>
+                </a:solidFill>
+                <a:latin typeface="CMR12"/>
+              </a:rPr>
+              <a:t>4.4.3 Gradient schemes</a:t>
+            </a:r>
+            <a:endParaRPr lang="en-US" sz="1400" b="0" i="0" u="none" strike="noStrike" baseline="0" dirty="0">
+              <a:solidFill>
+                <a:srgbClr val="000000"/>
+              </a:solidFill>
+              <a:latin typeface="CMR12"/>
+            </a:endParaRPr>
+          </a:p>
+          <a:p>
+            <a:pPr algn="l"/>
+            <a:r>
+              <a:rPr lang="en-US" sz="1400" b="0" i="0" u="none" strike="noStrike" baseline="0" dirty="0">
+                <a:latin typeface="CMR12"/>
+              </a:rPr>
+              <a:t>4.4.4 Laplacian schemes</a:t>
+            </a:r>
+          </a:p>
+          <a:p>
+            <a:pPr algn="l"/>
+            <a:r>
+              <a:rPr lang="en-US" sz="1400" b="1" i="0" u="none" strike="noStrike" baseline="0" dirty="0">
+                <a:solidFill>
+                  <a:srgbClr val="0000FF"/>
+                </a:solidFill>
+                <a:latin typeface="CMR12"/>
+              </a:rPr>
+              <a:t>4.4.5 Divergence schemes ____</a:t>
+            </a:r>
+          </a:p>
+          <a:p>
+            <a:pPr algn="l"/>
+            <a:r>
+              <a:rPr lang="en-US" sz="1400" b="0" i="0" u="none" strike="noStrike" baseline="0" dirty="0">
+                <a:latin typeface="CMR12"/>
+              </a:rPr>
+              <a:t>4.4.6 Time schemes</a:t>
+            </a:r>
+          </a:p>
+          <a:p>
+            <a:pPr algn="l"/>
+            <a:r>
+              <a:rPr lang="en-US" sz="1400" b="0" i="0" u="none" strike="noStrike" baseline="0" dirty="0">
+                <a:solidFill>
+                  <a:srgbClr val="FF0000"/>
+                </a:solidFill>
+                <a:latin typeface="CMR12"/>
+              </a:rPr>
+              <a:t>4.4.7 Flux calculation</a:t>
+            </a:r>
+            <a:endParaRPr lang="LID4096" sz="1400" dirty="0"/>
+          </a:p>
+        </p:txBody>
+      </p:sp>
+      <p:sp>
+        <p:nvSpPr>
+          <p:cNvPr id="12" name="TextBox 11">
+            <a:extLst>
+              <a:ext uri="{FF2B5EF4-FFF2-40B4-BE49-F238E27FC236}">
+                <a16:creationId xmlns:a16="http://schemas.microsoft.com/office/drawing/2014/main" id="{D4C1C649-B028-0626-52B7-3BB59C5C0A68}"/>
+              </a:ext>
+            </a:extLst>
+          </p:cNvPr>
+          <p:cNvSpPr txBox="1"/>
+          <p:nvPr/>
+        </p:nvSpPr>
+        <p:spPr>
+          <a:xfrm>
+            <a:off x="2920144" y="5078976"/>
+            <a:ext cx="3489365" cy="461665"/>
+          </a:xfrm>
+          <a:prstGeom prst="rect">
+            <a:avLst/>
+          </a:prstGeom>
+          <a:noFill/>
+        </p:spPr>
+        <p:txBody>
+          <a:bodyPr wrap="square">
+            <a:spAutoFit/>
+          </a:bodyPr>
+          <a:lstStyle/>
+          <a:p>
+            <a:r>
+              <a:rPr lang="en-GB" sz="1200" b="0" i="0" u="none" strike="noStrike" baseline="0" dirty="0">
+                <a:latin typeface="CMBX12"/>
+              </a:rPr>
+              <a:t>4.4.1.1 Schemes for strictly bounded scalar fields</a:t>
+            </a:r>
+          </a:p>
+          <a:p>
+            <a:r>
+              <a:rPr lang="en-GB" sz="1200" dirty="0"/>
+              <a:t>4.4.1.2 Schemes for vector fields</a:t>
+            </a:r>
+            <a:endParaRPr lang="LID4096" sz="1200" dirty="0"/>
+          </a:p>
+        </p:txBody>
+      </p:sp>
     </p:spTree>
     <p:extLst>
       <p:ext uri="{BB962C8B-B14F-4D97-AF65-F5344CB8AC3E}">
-        <p14:creationId xmlns:p14="http://schemas.microsoft.com/office/powerpoint/2010/main" val="342490078"/>
+        <p14:creationId xmlns:p14="http://schemas.microsoft.com/office/powerpoint/2010/main" val="2133100591"/>
       </p:ext>
     </p:extLst>
   </p:cSld>

--- a/04_OpenFoam/openFoam_beta.pptx
+++ b/04_OpenFoam/openFoam_beta.pptx
@@ -271,7 +271,7 @@
           <a:p>
             <a:fld id="{9D4686FF-3DC0-4D03-9102-64E826D8EE6E}" type="datetimeFigureOut">
               <a:rPr lang="LID4096" smtClean="0"/>
-              <a:t>09/16/2026</a:t>
+              <a:t>09/29/2026</a:t>
             </a:fld>
             <a:endParaRPr lang="LID4096"/>
           </a:p>
@@ -471,7 +471,7 @@
           <a:p>
             <a:fld id="{9D4686FF-3DC0-4D03-9102-64E826D8EE6E}" type="datetimeFigureOut">
               <a:rPr lang="LID4096" smtClean="0"/>
-              <a:t>09/16/2026</a:t>
+              <a:t>09/29/2026</a:t>
             </a:fld>
             <a:endParaRPr lang="LID4096"/>
           </a:p>
@@ -681,7 +681,7 @@
           <a:p>
             <a:fld id="{9D4686FF-3DC0-4D03-9102-64E826D8EE6E}" type="datetimeFigureOut">
               <a:rPr lang="LID4096" smtClean="0"/>
-              <a:t>09/16/2026</a:t>
+              <a:t>09/29/2026</a:t>
             </a:fld>
             <a:endParaRPr lang="LID4096"/>
           </a:p>
@@ -881,7 +881,7 @@
           <a:p>
             <a:fld id="{9D4686FF-3DC0-4D03-9102-64E826D8EE6E}" type="datetimeFigureOut">
               <a:rPr lang="LID4096" smtClean="0"/>
-              <a:t>09/16/2026</a:t>
+              <a:t>09/29/2026</a:t>
             </a:fld>
             <a:endParaRPr lang="LID4096"/>
           </a:p>
@@ -1157,7 +1157,7 @@
           <a:p>
             <a:fld id="{9D4686FF-3DC0-4D03-9102-64E826D8EE6E}" type="datetimeFigureOut">
               <a:rPr lang="LID4096" smtClean="0"/>
-              <a:t>09/16/2026</a:t>
+              <a:t>09/29/2026</a:t>
             </a:fld>
             <a:endParaRPr lang="LID4096"/>
           </a:p>
@@ -1425,7 +1425,7 @@
           <a:p>
             <a:fld id="{9D4686FF-3DC0-4D03-9102-64E826D8EE6E}" type="datetimeFigureOut">
               <a:rPr lang="LID4096" smtClean="0"/>
-              <a:t>09/16/2026</a:t>
+              <a:t>09/29/2026</a:t>
             </a:fld>
             <a:endParaRPr lang="LID4096"/>
           </a:p>
@@ -1840,7 +1840,7 @@
           <a:p>
             <a:fld id="{9D4686FF-3DC0-4D03-9102-64E826D8EE6E}" type="datetimeFigureOut">
               <a:rPr lang="LID4096" smtClean="0"/>
-              <a:t>09/16/2026</a:t>
+              <a:t>09/29/2026</a:t>
             </a:fld>
             <a:endParaRPr lang="LID4096"/>
           </a:p>
@@ -1982,7 +1982,7 @@
           <a:p>
             <a:fld id="{9D4686FF-3DC0-4D03-9102-64E826D8EE6E}" type="datetimeFigureOut">
               <a:rPr lang="LID4096" smtClean="0"/>
-              <a:t>09/16/2026</a:t>
+              <a:t>09/29/2026</a:t>
             </a:fld>
             <a:endParaRPr lang="LID4096"/>
           </a:p>
@@ -2095,7 +2095,7 @@
           <a:p>
             <a:fld id="{9D4686FF-3DC0-4D03-9102-64E826D8EE6E}" type="datetimeFigureOut">
               <a:rPr lang="LID4096" smtClean="0"/>
-              <a:t>09/16/2026</a:t>
+              <a:t>09/29/2026</a:t>
             </a:fld>
             <a:endParaRPr lang="LID4096"/>
           </a:p>
@@ -2408,7 +2408,7 @@
           <a:p>
             <a:fld id="{9D4686FF-3DC0-4D03-9102-64E826D8EE6E}" type="datetimeFigureOut">
               <a:rPr lang="LID4096" smtClean="0"/>
-              <a:t>09/16/2026</a:t>
+              <a:t>09/29/2026</a:t>
             </a:fld>
             <a:endParaRPr lang="LID4096"/>
           </a:p>
@@ -2697,7 +2697,7 @@
           <a:p>
             <a:fld id="{9D4686FF-3DC0-4D03-9102-64E826D8EE6E}" type="datetimeFigureOut">
               <a:rPr lang="LID4096" smtClean="0"/>
-              <a:t>09/16/2026</a:t>
+              <a:t>09/29/2026</a:t>
             </a:fld>
             <a:endParaRPr lang="LID4096"/>
           </a:p>
@@ -2940,7 +2940,7 @@
           <a:p>
             <a:fld id="{9D4686FF-3DC0-4D03-9102-64E826D8EE6E}" type="datetimeFigureOut">
               <a:rPr lang="LID4096" smtClean="0"/>
-              <a:t>09/16/2026</a:t>
+              <a:t>09/29/2026</a:t>
             </a:fld>
             <a:endParaRPr lang="LID4096"/>
           </a:p>
@@ -4154,7 +4154,7 @@
         </p:blipFill>
         <p:spPr>
           <a:xfrm>
-            <a:off x="3003641" y="149936"/>
+            <a:off x="3509208" y="250660"/>
             <a:ext cx="2438791" cy="1654384"/>
           </a:xfrm>
           <a:prstGeom prst="rect">
@@ -4967,7 +4967,7 @@
         </p:nvGrpSpPr>
         <p:grpSpPr>
           <a:xfrm>
-            <a:off x="3344533" y="2157178"/>
+            <a:off x="3528702" y="1968866"/>
             <a:ext cx="3318603" cy="1835946"/>
             <a:chOff x="3344533" y="2157178"/>
             <a:chExt cx="3318603" cy="1835946"/>
@@ -5075,7 +5075,7 @@
         </p:blipFill>
         <p:spPr>
           <a:xfrm>
-            <a:off x="7949327" y="2882593"/>
+            <a:off x="8458850" y="2890160"/>
             <a:ext cx="3513021" cy="1829303"/>
           </a:xfrm>
           <a:prstGeom prst="rect">
@@ -12729,8 +12729,8 @@
         </p:nvSpPr>
         <p:spPr>
           <a:xfrm>
-            <a:off x="1970203" y="358307"/>
-            <a:ext cx="1771911" cy="253916"/>
+            <a:off x="1804738" y="358307"/>
+            <a:ext cx="1771911" cy="338554"/>
           </a:xfrm>
           <a:prstGeom prst="rect">
             <a:avLst/>
@@ -12755,10 +12755,10 @@
           </a:lstStyle>
           <a:p>
             <a:r>
-              <a:rPr lang="en-GB" noProof="0" dirty="0"/>
+              <a:rPr lang="en-GB" sz="1600" noProof="0" dirty="0"/>
               <a:t>Convection</a:t>
             </a:r>
-            <a:endParaRPr lang="en-GB" sz="1400" noProof="0" dirty="0">
+            <a:endParaRPr lang="en-GB" sz="2400" noProof="0" dirty="0">
               <a:solidFill>
                 <a:srgbClr val="FF0000"/>
               </a:solidFill>
@@ -13255,7 +13255,7 @@
         <p:spPr>
           <a:xfrm>
             <a:off x="3572761" y="358307"/>
-            <a:ext cx="1771911" cy="253916"/>
+            <a:ext cx="1771911" cy="338554"/>
           </a:xfrm>
           <a:prstGeom prst="rect">
             <a:avLst/>
@@ -13280,10 +13280,10 @@
           </a:lstStyle>
           <a:p>
             <a:r>
-              <a:rPr lang="en-GB" noProof="0" dirty="0"/>
+              <a:rPr lang="en-GB" sz="1600" noProof="0" dirty="0"/>
               <a:t>Diffusion</a:t>
             </a:r>
-            <a:endParaRPr lang="en-GB" sz="1400" noProof="0" dirty="0">
+            <a:endParaRPr lang="en-GB" sz="2400" noProof="0" dirty="0">
               <a:solidFill>
                 <a:srgbClr val="FF0000"/>
               </a:solidFill>
@@ -14875,7 +14875,7 @@
         <p:spPr>
           <a:xfrm>
             <a:off x="3572761" y="358307"/>
-            <a:ext cx="1771911" cy="253916"/>
+            <a:ext cx="1771911" cy="338554"/>
           </a:xfrm>
           <a:prstGeom prst="rect">
             <a:avLst/>
@@ -14900,10 +14900,10 @@
           </a:lstStyle>
           <a:p>
             <a:r>
-              <a:rPr lang="en-GB" noProof="0" dirty="0"/>
+              <a:rPr lang="en-GB" sz="1600" noProof="0" dirty="0"/>
               <a:t>Diffusion</a:t>
             </a:r>
-            <a:endParaRPr lang="en-GB" sz="1400" noProof="0" dirty="0">
+            <a:endParaRPr lang="en-GB" sz="2400" noProof="0" dirty="0">
               <a:solidFill>
                 <a:srgbClr val="FF0000"/>
               </a:solidFill>
@@ -14911,48 +14911,6 @@
           </a:p>
         </p:txBody>
       </p:sp>
-      <p:pic>
-        <p:nvPicPr>
-          <p:cNvPr id="11" name="Picture 10">
-            <a:extLst>
-              <a:ext uri="{FF2B5EF4-FFF2-40B4-BE49-F238E27FC236}">
-                <a16:creationId xmlns:a16="http://schemas.microsoft.com/office/drawing/2014/main" id="{1695E33F-CB3C-0F32-BA6E-F4FBAE58C921}"/>
-              </a:ext>
-            </a:extLst>
-          </p:cNvPr>
-          <p:cNvPicPr>
-            <a:picLocks noChangeAspect="1"/>
-          </p:cNvPicPr>
-          <p:nvPr/>
-        </p:nvPicPr>
-        <p:blipFill>
-          <a:blip r:embed="rId3"/>
-          <a:stretch>
-            <a:fillRect/>
-          </a:stretch>
-        </p:blipFill>
-        <p:spPr>
-          <a:xfrm>
-            <a:off x="3150719" y="1731803"/>
-            <a:ext cx="3133725" cy="704850"/>
-          </a:xfrm>
-          <a:prstGeom prst="rect">
-            <a:avLst/>
-          </a:prstGeom>
-          <a:ln>
-            <a:solidFill>
-              <a:schemeClr val="tx1"/>
-            </a:solidFill>
-          </a:ln>
-          <a:effectLst>
-            <a:outerShdw blurRad="50800" dist="38100" dir="8100000" algn="tr" rotWithShape="0">
-              <a:prstClr val="black">
-                <a:alpha val="40000"/>
-              </a:prstClr>
-            </a:outerShdw>
-          </a:effectLst>
-        </p:spPr>
-      </p:pic>
       <p:cxnSp>
         <p:nvCxnSpPr>
           <p:cNvPr id="15" name="Straight Connector 14">
@@ -15029,7 +14987,7 @@
             <p:nvPr/>
           </p:nvPicPr>
           <p:blipFill>
-            <a:blip r:embed="rId4"/>
+            <a:blip r:embed="rId3"/>
             <a:stretch>
               <a:fillRect/>
             </a:stretch>
@@ -15295,7 +15253,7 @@
           <p:nvPr/>
         </p:nvPicPr>
         <p:blipFill>
-          <a:blip r:embed="rId5"/>
+          <a:blip r:embed="rId4"/>
           <a:stretch>
             <a:fillRect/>
           </a:stretch>
@@ -15324,10 +15282,10 @@
       </p:pic>
       <p:pic>
         <p:nvPicPr>
-          <p:cNvPr id="37" name="Picture 36">
-            <a:extLst>
-              <a:ext uri="{FF2B5EF4-FFF2-40B4-BE49-F238E27FC236}">
-                <a16:creationId xmlns:a16="http://schemas.microsoft.com/office/drawing/2014/main" id="{1556199B-CA6B-CA2D-E75F-4FBBDE0DCC14}"/>
+          <p:cNvPr id="46" name="Picture 45">
+            <a:extLst>
+              <a:ext uri="{FF2B5EF4-FFF2-40B4-BE49-F238E27FC236}">
+                <a16:creationId xmlns:a16="http://schemas.microsoft.com/office/drawing/2014/main" id="{8572AC6B-B463-5D27-4F7A-584F9D88B810}"/>
               </a:ext>
             </a:extLst>
           </p:cNvPr>
@@ -15337,99 +15295,7 @@
           <p:nvPr/>
         </p:nvPicPr>
         <p:blipFill>
-          <a:blip r:embed="rId6"/>
-          <a:srcRect l="50848" t="8857" b="79704"/>
-          <a:stretch>
-            <a:fillRect/>
-          </a:stretch>
-        </p:blipFill>
-        <p:spPr>
-          <a:xfrm>
-            <a:off x="325343" y="177197"/>
-            <a:ext cx="2668857" cy="439962"/>
-          </a:xfrm>
-          <a:prstGeom prst="rect">
-            <a:avLst/>
-          </a:prstGeom>
-          <a:ln>
-            <a:solidFill>
-              <a:srgbClr val="FF0000"/>
-            </a:solidFill>
-          </a:ln>
-          <a:effectLst>
-            <a:outerShdw blurRad="50800" dist="38100" dir="8100000" algn="tr" rotWithShape="0">
-              <a:prstClr val="black">
-                <a:alpha val="40000"/>
-              </a:prstClr>
-            </a:outerShdw>
-          </a:effectLst>
-        </p:spPr>
-      </p:pic>
-      <p:sp>
-        <p:nvSpPr>
-          <p:cNvPr id="44" name="Arrow: Down 43">
-            <a:extLst>
-              <a:ext uri="{FF2B5EF4-FFF2-40B4-BE49-F238E27FC236}">
-                <a16:creationId xmlns:a16="http://schemas.microsoft.com/office/drawing/2014/main" id="{96249C6B-28A3-3414-CD5A-EB25BEC13452}"/>
-              </a:ext>
-            </a:extLst>
-          </p:cNvPr>
-          <p:cNvSpPr/>
-          <p:nvPr/>
-        </p:nvSpPr>
-        <p:spPr>
-          <a:xfrm rot="7696881">
-            <a:off x="2302398" y="415177"/>
-            <a:ext cx="175414" cy="203496"/>
-          </a:xfrm>
-          <a:prstGeom prst="downArrow">
-            <a:avLst/>
-          </a:prstGeom>
-          <a:solidFill>
-            <a:srgbClr val="0000FF"/>
-          </a:solidFill>
-        </p:spPr>
-        <p:style>
-          <a:lnRef idx="2">
-            <a:schemeClr val="accent1">
-              <a:shade val="15000"/>
-            </a:schemeClr>
-          </a:lnRef>
-          <a:fillRef idx="1">
-            <a:schemeClr val="accent1"/>
-          </a:fillRef>
-          <a:effectRef idx="0">
-            <a:schemeClr val="accent1"/>
-          </a:effectRef>
-          <a:fontRef idx="minor">
-            <a:schemeClr val="lt1"/>
-          </a:fontRef>
-        </p:style>
-        <p:txBody>
-          <a:bodyPr rtlCol="0" anchor="ctr"/>
-          <a:lstStyle/>
-          <a:p>
-            <a:pPr algn="ctr"/>
-            <a:endParaRPr lang="LID4096"/>
-          </a:p>
-        </p:txBody>
-      </p:sp>
-      <p:pic>
-        <p:nvPicPr>
-          <p:cNvPr id="46" name="Picture 45">
-            <a:extLst>
-              <a:ext uri="{FF2B5EF4-FFF2-40B4-BE49-F238E27FC236}">
-                <a16:creationId xmlns:a16="http://schemas.microsoft.com/office/drawing/2014/main" id="{8572AC6B-B463-5D27-4F7A-584F9D88B810}"/>
-              </a:ext>
-            </a:extLst>
-          </p:cNvPr>
-          <p:cNvPicPr>
-            <a:picLocks noChangeAspect="1"/>
-          </p:cNvPicPr>
-          <p:nvPr/>
-        </p:nvPicPr>
-        <p:blipFill>
-          <a:blip r:embed="rId7"/>
+          <a:blip r:embed="rId5"/>
           <a:stretch>
             <a:fillRect/>
           </a:stretch>
@@ -15715,6 +15581,41 @@
           </a:p>
         </p:txBody>
       </p:sp>
+      <p:pic>
+        <p:nvPicPr>
+          <p:cNvPr id="3" name="Picture 2">
+            <a:extLst>
+              <a:ext uri="{FF2B5EF4-FFF2-40B4-BE49-F238E27FC236}">
+                <a16:creationId xmlns:a16="http://schemas.microsoft.com/office/drawing/2014/main" id="{CC1D1813-63A0-AAEC-9BF5-AB191F2BD7E0}"/>
+              </a:ext>
+            </a:extLst>
+          </p:cNvPr>
+          <p:cNvPicPr>
+            <a:picLocks noChangeAspect="1"/>
+          </p:cNvPicPr>
+          <p:nvPr/>
+        </p:nvPicPr>
+        <p:blipFill>
+          <a:blip r:embed="rId6"/>
+          <a:stretch>
+            <a:fillRect/>
+          </a:stretch>
+        </p:blipFill>
+        <p:spPr>
+          <a:xfrm>
+            <a:off x="3235681" y="1813458"/>
+            <a:ext cx="3038475" cy="476250"/>
+          </a:xfrm>
+          <a:prstGeom prst="rect">
+            <a:avLst/>
+          </a:prstGeom>
+          <a:ln w="38100">
+            <a:solidFill>
+              <a:srgbClr val="FFC000"/>
+            </a:solidFill>
+          </a:ln>
+        </p:spPr>
+      </p:pic>
     </p:spTree>
     <p:extLst>
       <p:ext uri="{BB962C8B-B14F-4D97-AF65-F5344CB8AC3E}">
